--- a/PPT/week1.pptx
+++ b/PPT/week1.pptx
@@ -4,10 +4,15 @@
   <p:sldMasterIdLst>
     <p:sldMasterId id="2147483648" r:id="rId1"/>
   </p:sldMasterIdLst>
+  <p:notesMasterIdLst>
+    <p:notesMasterId r:id="rId7"/>
+  </p:notesMasterIdLst>
   <p:sldIdLst>
     <p:sldId id="256" r:id="rId2"/>
-    <p:sldId id="257" r:id="rId3"/>
-    <p:sldId id="258" r:id="rId4"/>
+    <p:sldId id="258" r:id="rId3"/>
+    <p:sldId id="260" r:id="rId4"/>
+    <p:sldId id="259" r:id="rId5"/>
+    <p:sldId id="257" r:id="rId6"/>
   </p:sldIdLst>
   <p:sldSz cx="12192000" cy="6858000"/>
   <p:notesSz cx="6858000" cy="9144000"/>
@@ -106,7 +111,530 @@
       </a:defRPr>
     </a:lvl9pPr>
   </p:defaultTextStyle>
+  <p:extLst>
+    <p:ext uri="{EFAFB233-063F-42B5-8137-9DF3F51BA10A}">
+      <p15:sldGuideLst xmlns:p15="http://schemas.microsoft.com/office/powerpoint/2012/main"/>
+    </p:ext>
+  </p:extLst>
 </p:presentation>
+</file>
+
+<file path=ppt/notesMasters/notesMaster1.xml><?xml version="1.0" encoding="utf-8"?>
+<p:notesMaster xmlns:a="http://schemas.openxmlformats.org/drawingml/2006/main" xmlns:r="http://schemas.openxmlformats.org/officeDocument/2006/relationships" xmlns:p="http://schemas.openxmlformats.org/presentationml/2006/main">
+  <p:cSld>
+    <p:bg>
+      <p:bgRef idx="1001">
+        <a:schemeClr val="bg1"/>
+      </p:bgRef>
+    </p:bg>
+    <p:spTree>
+      <p:nvGrpSpPr>
+        <p:cNvPr id="1" name=""/>
+        <p:cNvGrpSpPr/>
+        <p:nvPr/>
+      </p:nvGrpSpPr>
+      <p:grpSpPr>
+        <a:xfrm>
+          <a:off x="0" y="0"/>
+          <a:ext cx="0" cy="0"/>
+          <a:chOff x="0" y="0"/>
+          <a:chExt cx="0" cy="0"/>
+        </a:xfrm>
+      </p:grpSpPr>
+      <p:sp>
+        <p:nvSpPr>
+          <p:cNvPr id="2" name="머리글 개체 틀 1"/>
+          <p:cNvSpPr>
+            <a:spLocks noGrp="1"/>
+          </p:cNvSpPr>
+          <p:nvPr>
+            <p:ph type="hdr" sz="quarter"/>
+          </p:nvPr>
+        </p:nvSpPr>
+        <p:spPr>
+          <a:xfrm>
+            <a:off x="0" y="0"/>
+            <a:ext cx="2971800" cy="458788"/>
+          </a:xfrm>
+          <a:prstGeom prst="rect">
+            <a:avLst/>
+          </a:prstGeom>
+        </p:spPr>
+        <p:txBody>
+          <a:bodyPr vert="horz" lIns="91440" tIns="45720" rIns="91440" bIns="45720" rtlCol="0"/>
+          <a:lstStyle>
+            <a:lvl1pPr algn="l">
+              <a:defRPr sz="1200"/>
+            </a:lvl1pPr>
+          </a:lstStyle>
+          <a:p>
+            <a:endParaRPr lang="ko-KR" altLang="en-US"/>
+          </a:p>
+        </p:txBody>
+      </p:sp>
+      <p:sp>
+        <p:nvSpPr>
+          <p:cNvPr id="3" name="날짜 개체 틀 2"/>
+          <p:cNvSpPr>
+            <a:spLocks noGrp="1"/>
+          </p:cNvSpPr>
+          <p:nvPr>
+            <p:ph type="dt" idx="1"/>
+          </p:nvPr>
+        </p:nvSpPr>
+        <p:spPr>
+          <a:xfrm>
+            <a:off x="3884613" y="0"/>
+            <a:ext cx="2971800" cy="458788"/>
+          </a:xfrm>
+          <a:prstGeom prst="rect">
+            <a:avLst/>
+          </a:prstGeom>
+        </p:spPr>
+        <p:txBody>
+          <a:bodyPr vert="horz" lIns="91440" tIns="45720" rIns="91440" bIns="45720" rtlCol="0"/>
+          <a:lstStyle>
+            <a:lvl1pPr algn="r">
+              <a:defRPr sz="1200"/>
+            </a:lvl1pPr>
+          </a:lstStyle>
+          <a:p>
+            <a:fld id="{F0867025-E300-421D-BABB-5C49D5736377}" type="datetimeFigureOut">
+              <a:rPr lang="ko-KR" altLang="en-US" smtClean="0"/>
+              <a:t>2026-07-03</a:t>
+            </a:fld>
+            <a:endParaRPr lang="ko-KR" altLang="en-US"/>
+          </a:p>
+        </p:txBody>
+      </p:sp>
+      <p:sp>
+        <p:nvSpPr>
+          <p:cNvPr id="4" name="슬라이드 이미지 개체 틀 3"/>
+          <p:cNvSpPr>
+            <a:spLocks noGrp="1" noRot="1" noChangeAspect="1"/>
+          </p:cNvSpPr>
+          <p:nvPr>
+            <p:ph type="sldImg" idx="2"/>
+          </p:nvPr>
+        </p:nvSpPr>
+        <p:spPr>
+          <a:xfrm>
+            <a:off x="685800" y="1143000"/>
+            <a:ext cx="5486400" cy="3086100"/>
+          </a:xfrm>
+          <a:prstGeom prst="rect">
+            <a:avLst/>
+          </a:prstGeom>
+          <a:noFill/>
+          <a:ln w="12700">
+            <a:solidFill>
+              <a:prstClr val="black"/>
+            </a:solidFill>
+          </a:ln>
+        </p:spPr>
+        <p:txBody>
+          <a:bodyPr vert="horz" lIns="91440" tIns="45720" rIns="91440" bIns="45720" rtlCol="0" anchor="ctr"/>
+          <a:lstStyle/>
+          <a:p>
+            <a:endParaRPr lang="ko-KR" altLang="en-US"/>
+          </a:p>
+        </p:txBody>
+      </p:sp>
+      <p:sp>
+        <p:nvSpPr>
+          <p:cNvPr id="5" name="슬라이드 노트 개체 틀 4"/>
+          <p:cNvSpPr>
+            <a:spLocks noGrp="1"/>
+          </p:cNvSpPr>
+          <p:nvPr>
+            <p:ph type="body" sz="quarter" idx="3"/>
+          </p:nvPr>
+        </p:nvSpPr>
+        <p:spPr>
+          <a:xfrm>
+            <a:off x="685800" y="4400550"/>
+            <a:ext cx="5486400" cy="3600450"/>
+          </a:xfrm>
+          <a:prstGeom prst="rect">
+            <a:avLst/>
+          </a:prstGeom>
+        </p:spPr>
+        <p:txBody>
+          <a:bodyPr vert="horz" lIns="91440" tIns="45720" rIns="91440" bIns="45720" rtlCol="0"/>
+          <a:lstStyle/>
+          <a:p>
+            <a:pPr lvl="0"/>
+            <a:r>
+              <a:rPr lang="ko-KR" altLang="en-US" smtClean="0"/>
+              <a:t>마스터 텍스트 스타일을 편집합니다</a:t>
+            </a:r>
+          </a:p>
+          <a:p>
+            <a:pPr lvl="1"/>
+            <a:r>
+              <a:rPr lang="ko-KR" altLang="en-US" smtClean="0"/>
+              <a:t>둘째 수준</a:t>
+            </a:r>
+          </a:p>
+          <a:p>
+            <a:pPr lvl="2"/>
+            <a:r>
+              <a:rPr lang="ko-KR" altLang="en-US" smtClean="0"/>
+              <a:t>셋째 수준</a:t>
+            </a:r>
+          </a:p>
+          <a:p>
+            <a:pPr lvl="3"/>
+            <a:r>
+              <a:rPr lang="ko-KR" altLang="en-US" smtClean="0"/>
+              <a:t>넷째 수준</a:t>
+            </a:r>
+          </a:p>
+          <a:p>
+            <a:pPr lvl="4"/>
+            <a:r>
+              <a:rPr lang="ko-KR" altLang="en-US" smtClean="0"/>
+              <a:t>다섯째 수준</a:t>
+            </a:r>
+            <a:endParaRPr lang="ko-KR" altLang="en-US"/>
+          </a:p>
+        </p:txBody>
+      </p:sp>
+      <p:sp>
+        <p:nvSpPr>
+          <p:cNvPr id="6" name="바닥글 개체 틀 5"/>
+          <p:cNvSpPr>
+            <a:spLocks noGrp="1"/>
+          </p:cNvSpPr>
+          <p:nvPr>
+            <p:ph type="ftr" sz="quarter" idx="4"/>
+          </p:nvPr>
+        </p:nvSpPr>
+        <p:spPr>
+          <a:xfrm>
+            <a:off x="0" y="8685213"/>
+            <a:ext cx="2971800" cy="458787"/>
+          </a:xfrm>
+          <a:prstGeom prst="rect">
+            <a:avLst/>
+          </a:prstGeom>
+        </p:spPr>
+        <p:txBody>
+          <a:bodyPr vert="horz" lIns="91440" tIns="45720" rIns="91440" bIns="45720" rtlCol="0" anchor="b"/>
+          <a:lstStyle>
+            <a:lvl1pPr algn="l">
+              <a:defRPr sz="1200"/>
+            </a:lvl1pPr>
+          </a:lstStyle>
+          <a:p>
+            <a:endParaRPr lang="ko-KR" altLang="en-US"/>
+          </a:p>
+        </p:txBody>
+      </p:sp>
+      <p:sp>
+        <p:nvSpPr>
+          <p:cNvPr id="7" name="슬라이드 번호 개체 틀 6"/>
+          <p:cNvSpPr>
+            <a:spLocks noGrp="1"/>
+          </p:cNvSpPr>
+          <p:nvPr>
+            <p:ph type="sldNum" sz="quarter" idx="5"/>
+          </p:nvPr>
+        </p:nvSpPr>
+        <p:spPr>
+          <a:xfrm>
+            <a:off x="3884613" y="8685213"/>
+            <a:ext cx="2971800" cy="458787"/>
+          </a:xfrm>
+          <a:prstGeom prst="rect">
+            <a:avLst/>
+          </a:prstGeom>
+        </p:spPr>
+        <p:txBody>
+          <a:bodyPr vert="horz" lIns="91440" tIns="45720" rIns="91440" bIns="45720" rtlCol="0" anchor="b"/>
+          <a:lstStyle>
+            <a:lvl1pPr algn="r">
+              <a:defRPr sz="1200"/>
+            </a:lvl1pPr>
+          </a:lstStyle>
+          <a:p>
+            <a:fld id="{0F03AB99-662C-46EC-B86C-F2E227D3EFAD}" type="slidenum">
+              <a:rPr lang="ko-KR" altLang="en-US" smtClean="0"/>
+              <a:t>‹#›</a:t>
+            </a:fld>
+            <a:endParaRPr lang="ko-KR" altLang="en-US"/>
+          </a:p>
+        </p:txBody>
+      </p:sp>
+    </p:spTree>
+    <p:extLst>
+      <p:ext uri="{BB962C8B-B14F-4D97-AF65-F5344CB8AC3E}">
+        <p14:creationId xmlns:p14="http://schemas.microsoft.com/office/powerpoint/2010/main" val="1156285363"/>
+      </p:ext>
+    </p:extLst>
+  </p:cSld>
+  <p:clrMap bg1="lt1" tx1="dk1" bg2="lt2" tx2="dk2" accent1="accent1" accent2="accent2" accent3="accent3" accent4="accent4" accent5="accent5" accent6="accent6" hlink="hlink" folHlink="folHlink"/>
+  <p:notesStyle>
+    <a:lvl1pPr marL="0" algn="l" defTabSz="914400" rtl="0" eaLnBrk="1" latinLnBrk="1" hangingPunct="1">
+      <a:defRPr sz="1200" kern="1200">
+        <a:solidFill>
+          <a:schemeClr val="tx1"/>
+        </a:solidFill>
+        <a:latin typeface="+mn-lt"/>
+        <a:ea typeface="+mn-ea"/>
+        <a:cs typeface="+mn-cs"/>
+      </a:defRPr>
+    </a:lvl1pPr>
+    <a:lvl2pPr marL="457200" algn="l" defTabSz="914400" rtl="0" eaLnBrk="1" latinLnBrk="1" hangingPunct="1">
+      <a:defRPr sz="1200" kern="1200">
+        <a:solidFill>
+          <a:schemeClr val="tx1"/>
+        </a:solidFill>
+        <a:latin typeface="+mn-lt"/>
+        <a:ea typeface="+mn-ea"/>
+        <a:cs typeface="+mn-cs"/>
+      </a:defRPr>
+    </a:lvl2pPr>
+    <a:lvl3pPr marL="914400" algn="l" defTabSz="914400" rtl="0" eaLnBrk="1" latinLnBrk="1" hangingPunct="1">
+      <a:defRPr sz="1200" kern="1200">
+        <a:solidFill>
+          <a:schemeClr val="tx1"/>
+        </a:solidFill>
+        <a:latin typeface="+mn-lt"/>
+        <a:ea typeface="+mn-ea"/>
+        <a:cs typeface="+mn-cs"/>
+      </a:defRPr>
+    </a:lvl3pPr>
+    <a:lvl4pPr marL="1371600" algn="l" defTabSz="914400" rtl="0" eaLnBrk="1" latinLnBrk="1" hangingPunct="1">
+      <a:defRPr sz="1200" kern="1200">
+        <a:solidFill>
+          <a:schemeClr val="tx1"/>
+        </a:solidFill>
+        <a:latin typeface="+mn-lt"/>
+        <a:ea typeface="+mn-ea"/>
+        <a:cs typeface="+mn-cs"/>
+      </a:defRPr>
+    </a:lvl4pPr>
+    <a:lvl5pPr marL="1828800" algn="l" defTabSz="914400" rtl="0" eaLnBrk="1" latinLnBrk="1" hangingPunct="1">
+      <a:defRPr sz="1200" kern="1200">
+        <a:solidFill>
+          <a:schemeClr val="tx1"/>
+        </a:solidFill>
+        <a:latin typeface="+mn-lt"/>
+        <a:ea typeface="+mn-ea"/>
+        <a:cs typeface="+mn-cs"/>
+      </a:defRPr>
+    </a:lvl5pPr>
+    <a:lvl6pPr marL="2286000" algn="l" defTabSz="914400" rtl="0" eaLnBrk="1" latinLnBrk="1" hangingPunct="1">
+      <a:defRPr sz="1200" kern="1200">
+        <a:solidFill>
+          <a:schemeClr val="tx1"/>
+        </a:solidFill>
+        <a:latin typeface="+mn-lt"/>
+        <a:ea typeface="+mn-ea"/>
+        <a:cs typeface="+mn-cs"/>
+      </a:defRPr>
+    </a:lvl6pPr>
+    <a:lvl7pPr marL="2743200" algn="l" defTabSz="914400" rtl="0" eaLnBrk="1" latinLnBrk="1" hangingPunct="1">
+      <a:defRPr sz="1200" kern="1200">
+        <a:solidFill>
+          <a:schemeClr val="tx1"/>
+        </a:solidFill>
+        <a:latin typeface="+mn-lt"/>
+        <a:ea typeface="+mn-ea"/>
+        <a:cs typeface="+mn-cs"/>
+      </a:defRPr>
+    </a:lvl7pPr>
+    <a:lvl8pPr marL="3200400" algn="l" defTabSz="914400" rtl="0" eaLnBrk="1" latinLnBrk="1" hangingPunct="1">
+      <a:defRPr sz="1200" kern="1200">
+        <a:solidFill>
+          <a:schemeClr val="tx1"/>
+        </a:solidFill>
+        <a:latin typeface="+mn-lt"/>
+        <a:ea typeface="+mn-ea"/>
+        <a:cs typeface="+mn-cs"/>
+      </a:defRPr>
+    </a:lvl8pPr>
+    <a:lvl9pPr marL="3657600" algn="l" defTabSz="914400" rtl="0" eaLnBrk="1" latinLnBrk="1" hangingPunct="1">
+      <a:defRPr sz="1200" kern="1200">
+        <a:solidFill>
+          <a:schemeClr val="tx1"/>
+        </a:solidFill>
+        <a:latin typeface="+mn-lt"/>
+        <a:ea typeface="+mn-ea"/>
+        <a:cs typeface="+mn-cs"/>
+      </a:defRPr>
+    </a:lvl9pPr>
+  </p:notesStyle>
+</p:notesMaster>
+</file>
+
+<file path=ppt/notesSlides/notesSlide1.xml><?xml version="1.0" encoding="utf-8"?>
+<p:notes xmlns:a="http://schemas.openxmlformats.org/drawingml/2006/main" xmlns:r="http://schemas.openxmlformats.org/officeDocument/2006/relationships" xmlns:p="http://schemas.openxmlformats.org/presentationml/2006/main">
+  <p:cSld>
+    <p:spTree>
+      <p:nvGrpSpPr>
+        <p:cNvPr id="1" name=""/>
+        <p:cNvGrpSpPr/>
+        <p:nvPr/>
+      </p:nvGrpSpPr>
+      <p:grpSpPr>
+        <a:xfrm>
+          <a:off x="0" y="0"/>
+          <a:ext cx="0" cy="0"/>
+          <a:chOff x="0" y="0"/>
+          <a:chExt cx="0" cy="0"/>
+        </a:xfrm>
+      </p:grpSpPr>
+      <p:sp>
+        <p:nvSpPr>
+          <p:cNvPr id="2" name="슬라이드 이미지 개체 틀 1"/>
+          <p:cNvSpPr>
+            <a:spLocks noGrp="1" noRot="1" noChangeAspect="1"/>
+          </p:cNvSpPr>
+          <p:nvPr>
+            <p:ph type="sldImg"/>
+          </p:nvPr>
+        </p:nvSpPr>
+        <p:spPr/>
+      </p:sp>
+      <p:sp>
+        <p:nvSpPr>
+          <p:cNvPr id="3" name="슬라이드 노트 개체 틀 2"/>
+          <p:cNvSpPr>
+            <a:spLocks noGrp="1"/>
+          </p:cNvSpPr>
+          <p:nvPr>
+            <p:ph type="body" idx="1"/>
+          </p:nvPr>
+        </p:nvSpPr>
+        <p:spPr/>
+        <p:txBody>
+          <a:bodyPr/>
+          <a:lstStyle/>
+          <a:p>
+            <a:endParaRPr lang="ko-KR" altLang="en-US" dirty="0"/>
+          </a:p>
+        </p:txBody>
+      </p:sp>
+      <p:sp>
+        <p:nvSpPr>
+          <p:cNvPr id="4" name="슬라이드 번호 개체 틀 3"/>
+          <p:cNvSpPr>
+            <a:spLocks noGrp="1"/>
+          </p:cNvSpPr>
+          <p:nvPr>
+            <p:ph type="sldNum" sz="quarter" idx="10"/>
+          </p:nvPr>
+        </p:nvSpPr>
+        <p:spPr/>
+        <p:txBody>
+          <a:bodyPr/>
+          <a:lstStyle/>
+          <a:p>
+            <a:fld id="{0F03AB99-662C-46EC-B86C-F2E227D3EFAD}" type="slidenum">
+              <a:rPr lang="ko-KR" altLang="en-US" smtClean="0"/>
+              <a:t>2</a:t>
+            </a:fld>
+            <a:endParaRPr lang="ko-KR" altLang="en-US"/>
+          </a:p>
+        </p:txBody>
+      </p:sp>
+    </p:spTree>
+    <p:extLst>
+      <p:ext uri="{BB962C8B-B14F-4D97-AF65-F5344CB8AC3E}">
+        <p14:creationId xmlns:p14="http://schemas.microsoft.com/office/powerpoint/2010/main" val="3051752030"/>
+      </p:ext>
+    </p:extLst>
+  </p:cSld>
+  <p:clrMapOvr>
+    <a:masterClrMapping/>
+  </p:clrMapOvr>
+</p:notes>
+</file>
+
+<file path=ppt/notesSlides/notesSlide2.xml><?xml version="1.0" encoding="utf-8"?>
+<p:notes xmlns:a="http://schemas.openxmlformats.org/drawingml/2006/main" xmlns:r="http://schemas.openxmlformats.org/officeDocument/2006/relationships" xmlns:p="http://schemas.openxmlformats.org/presentationml/2006/main">
+  <p:cSld>
+    <p:spTree>
+      <p:nvGrpSpPr>
+        <p:cNvPr id="1" name=""/>
+        <p:cNvGrpSpPr/>
+        <p:nvPr/>
+      </p:nvGrpSpPr>
+      <p:grpSpPr>
+        <a:xfrm>
+          <a:off x="0" y="0"/>
+          <a:ext cx="0" cy="0"/>
+          <a:chOff x="0" y="0"/>
+          <a:chExt cx="0" cy="0"/>
+        </a:xfrm>
+      </p:grpSpPr>
+      <p:sp>
+        <p:nvSpPr>
+          <p:cNvPr id="2" name="슬라이드 이미지 개체 틀 1"/>
+          <p:cNvSpPr>
+            <a:spLocks noGrp="1" noRot="1" noChangeAspect="1"/>
+          </p:cNvSpPr>
+          <p:nvPr>
+            <p:ph type="sldImg"/>
+          </p:nvPr>
+        </p:nvSpPr>
+        <p:spPr/>
+      </p:sp>
+      <p:sp>
+        <p:nvSpPr>
+          <p:cNvPr id="3" name="슬라이드 노트 개체 틀 2"/>
+          <p:cNvSpPr>
+            <a:spLocks noGrp="1"/>
+          </p:cNvSpPr>
+          <p:nvPr>
+            <p:ph type="body" idx="1"/>
+          </p:nvPr>
+        </p:nvSpPr>
+        <p:spPr/>
+        <p:txBody>
+          <a:bodyPr/>
+          <a:lstStyle/>
+          <a:p>
+            <a:endParaRPr lang="ko-KR" altLang="en-US" dirty="0"/>
+          </a:p>
+        </p:txBody>
+      </p:sp>
+      <p:sp>
+        <p:nvSpPr>
+          <p:cNvPr id="4" name="슬라이드 번호 개체 틀 3"/>
+          <p:cNvSpPr>
+            <a:spLocks noGrp="1"/>
+          </p:cNvSpPr>
+          <p:nvPr>
+            <p:ph type="sldNum" sz="quarter" idx="10"/>
+          </p:nvPr>
+        </p:nvSpPr>
+        <p:spPr/>
+        <p:txBody>
+          <a:bodyPr/>
+          <a:lstStyle/>
+          <a:p>
+            <a:fld id="{0F03AB99-662C-46EC-B86C-F2E227D3EFAD}" type="slidenum">
+              <a:rPr lang="ko-KR" altLang="en-US" smtClean="0"/>
+              <a:t>3</a:t>
+            </a:fld>
+            <a:endParaRPr lang="ko-KR" altLang="en-US"/>
+          </a:p>
+        </p:txBody>
+      </p:sp>
+    </p:spTree>
+    <p:extLst>
+      <p:ext uri="{BB962C8B-B14F-4D97-AF65-F5344CB8AC3E}">
+        <p14:creationId xmlns:p14="http://schemas.microsoft.com/office/powerpoint/2010/main" val="2657993708"/>
+      </p:ext>
+    </p:extLst>
+  </p:cSld>
+  <p:clrMapOvr>
+    <a:masterClrMapping/>
+  </p:clrMapOvr>
+</p:notes>
 </file>
 
 <file path=ppt/slideLayouts/slideLayout1.xml><?xml version="1.0" encoding="utf-8"?>
@@ -131,7 +659,7 @@
           <p:cNvPr id="2" name="제목 1">
             <a:extLst>
               <a:ext uri="{FF2B5EF4-FFF2-40B4-BE49-F238E27FC236}">
-                <a16:creationId xmlns:a16="http://schemas.microsoft.com/office/drawing/2014/main" id="{47C6A88D-EDAF-CEC2-712F-FA6A7E4FF53C}"/>
+                <a16:creationId xmlns:a16="http://schemas.microsoft.com/office/drawing/2014/main" xmlns="" id="{47C6A88D-EDAF-CEC2-712F-FA6A7E4FF53C}"/>
               </a:ext>
             </a:extLst>
           </p:cNvPr>
@@ -168,7 +696,7 @@
           <p:cNvPr id="3" name="부제목 2">
             <a:extLst>
               <a:ext uri="{FF2B5EF4-FFF2-40B4-BE49-F238E27FC236}">
-                <a16:creationId xmlns:a16="http://schemas.microsoft.com/office/drawing/2014/main" id="{1F7A10E8-4E5D-A611-E577-EBA5676A507E}"/>
+                <a16:creationId xmlns:a16="http://schemas.microsoft.com/office/drawing/2014/main" xmlns="" id="{1F7A10E8-4E5D-A611-E577-EBA5676A507E}"/>
               </a:ext>
             </a:extLst>
           </p:cNvPr>
@@ -238,7 +766,7 @@
           <p:cNvPr id="4" name="날짜 개체 틀 3">
             <a:extLst>
               <a:ext uri="{FF2B5EF4-FFF2-40B4-BE49-F238E27FC236}">
-                <a16:creationId xmlns:a16="http://schemas.microsoft.com/office/drawing/2014/main" id="{FA4EF1CD-FA03-944B-0EC0-2AABE3B0C471}"/>
+                <a16:creationId xmlns:a16="http://schemas.microsoft.com/office/drawing/2014/main" xmlns="" id="{FA4EF1CD-FA03-944B-0EC0-2AABE3B0C471}"/>
               </a:ext>
             </a:extLst>
           </p:cNvPr>
@@ -267,7 +795,7 @@
           <p:cNvPr id="5" name="바닥글 개체 틀 4">
             <a:extLst>
               <a:ext uri="{FF2B5EF4-FFF2-40B4-BE49-F238E27FC236}">
-                <a16:creationId xmlns:a16="http://schemas.microsoft.com/office/drawing/2014/main" id="{D7E1904F-F41F-7809-481D-7E79FCD2132E}"/>
+                <a16:creationId xmlns:a16="http://schemas.microsoft.com/office/drawing/2014/main" xmlns="" id="{D7E1904F-F41F-7809-481D-7E79FCD2132E}"/>
               </a:ext>
             </a:extLst>
           </p:cNvPr>
@@ -292,7 +820,7 @@
           <p:cNvPr id="6" name="슬라이드 번호 개체 틀 5">
             <a:extLst>
               <a:ext uri="{FF2B5EF4-FFF2-40B4-BE49-F238E27FC236}">
-                <a16:creationId xmlns:a16="http://schemas.microsoft.com/office/drawing/2014/main" id="{46C721DE-9DEE-BACB-B354-8E260F43215D}"/>
+                <a16:creationId xmlns:a16="http://schemas.microsoft.com/office/drawing/2014/main" xmlns="" id="{46C721DE-9DEE-BACB-B354-8E260F43215D}"/>
               </a:ext>
             </a:extLst>
           </p:cNvPr>
@@ -351,7 +879,7 @@
           <p:cNvPr id="2" name="제목 1">
             <a:extLst>
               <a:ext uri="{FF2B5EF4-FFF2-40B4-BE49-F238E27FC236}">
-                <a16:creationId xmlns:a16="http://schemas.microsoft.com/office/drawing/2014/main" id="{8EC6E50E-2954-B290-1563-C4936B9E8431}"/>
+                <a16:creationId xmlns:a16="http://schemas.microsoft.com/office/drawing/2014/main" xmlns="" id="{8EC6E50E-2954-B290-1563-C4936B9E8431}"/>
               </a:ext>
             </a:extLst>
           </p:cNvPr>
@@ -379,7 +907,7 @@
           <p:cNvPr id="3" name="세로 텍스트 개체 틀 2">
             <a:extLst>
               <a:ext uri="{FF2B5EF4-FFF2-40B4-BE49-F238E27FC236}">
-                <a16:creationId xmlns:a16="http://schemas.microsoft.com/office/drawing/2014/main" id="{5B6A99E4-1414-E268-7B72-A4C896708AE3}"/>
+                <a16:creationId xmlns:a16="http://schemas.microsoft.com/office/drawing/2014/main" xmlns="" id="{5B6A99E4-1414-E268-7B72-A4C896708AE3}"/>
               </a:ext>
             </a:extLst>
           </p:cNvPr>
@@ -436,7 +964,7 @@
           <p:cNvPr id="4" name="날짜 개체 틀 3">
             <a:extLst>
               <a:ext uri="{FF2B5EF4-FFF2-40B4-BE49-F238E27FC236}">
-                <a16:creationId xmlns:a16="http://schemas.microsoft.com/office/drawing/2014/main" id="{3A9BB3C2-1FA4-4151-9ADB-996284F1BDE2}"/>
+                <a16:creationId xmlns:a16="http://schemas.microsoft.com/office/drawing/2014/main" xmlns="" id="{3A9BB3C2-1FA4-4151-9ADB-996284F1BDE2}"/>
               </a:ext>
             </a:extLst>
           </p:cNvPr>
@@ -465,7 +993,7 @@
           <p:cNvPr id="5" name="바닥글 개체 틀 4">
             <a:extLst>
               <a:ext uri="{FF2B5EF4-FFF2-40B4-BE49-F238E27FC236}">
-                <a16:creationId xmlns:a16="http://schemas.microsoft.com/office/drawing/2014/main" id="{8A27C81A-BE4E-27CE-6CE4-0AE5876D470A}"/>
+                <a16:creationId xmlns:a16="http://schemas.microsoft.com/office/drawing/2014/main" xmlns="" id="{8A27C81A-BE4E-27CE-6CE4-0AE5876D470A}"/>
               </a:ext>
             </a:extLst>
           </p:cNvPr>
@@ -490,7 +1018,7 @@
           <p:cNvPr id="6" name="슬라이드 번호 개체 틀 5">
             <a:extLst>
               <a:ext uri="{FF2B5EF4-FFF2-40B4-BE49-F238E27FC236}">
-                <a16:creationId xmlns:a16="http://schemas.microsoft.com/office/drawing/2014/main" id="{B4E3C814-C417-2E3F-F02B-1B9ED6941FBD}"/>
+                <a16:creationId xmlns:a16="http://schemas.microsoft.com/office/drawing/2014/main" xmlns="" id="{B4E3C814-C417-2E3F-F02B-1B9ED6941FBD}"/>
               </a:ext>
             </a:extLst>
           </p:cNvPr>
@@ -549,7 +1077,7 @@
           <p:cNvPr id="2" name="세로 제목 1">
             <a:extLst>
               <a:ext uri="{FF2B5EF4-FFF2-40B4-BE49-F238E27FC236}">
-                <a16:creationId xmlns:a16="http://schemas.microsoft.com/office/drawing/2014/main" id="{AC1D687F-54E9-57A3-FDA2-5A8060E79A80}"/>
+                <a16:creationId xmlns:a16="http://schemas.microsoft.com/office/drawing/2014/main" xmlns="" id="{AC1D687F-54E9-57A3-FDA2-5A8060E79A80}"/>
               </a:ext>
             </a:extLst>
           </p:cNvPr>
@@ -582,7 +1110,7 @@
           <p:cNvPr id="3" name="세로 텍스트 개체 틀 2">
             <a:extLst>
               <a:ext uri="{FF2B5EF4-FFF2-40B4-BE49-F238E27FC236}">
-                <a16:creationId xmlns:a16="http://schemas.microsoft.com/office/drawing/2014/main" id="{BC846A14-940B-8FE8-A769-3DABAE11AD25}"/>
+                <a16:creationId xmlns:a16="http://schemas.microsoft.com/office/drawing/2014/main" xmlns="" id="{BC846A14-940B-8FE8-A769-3DABAE11AD25}"/>
               </a:ext>
             </a:extLst>
           </p:cNvPr>
@@ -644,7 +1172,7 @@
           <p:cNvPr id="4" name="날짜 개체 틀 3">
             <a:extLst>
               <a:ext uri="{FF2B5EF4-FFF2-40B4-BE49-F238E27FC236}">
-                <a16:creationId xmlns:a16="http://schemas.microsoft.com/office/drawing/2014/main" id="{393732A3-4427-5A76-3A9C-DBE87A4364DD}"/>
+                <a16:creationId xmlns:a16="http://schemas.microsoft.com/office/drawing/2014/main" xmlns="" id="{393732A3-4427-5A76-3A9C-DBE87A4364DD}"/>
               </a:ext>
             </a:extLst>
           </p:cNvPr>
@@ -673,7 +1201,7 @@
           <p:cNvPr id="5" name="바닥글 개체 틀 4">
             <a:extLst>
               <a:ext uri="{FF2B5EF4-FFF2-40B4-BE49-F238E27FC236}">
-                <a16:creationId xmlns:a16="http://schemas.microsoft.com/office/drawing/2014/main" id="{16A5B672-F383-0FF5-2D72-72E1E7F0F0D3}"/>
+                <a16:creationId xmlns:a16="http://schemas.microsoft.com/office/drawing/2014/main" xmlns="" id="{16A5B672-F383-0FF5-2D72-72E1E7F0F0D3}"/>
               </a:ext>
             </a:extLst>
           </p:cNvPr>
@@ -698,7 +1226,7 @@
           <p:cNvPr id="6" name="슬라이드 번호 개체 틀 5">
             <a:extLst>
               <a:ext uri="{FF2B5EF4-FFF2-40B4-BE49-F238E27FC236}">
-                <a16:creationId xmlns:a16="http://schemas.microsoft.com/office/drawing/2014/main" id="{DE28928A-9906-D889-A8B7-B97D729CDB76}"/>
+                <a16:creationId xmlns:a16="http://schemas.microsoft.com/office/drawing/2014/main" xmlns="" id="{DE28928A-9906-D889-A8B7-B97D729CDB76}"/>
               </a:ext>
             </a:extLst>
           </p:cNvPr>
@@ -757,7 +1285,7 @@
           <p:cNvPr id="2" name="제목 1">
             <a:extLst>
               <a:ext uri="{FF2B5EF4-FFF2-40B4-BE49-F238E27FC236}">
-                <a16:creationId xmlns:a16="http://schemas.microsoft.com/office/drawing/2014/main" id="{54F5793F-94FE-56B0-E0CB-A317DA7FB4BC}"/>
+                <a16:creationId xmlns:a16="http://schemas.microsoft.com/office/drawing/2014/main" xmlns="" id="{54F5793F-94FE-56B0-E0CB-A317DA7FB4BC}"/>
               </a:ext>
             </a:extLst>
           </p:cNvPr>
@@ -785,7 +1313,7 @@
           <p:cNvPr id="3" name="내용 개체 틀 2">
             <a:extLst>
               <a:ext uri="{FF2B5EF4-FFF2-40B4-BE49-F238E27FC236}">
-                <a16:creationId xmlns:a16="http://schemas.microsoft.com/office/drawing/2014/main" id="{BFAF79B8-2AD1-69C6-D4D5-21827C6802F8}"/>
+                <a16:creationId xmlns:a16="http://schemas.microsoft.com/office/drawing/2014/main" xmlns="" id="{BFAF79B8-2AD1-69C6-D4D5-21827C6802F8}"/>
               </a:ext>
             </a:extLst>
           </p:cNvPr>
@@ -842,7 +1370,7 @@
           <p:cNvPr id="4" name="날짜 개체 틀 3">
             <a:extLst>
               <a:ext uri="{FF2B5EF4-FFF2-40B4-BE49-F238E27FC236}">
-                <a16:creationId xmlns:a16="http://schemas.microsoft.com/office/drawing/2014/main" id="{6718AF63-4F49-82B6-24FC-BB457FC964FC}"/>
+                <a16:creationId xmlns:a16="http://schemas.microsoft.com/office/drawing/2014/main" xmlns="" id="{6718AF63-4F49-82B6-24FC-BB457FC964FC}"/>
               </a:ext>
             </a:extLst>
           </p:cNvPr>
@@ -871,7 +1399,7 @@
           <p:cNvPr id="5" name="바닥글 개체 틀 4">
             <a:extLst>
               <a:ext uri="{FF2B5EF4-FFF2-40B4-BE49-F238E27FC236}">
-                <a16:creationId xmlns:a16="http://schemas.microsoft.com/office/drawing/2014/main" id="{AA45FF19-25D7-1FF3-E311-2C2E07B26764}"/>
+                <a16:creationId xmlns:a16="http://schemas.microsoft.com/office/drawing/2014/main" xmlns="" id="{AA45FF19-25D7-1FF3-E311-2C2E07B26764}"/>
               </a:ext>
             </a:extLst>
           </p:cNvPr>
@@ -896,7 +1424,7 @@
           <p:cNvPr id="6" name="슬라이드 번호 개체 틀 5">
             <a:extLst>
               <a:ext uri="{FF2B5EF4-FFF2-40B4-BE49-F238E27FC236}">
-                <a16:creationId xmlns:a16="http://schemas.microsoft.com/office/drawing/2014/main" id="{6F43D8BF-52A4-97EB-612B-F9899664EFD5}"/>
+                <a16:creationId xmlns:a16="http://schemas.microsoft.com/office/drawing/2014/main" xmlns="" id="{6F43D8BF-52A4-97EB-612B-F9899664EFD5}"/>
               </a:ext>
             </a:extLst>
           </p:cNvPr>
@@ -955,7 +1483,7 @@
           <p:cNvPr id="2" name="제목 1">
             <a:extLst>
               <a:ext uri="{FF2B5EF4-FFF2-40B4-BE49-F238E27FC236}">
-                <a16:creationId xmlns:a16="http://schemas.microsoft.com/office/drawing/2014/main" id="{1EB95909-78E9-5BAC-68EA-7DCA2A1271F7}"/>
+                <a16:creationId xmlns:a16="http://schemas.microsoft.com/office/drawing/2014/main" xmlns="" id="{1EB95909-78E9-5BAC-68EA-7DCA2A1271F7}"/>
               </a:ext>
             </a:extLst>
           </p:cNvPr>
@@ -992,7 +1520,7 @@
           <p:cNvPr id="3" name="텍스트 개체 틀 2">
             <a:extLst>
               <a:ext uri="{FF2B5EF4-FFF2-40B4-BE49-F238E27FC236}">
-                <a16:creationId xmlns:a16="http://schemas.microsoft.com/office/drawing/2014/main" id="{D6B98DAF-2A47-3ECD-807C-96FB70CF9854}"/>
+                <a16:creationId xmlns:a16="http://schemas.microsoft.com/office/drawing/2014/main" xmlns="" id="{D6B98DAF-2A47-3ECD-807C-96FB70CF9854}"/>
               </a:ext>
             </a:extLst>
           </p:cNvPr>
@@ -1117,7 +1645,7 @@
           <p:cNvPr id="4" name="날짜 개체 틀 3">
             <a:extLst>
               <a:ext uri="{FF2B5EF4-FFF2-40B4-BE49-F238E27FC236}">
-                <a16:creationId xmlns:a16="http://schemas.microsoft.com/office/drawing/2014/main" id="{A3AD9670-C268-56FC-281A-FE1F59541EB9}"/>
+                <a16:creationId xmlns:a16="http://schemas.microsoft.com/office/drawing/2014/main" xmlns="" id="{A3AD9670-C268-56FC-281A-FE1F59541EB9}"/>
               </a:ext>
             </a:extLst>
           </p:cNvPr>
@@ -1146,7 +1674,7 @@
           <p:cNvPr id="5" name="바닥글 개체 틀 4">
             <a:extLst>
               <a:ext uri="{FF2B5EF4-FFF2-40B4-BE49-F238E27FC236}">
-                <a16:creationId xmlns:a16="http://schemas.microsoft.com/office/drawing/2014/main" id="{A4946F37-FE38-E38E-7339-DC6E4EFA5B3B}"/>
+                <a16:creationId xmlns:a16="http://schemas.microsoft.com/office/drawing/2014/main" xmlns="" id="{A4946F37-FE38-E38E-7339-DC6E4EFA5B3B}"/>
               </a:ext>
             </a:extLst>
           </p:cNvPr>
@@ -1171,7 +1699,7 @@
           <p:cNvPr id="6" name="슬라이드 번호 개체 틀 5">
             <a:extLst>
               <a:ext uri="{FF2B5EF4-FFF2-40B4-BE49-F238E27FC236}">
-                <a16:creationId xmlns:a16="http://schemas.microsoft.com/office/drawing/2014/main" id="{7C17C39B-6348-28CC-59AF-B1A65BE2F149}"/>
+                <a16:creationId xmlns:a16="http://schemas.microsoft.com/office/drawing/2014/main" xmlns="" id="{7C17C39B-6348-28CC-59AF-B1A65BE2F149}"/>
               </a:ext>
             </a:extLst>
           </p:cNvPr>
@@ -1230,7 +1758,7 @@
           <p:cNvPr id="2" name="제목 1">
             <a:extLst>
               <a:ext uri="{FF2B5EF4-FFF2-40B4-BE49-F238E27FC236}">
-                <a16:creationId xmlns:a16="http://schemas.microsoft.com/office/drawing/2014/main" id="{0D0EFA0F-10D7-865F-1370-4EA34C786709}"/>
+                <a16:creationId xmlns:a16="http://schemas.microsoft.com/office/drawing/2014/main" xmlns="" id="{0D0EFA0F-10D7-865F-1370-4EA34C786709}"/>
               </a:ext>
             </a:extLst>
           </p:cNvPr>
@@ -1258,7 +1786,7 @@
           <p:cNvPr id="3" name="내용 개체 틀 2">
             <a:extLst>
               <a:ext uri="{FF2B5EF4-FFF2-40B4-BE49-F238E27FC236}">
-                <a16:creationId xmlns:a16="http://schemas.microsoft.com/office/drawing/2014/main" id="{0498CDB5-9D2B-5F68-9DD8-ED20454B1044}"/>
+                <a16:creationId xmlns:a16="http://schemas.microsoft.com/office/drawing/2014/main" xmlns="" id="{0498CDB5-9D2B-5F68-9DD8-ED20454B1044}"/>
               </a:ext>
             </a:extLst>
           </p:cNvPr>
@@ -1320,7 +1848,7 @@
           <p:cNvPr id="4" name="내용 개체 틀 3">
             <a:extLst>
               <a:ext uri="{FF2B5EF4-FFF2-40B4-BE49-F238E27FC236}">
-                <a16:creationId xmlns:a16="http://schemas.microsoft.com/office/drawing/2014/main" id="{570EB1B7-8EDE-2794-EA53-E0C1972FAF1A}"/>
+                <a16:creationId xmlns:a16="http://schemas.microsoft.com/office/drawing/2014/main" xmlns="" id="{570EB1B7-8EDE-2794-EA53-E0C1972FAF1A}"/>
               </a:ext>
             </a:extLst>
           </p:cNvPr>
@@ -1382,7 +1910,7 @@
           <p:cNvPr id="5" name="날짜 개체 틀 4">
             <a:extLst>
               <a:ext uri="{FF2B5EF4-FFF2-40B4-BE49-F238E27FC236}">
-                <a16:creationId xmlns:a16="http://schemas.microsoft.com/office/drawing/2014/main" id="{31FBCFA4-CF51-706E-F9F0-8B66CA1A0E1B}"/>
+                <a16:creationId xmlns:a16="http://schemas.microsoft.com/office/drawing/2014/main" xmlns="" id="{31FBCFA4-CF51-706E-F9F0-8B66CA1A0E1B}"/>
               </a:ext>
             </a:extLst>
           </p:cNvPr>
@@ -1411,7 +1939,7 @@
           <p:cNvPr id="6" name="바닥글 개체 틀 5">
             <a:extLst>
               <a:ext uri="{FF2B5EF4-FFF2-40B4-BE49-F238E27FC236}">
-                <a16:creationId xmlns:a16="http://schemas.microsoft.com/office/drawing/2014/main" id="{FD56636A-469F-7FE9-480E-955BCC0E6D70}"/>
+                <a16:creationId xmlns:a16="http://schemas.microsoft.com/office/drawing/2014/main" xmlns="" id="{FD56636A-469F-7FE9-480E-955BCC0E6D70}"/>
               </a:ext>
             </a:extLst>
           </p:cNvPr>
@@ -1436,7 +1964,7 @@
           <p:cNvPr id="7" name="슬라이드 번호 개체 틀 6">
             <a:extLst>
               <a:ext uri="{FF2B5EF4-FFF2-40B4-BE49-F238E27FC236}">
-                <a16:creationId xmlns:a16="http://schemas.microsoft.com/office/drawing/2014/main" id="{3971D272-167D-EE36-E685-CD8BFE8CC9A6}"/>
+                <a16:creationId xmlns:a16="http://schemas.microsoft.com/office/drawing/2014/main" xmlns="" id="{3971D272-167D-EE36-E685-CD8BFE8CC9A6}"/>
               </a:ext>
             </a:extLst>
           </p:cNvPr>
@@ -1495,7 +2023,7 @@
           <p:cNvPr id="2" name="제목 1">
             <a:extLst>
               <a:ext uri="{FF2B5EF4-FFF2-40B4-BE49-F238E27FC236}">
-                <a16:creationId xmlns:a16="http://schemas.microsoft.com/office/drawing/2014/main" id="{9AC7230E-A2F3-4027-B6F6-9C5C289B1314}"/>
+                <a16:creationId xmlns:a16="http://schemas.microsoft.com/office/drawing/2014/main" xmlns="" id="{9AC7230E-A2F3-4027-B6F6-9C5C289B1314}"/>
               </a:ext>
             </a:extLst>
           </p:cNvPr>
@@ -1528,7 +2056,7 @@
           <p:cNvPr id="3" name="텍스트 개체 틀 2">
             <a:extLst>
               <a:ext uri="{FF2B5EF4-FFF2-40B4-BE49-F238E27FC236}">
-                <a16:creationId xmlns:a16="http://schemas.microsoft.com/office/drawing/2014/main" id="{0C685356-7419-AD93-377A-8D9A0293423E}"/>
+                <a16:creationId xmlns:a16="http://schemas.microsoft.com/office/drawing/2014/main" xmlns="" id="{0C685356-7419-AD93-377A-8D9A0293423E}"/>
               </a:ext>
             </a:extLst>
           </p:cNvPr>
@@ -1599,7 +2127,7 @@
           <p:cNvPr id="4" name="내용 개체 틀 3">
             <a:extLst>
               <a:ext uri="{FF2B5EF4-FFF2-40B4-BE49-F238E27FC236}">
-                <a16:creationId xmlns:a16="http://schemas.microsoft.com/office/drawing/2014/main" id="{CC36E6CA-94A6-3223-C91A-F6E9648C8EAD}"/>
+                <a16:creationId xmlns:a16="http://schemas.microsoft.com/office/drawing/2014/main" xmlns="" id="{CC36E6CA-94A6-3223-C91A-F6E9648C8EAD}"/>
               </a:ext>
             </a:extLst>
           </p:cNvPr>
@@ -1661,7 +2189,7 @@
           <p:cNvPr id="5" name="텍스트 개체 틀 4">
             <a:extLst>
               <a:ext uri="{FF2B5EF4-FFF2-40B4-BE49-F238E27FC236}">
-                <a16:creationId xmlns:a16="http://schemas.microsoft.com/office/drawing/2014/main" id="{F4DFD790-787A-88A3-300F-C173DAD2E1AF}"/>
+                <a16:creationId xmlns:a16="http://schemas.microsoft.com/office/drawing/2014/main" xmlns="" id="{F4DFD790-787A-88A3-300F-C173DAD2E1AF}"/>
               </a:ext>
             </a:extLst>
           </p:cNvPr>
@@ -1732,7 +2260,7 @@
           <p:cNvPr id="6" name="내용 개체 틀 5">
             <a:extLst>
               <a:ext uri="{FF2B5EF4-FFF2-40B4-BE49-F238E27FC236}">
-                <a16:creationId xmlns:a16="http://schemas.microsoft.com/office/drawing/2014/main" id="{012AE83D-2990-A6E4-CC9C-06D342A67C09}"/>
+                <a16:creationId xmlns:a16="http://schemas.microsoft.com/office/drawing/2014/main" xmlns="" id="{012AE83D-2990-A6E4-CC9C-06D342A67C09}"/>
               </a:ext>
             </a:extLst>
           </p:cNvPr>
@@ -1794,7 +2322,7 @@
           <p:cNvPr id="7" name="날짜 개체 틀 6">
             <a:extLst>
               <a:ext uri="{FF2B5EF4-FFF2-40B4-BE49-F238E27FC236}">
-                <a16:creationId xmlns:a16="http://schemas.microsoft.com/office/drawing/2014/main" id="{3C11F8C3-5AD3-730B-8ADB-304185DAA67E}"/>
+                <a16:creationId xmlns:a16="http://schemas.microsoft.com/office/drawing/2014/main" xmlns="" id="{3C11F8C3-5AD3-730B-8ADB-304185DAA67E}"/>
               </a:ext>
             </a:extLst>
           </p:cNvPr>
@@ -1823,7 +2351,7 @@
           <p:cNvPr id="8" name="바닥글 개체 틀 7">
             <a:extLst>
               <a:ext uri="{FF2B5EF4-FFF2-40B4-BE49-F238E27FC236}">
-                <a16:creationId xmlns:a16="http://schemas.microsoft.com/office/drawing/2014/main" id="{EF36ABA7-53C4-C11E-CC9D-F5E59BDBBD9B}"/>
+                <a16:creationId xmlns:a16="http://schemas.microsoft.com/office/drawing/2014/main" xmlns="" id="{EF36ABA7-53C4-C11E-CC9D-F5E59BDBBD9B}"/>
               </a:ext>
             </a:extLst>
           </p:cNvPr>
@@ -1848,7 +2376,7 @@
           <p:cNvPr id="9" name="슬라이드 번호 개체 틀 8">
             <a:extLst>
               <a:ext uri="{FF2B5EF4-FFF2-40B4-BE49-F238E27FC236}">
-                <a16:creationId xmlns:a16="http://schemas.microsoft.com/office/drawing/2014/main" id="{5E29E145-D4AE-F9FB-A218-47B323C43E03}"/>
+                <a16:creationId xmlns:a16="http://schemas.microsoft.com/office/drawing/2014/main" xmlns="" id="{5E29E145-D4AE-F9FB-A218-47B323C43E03}"/>
               </a:ext>
             </a:extLst>
           </p:cNvPr>
@@ -1907,7 +2435,7 @@
           <p:cNvPr id="2" name="제목 1">
             <a:extLst>
               <a:ext uri="{FF2B5EF4-FFF2-40B4-BE49-F238E27FC236}">
-                <a16:creationId xmlns:a16="http://schemas.microsoft.com/office/drawing/2014/main" id="{13D855E6-5AD7-B657-346A-38D87715A5E7}"/>
+                <a16:creationId xmlns:a16="http://schemas.microsoft.com/office/drawing/2014/main" xmlns="" id="{13D855E6-5AD7-B657-346A-38D87715A5E7}"/>
               </a:ext>
             </a:extLst>
           </p:cNvPr>
@@ -1935,7 +2463,7 @@
           <p:cNvPr id="3" name="날짜 개체 틀 2">
             <a:extLst>
               <a:ext uri="{FF2B5EF4-FFF2-40B4-BE49-F238E27FC236}">
-                <a16:creationId xmlns:a16="http://schemas.microsoft.com/office/drawing/2014/main" id="{F3052B06-09E1-1CD0-A032-AEB30F69A0E7}"/>
+                <a16:creationId xmlns:a16="http://schemas.microsoft.com/office/drawing/2014/main" xmlns="" id="{F3052B06-09E1-1CD0-A032-AEB30F69A0E7}"/>
               </a:ext>
             </a:extLst>
           </p:cNvPr>
@@ -1964,7 +2492,7 @@
           <p:cNvPr id="4" name="바닥글 개체 틀 3">
             <a:extLst>
               <a:ext uri="{FF2B5EF4-FFF2-40B4-BE49-F238E27FC236}">
-                <a16:creationId xmlns:a16="http://schemas.microsoft.com/office/drawing/2014/main" id="{DE18691A-8582-987D-DF06-E6D8B618E7BB}"/>
+                <a16:creationId xmlns:a16="http://schemas.microsoft.com/office/drawing/2014/main" xmlns="" id="{DE18691A-8582-987D-DF06-E6D8B618E7BB}"/>
               </a:ext>
             </a:extLst>
           </p:cNvPr>
@@ -1989,7 +2517,7 @@
           <p:cNvPr id="5" name="슬라이드 번호 개체 틀 4">
             <a:extLst>
               <a:ext uri="{FF2B5EF4-FFF2-40B4-BE49-F238E27FC236}">
-                <a16:creationId xmlns:a16="http://schemas.microsoft.com/office/drawing/2014/main" id="{6F997ACE-7D00-7B35-1F16-F56C5450EF85}"/>
+                <a16:creationId xmlns:a16="http://schemas.microsoft.com/office/drawing/2014/main" xmlns="" id="{6F997ACE-7D00-7B35-1F16-F56C5450EF85}"/>
               </a:ext>
             </a:extLst>
           </p:cNvPr>
@@ -2048,7 +2576,7 @@
           <p:cNvPr id="2" name="날짜 개체 틀 1">
             <a:extLst>
               <a:ext uri="{FF2B5EF4-FFF2-40B4-BE49-F238E27FC236}">
-                <a16:creationId xmlns:a16="http://schemas.microsoft.com/office/drawing/2014/main" id="{2703D88F-9D50-1761-731E-68DD1FC6B740}"/>
+                <a16:creationId xmlns:a16="http://schemas.microsoft.com/office/drawing/2014/main" xmlns="" id="{2703D88F-9D50-1761-731E-68DD1FC6B740}"/>
               </a:ext>
             </a:extLst>
           </p:cNvPr>
@@ -2077,7 +2605,7 @@
           <p:cNvPr id="3" name="바닥글 개체 틀 2">
             <a:extLst>
               <a:ext uri="{FF2B5EF4-FFF2-40B4-BE49-F238E27FC236}">
-                <a16:creationId xmlns:a16="http://schemas.microsoft.com/office/drawing/2014/main" id="{70793086-842E-7906-6019-4284A9E469F4}"/>
+                <a16:creationId xmlns:a16="http://schemas.microsoft.com/office/drawing/2014/main" xmlns="" id="{70793086-842E-7906-6019-4284A9E469F4}"/>
               </a:ext>
             </a:extLst>
           </p:cNvPr>
@@ -2102,7 +2630,7 @@
           <p:cNvPr id="4" name="슬라이드 번호 개체 틀 3">
             <a:extLst>
               <a:ext uri="{FF2B5EF4-FFF2-40B4-BE49-F238E27FC236}">
-                <a16:creationId xmlns:a16="http://schemas.microsoft.com/office/drawing/2014/main" id="{6D4FE3DE-7F26-4352-74EE-A720C7AF5564}"/>
+                <a16:creationId xmlns:a16="http://schemas.microsoft.com/office/drawing/2014/main" xmlns="" id="{6D4FE3DE-7F26-4352-74EE-A720C7AF5564}"/>
               </a:ext>
             </a:extLst>
           </p:cNvPr>
@@ -2161,7 +2689,7 @@
           <p:cNvPr id="2" name="제목 1">
             <a:extLst>
               <a:ext uri="{FF2B5EF4-FFF2-40B4-BE49-F238E27FC236}">
-                <a16:creationId xmlns:a16="http://schemas.microsoft.com/office/drawing/2014/main" id="{0AFB6F63-D5C7-EB4A-A651-8DA5561AD0DC}"/>
+                <a16:creationId xmlns:a16="http://schemas.microsoft.com/office/drawing/2014/main" xmlns="" id="{0AFB6F63-D5C7-EB4A-A651-8DA5561AD0DC}"/>
               </a:ext>
             </a:extLst>
           </p:cNvPr>
@@ -2198,7 +2726,7 @@
           <p:cNvPr id="3" name="내용 개체 틀 2">
             <a:extLst>
               <a:ext uri="{FF2B5EF4-FFF2-40B4-BE49-F238E27FC236}">
-                <a16:creationId xmlns:a16="http://schemas.microsoft.com/office/drawing/2014/main" id="{2000FB2D-0CF3-1A3C-E704-F8CA96C2D5D5}"/>
+                <a16:creationId xmlns:a16="http://schemas.microsoft.com/office/drawing/2014/main" xmlns="" id="{2000FB2D-0CF3-1A3C-E704-F8CA96C2D5D5}"/>
               </a:ext>
             </a:extLst>
           </p:cNvPr>
@@ -2288,7 +2816,7 @@
           <p:cNvPr id="4" name="텍스트 개체 틀 3">
             <a:extLst>
               <a:ext uri="{FF2B5EF4-FFF2-40B4-BE49-F238E27FC236}">
-                <a16:creationId xmlns:a16="http://schemas.microsoft.com/office/drawing/2014/main" id="{88C3C47D-E633-BB5D-0FA3-41A5E3C28A6A}"/>
+                <a16:creationId xmlns:a16="http://schemas.microsoft.com/office/drawing/2014/main" xmlns="" id="{88C3C47D-E633-BB5D-0FA3-41A5E3C28A6A}"/>
               </a:ext>
             </a:extLst>
           </p:cNvPr>
@@ -2359,7 +2887,7 @@
           <p:cNvPr id="5" name="날짜 개체 틀 4">
             <a:extLst>
               <a:ext uri="{FF2B5EF4-FFF2-40B4-BE49-F238E27FC236}">
-                <a16:creationId xmlns:a16="http://schemas.microsoft.com/office/drawing/2014/main" id="{603DA118-0D2F-73A1-6311-85E95462C569}"/>
+                <a16:creationId xmlns:a16="http://schemas.microsoft.com/office/drawing/2014/main" xmlns="" id="{603DA118-0D2F-73A1-6311-85E95462C569}"/>
               </a:ext>
             </a:extLst>
           </p:cNvPr>
@@ -2388,7 +2916,7 @@
           <p:cNvPr id="6" name="바닥글 개체 틀 5">
             <a:extLst>
               <a:ext uri="{FF2B5EF4-FFF2-40B4-BE49-F238E27FC236}">
-                <a16:creationId xmlns:a16="http://schemas.microsoft.com/office/drawing/2014/main" id="{DE46749A-348F-886F-32BD-A562F1A2A3B9}"/>
+                <a16:creationId xmlns:a16="http://schemas.microsoft.com/office/drawing/2014/main" xmlns="" id="{DE46749A-348F-886F-32BD-A562F1A2A3B9}"/>
               </a:ext>
             </a:extLst>
           </p:cNvPr>
@@ -2413,7 +2941,7 @@
           <p:cNvPr id="7" name="슬라이드 번호 개체 틀 6">
             <a:extLst>
               <a:ext uri="{FF2B5EF4-FFF2-40B4-BE49-F238E27FC236}">
-                <a16:creationId xmlns:a16="http://schemas.microsoft.com/office/drawing/2014/main" id="{0BF22D09-FBE9-294C-014E-9A808723A1A7}"/>
+                <a16:creationId xmlns:a16="http://schemas.microsoft.com/office/drawing/2014/main" xmlns="" id="{0BF22D09-FBE9-294C-014E-9A808723A1A7}"/>
               </a:ext>
             </a:extLst>
           </p:cNvPr>
@@ -2472,7 +3000,7 @@
           <p:cNvPr id="2" name="제목 1">
             <a:extLst>
               <a:ext uri="{FF2B5EF4-FFF2-40B4-BE49-F238E27FC236}">
-                <a16:creationId xmlns:a16="http://schemas.microsoft.com/office/drawing/2014/main" id="{DA50C132-3A30-7E9C-0BBB-1CD1A789CE68}"/>
+                <a16:creationId xmlns:a16="http://schemas.microsoft.com/office/drawing/2014/main" xmlns="" id="{DA50C132-3A30-7E9C-0BBB-1CD1A789CE68}"/>
               </a:ext>
             </a:extLst>
           </p:cNvPr>
@@ -2509,7 +3037,7 @@
           <p:cNvPr id="3" name="그림 개체 틀 2">
             <a:extLst>
               <a:ext uri="{FF2B5EF4-FFF2-40B4-BE49-F238E27FC236}">
-                <a16:creationId xmlns:a16="http://schemas.microsoft.com/office/drawing/2014/main" id="{2F31776A-D32D-34F5-8A99-A26F4F6535B9}"/>
+                <a16:creationId xmlns:a16="http://schemas.microsoft.com/office/drawing/2014/main" xmlns="" id="{2F31776A-D32D-34F5-8A99-A26F4F6535B9}"/>
               </a:ext>
             </a:extLst>
           </p:cNvPr>
@@ -2576,7 +3104,7 @@
           <p:cNvPr id="4" name="텍스트 개체 틀 3">
             <a:extLst>
               <a:ext uri="{FF2B5EF4-FFF2-40B4-BE49-F238E27FC236}">
-                <a16:creationId xmlns:a16="http://schemas.microsoft.com/office/drawing/2014/main" id="{3E500BF3-C366-20F6-6257-8233A0794521}"/>
+                <a16:creationId xmlns:a16="http://schemas.microsoft.com/office/drawing/2014/main" xmlns="" id="{3E500BF3-C366-20F6-6257-8233A0794521}"/>
               </a:ext>
             </a:extLst>
           </p:cNvPr>
@@ -2647,7 +3175,7 @@
           <p:cNvPr id="5" name="날짜 개체 틀 4">
             <a:extLst>
               <a:ext uri="{FF2B5EF4-FFF2-40B4-BE49-F238E27FC236}">
-                <a16:creationId xmlns:a16="http://schemas.microsoft.com/office/drawing/2014/main" id="{DB1C119C-B590-D055-6B10-AAE861F0D2B1}"/>
+                <a16:creationId xmlns:a16="http://schemas.microsoft.com/office/drawing/2014/main" xmlns="" id="{DB1C119C-B590-D055-6B10-AAE861F0D2B1}"/>
               </a:ext>
             </a:extLst>
           </p:cNvPr>
@@ -2676,7 +3204,7 @@
           <p:cNvPr id="6" name="바닥글 개체 틀 5">
             <a:extLst>
               <a:ext uri="{FF2B5EF4-FFF2-40B4-BE49-F238E27FC236}">
-                <a16:creationId xmlns:a16="http://schemas.microsoft.com/office/drawing/2014/main" id="{00064F92-4550-973E-464E-89CA3E7EED4F}"/>
+                <a16:creationId xmlns:a16="http://schemas.microsoft.com/office/drawing/2014/main" xmlns="" id="{00064F92-4550-973E-464E-89CA3E7EED4F}"/>
               </a:ext>
             </a:extLst>
           </p:cNvPr>
@@ -2701,7 +3229,7 @@
           <p:cNvPr id="7" name="슬라이드 번호 개체 틀 6">
             <a:extLst>
               <a:ext uri="{FF2B5EF4-FFF2-40B4-BE49-F238E27FC236}">
-                <a16:creationId xmlns:a16="http://schemas.microsoft.com/office/drawing/2014/main" id="{708384D1-792D-8EA8-718E-F756CEE623A7}"/>
+                <a16:creationId xmlns:a16="http://schemas.microsoft.com/office/drawing/2014/main" xmlns="" id="{708384D1-792D-8EA8-718E-F756CEE623A7}"/>
               </a:ext>
             </a:extLst>
           </p:cNvPr>
@@ -2765,7 +3293,7 @@
           <p:cNvPr id="2" name="제목 개체 틀 1">
             <a:extLst>
               <a:ext uri="{FF2B5EF4-FFF2-40B4-BE49-F238E27FC236}">
-                <a16:creationId xmlns:a16="http://schemas.microsoft.com/office/drawing/2014/main" id="{C0AC0570-6E75-D8C0-582D-3A448969CF8B}"/>
+                <a16:creationId xmlns:a16="http://schemas.microsoft.com/office/drawing/2014/main" xmlns="" id="{C0AC0570-6E75-D8C0-582D-3A448969CF8B}"/>
               </a:ext>
             </a:extLst>
           </p:cNvPr>
@@ -2803,7 +3331,7 @@
           <p:cNvPr id="3" name="텍스트 개체 틀 2">
             <a:extLst>
               <a:ext uri="{FF2B5EF4-FFF2-40B4-BE49-F238E27FC236}">
-                <a16:creationId xmlns:a16="http://schemas.microsoft.com/office/drawing/2014/main" id="{79ADFDDF-DF3C-19FA-0ED8-5D640C08DB4B}"/>
+                <a16:creationId xmlns:a16="http://schemas.microsoft.com/office/drawing/2014/main" xmlns="" id="{79ADFDDF-DF3C-19FA-0ED8-5D640C08DB4B}"/>
               </a:ext>
             </a:extLst>
           </p:cNvPr>
@@ -2870,7 +3398,7 @@
           <p:cNvPr id="4" name="날짜 개체 틀 3">
             <a:extLst>
               <a:ext uri="{FF2B5EF4-FFF2-40B4-BE49-F238E27FC236}">
-                <a16:creationId xmlns:a16="http://schemas.microsoft.com/office/drawing/2014/main" id="{AB9AC677-7913-29B2-30F7-969771FA5D05}"/>
+                <a16:creationId xmlns:a16="http://schemas.microsoft.com/office/drawing/2014/main" xmlns="" id="{AB9AC677-7913-29B2-30F7-969771FA5D05}"/>
               </a:ext>
             </a:extLst>
           </p:cNvPr>
@@ -2917,7 +3445,7 @@
           <p:cNvPr id="5" name="바닥글 개체 틀 4">
             <a:extLst>
               <a:ext uri="{FF2B5EF4-FFF2-40B4-BE49-F238E27FC236}">
-                <a16:creationId xmlns:a16="http://schemas.microsoft.com/office/drawing/2014/main" id="{3A6836E4-21B2-245A-8933-7F64F64AC382}"/>
+                <a16:creationId xmlns:a16="http://schemas.microsoft.com/office/drawing/2014/main" xmlns="" id="{3A6836E4-21B2-245A-8933-7F64F64AC382}"/>
               </a:ext>
             </a:extLst>
           </p:cNvPr>
@@ -2960,7 +3488,7 @@
           <p:cNvPr id="6" name="슬라이드 번호 개체 틀 5">
             <a:extLst>
               <a:ext uri="{FF2B5EF4-FFF2-40B4-BE49-F238E27FC236}">
-                <a16:creationId xmlns:a16="http://schemas.microsoft.com/office/drawing/2014/main" id="{6F2D0B4E-8F0D-F1B8-2A71-9862FC9749C5}"/>
+                <a16:creationId xmlns:a16="http://schemas.microsoft.com/office/drawing/2014/main" xmlns="" id="{6F2D0B4E-8F0D-F1B8-2A71-9862FC9749C5}"/>
               </a:ext>
             </a:extLst>
           </p:cNvPr>
@@ -3328,7 +3856,7 @@
           <p:cNvPr id="4" name="TextBox 3">
             <a:extLst>
               <a:ext uri="{FF2B5EF4-FFF2-40B4-BE49-F238E27FC236}">
-                <a16:creationId xmlns:a16="http://schemas.microsoft.com/office/drawing/2014/main" id="{793E08CF-A6B7-6BE9-B7B8-4498ADC66316}"/>
+                <a16:creationId xmlns:a16="http://schemas.microsoft.com/office/drawing/2014/main" xmlns="" id="{793E08CF-A6B7-6BE9-B7B8-4498ADC66316}"/>
               </a:ext>
             </a:extLst>
           </p:cNvPr>
@@ -3337,8 +3865,8 @@
         </p:nvSpPr>
         <p:spPr>
           <a:xfrm>
-            <a:off x="202018" y="352278"/>
-            <a:ext cx="4944140" cy="369332"/>
+            <a:off x="455516" y="2869142"/>
+            <a:ext cx="6615242" cy="738664"/>
           </a:xfrm>
           <a:prstGeom prst="rect">
             <a:avLst/>
@@ -3352,17 +3880,49 @@
           <a:lstStyle/>
           <a:p>
             <a:r>
-              <a:rPr lang="ko-KR" altLang="en-US" dirty="0"/>
+              <a:rPr lang="ko-KR" altLang="en-US" sz="2400" dirty="0"/>
               <a:t>주제 </a:t>
             </a:r>
             <a:r>
-              <a:rPr lang="en-US" altLang="ko-KR" dirty="0"/>
-              <a:t>: 1</a:t>
-            </a:r>
-            <a:r>
-              <a:rPr lang="ko-KR" altLang="en-US" dirty="0"/>
+              <a:rPr lang="en-US" altLang="ko-KR" sz="2400" dirty="0"/>
+              <a:t>: </a:t>
+            </a:r>
+            <a:r>
+              <a:rPr lang="ko-KR" altLang="en-US" sz="2400" dirty="0" smtClean="0"/>
+              <a:t>캐릭터 애니메이션 </a:t>
+            </a:r>
+            <a:r>
+              <a:rPr lang="ko-KR" altLang="en-US" sz="2400" dirty="0" err="1" smtClean="0"/>
+              <a:t>파쿠르</a:t>
+            </a:r>
+            <a:r>
+              <a:rPr lang="ko-KR" altLang="en-US" sz="2400" dirty="0" smtClean="0"/>
+              <a:t> 시스템 </a:t>
+            </a:r>
+            <a:r>
+              <a:rPr lang="en-US" altLang="ko-KR" sz="2400" dirty="0" smtClean="0"/>
+              <a:t>1</a:t>
+            </a:r>
+            <a:r>
+              <a:rPr lang="ko-KR" altLang="en-US" sz="2400" dirty="0" smtClean="0"/>
               <a:t>주차</a:t>
             </a:r>
+            <a:endParaRPr lang="en-US" altLang="ko-KR" sz="2400" dirty="0" smtClean="0"/>
+          </a:p>
+          <a:p>
+            <a:r>
+              <a:rPr lang="ko-KR" altLang="en-US" dirty="0" smtClean="0"/>
+              <a:t>발표자 </a:t>
+            </a:r>
+            <a:r>
+              <a:rPr lang="en-US" altLang="ko-KR" dirty="0" smtClean="0"/>
+              <a:t>: </a:t>
+            </a:r>
+            <a:r>
+              <a:rPr lang="ko-KR" altLang="en-US" dirty="0" smtClean="0"/>
+              <a:t>김정환</a:t>
+            </a:r>
+            <a:endParaRPr lang="ko-KR" altLang="en-US" dirty="0"/>
           </a:p>
         </p:txBody>
       </p:sp>
@@ -3387,7 +3947,7 @@
         <p:cNvPr id="1" name="">
           <a:extLst>
             <a:ext uri="{FF2B5EF4-FFF2-40B4-BE49-F238E27FC236}">
-              <a16:creationId xmlns:a16="http://schemas.microsoft.com/office/drawing/2014/main" id="{49DA7EAA-204E-2F90-E52A-6C83B9013025}"/>
+              <a16:creationId xmlns:a16="http://schemas.microsoft.com/office/drawing/2014/main" xmlns="" id="{068E24C7-A429-CDA0-4EB6-16142BB05552}"/>
             </a:ext>
           </a:extLst>
         </p:cNvPr>
@@ -3404,10 +3964,10 @@
       </p:grpSpPr>
       <p:sp>
         <p:nvSpPr>
-          <p:cNvPr id="4" name="TextBox 3">
+          <p:cNvPr id="5" name="TextBox 4">
             <a:extLst>
               <a:ext uri="{FF2B5EF4-FFF2-40B4-BE49-F238E27FC236}">
-                <a16:creationId xmlns:a16="http://schemas.microsoft.com/office/drawing/2014/main" id="{1D991C93-DF9D-3E4E-5C97-ABAB7565CD54}"/>
+                <a16:creationId xmlns:a16="http://schemas.microsoft.com/office/drawing/2014/main" xmlns="" id="{4715F932-2F2C-4A3F-7F16-1B13D352985A}"/>
               </a:ext>
             </a:extLst>
           </p:cNvPr>
@@ -3416,8 +3976,8 @@
         </p:nvSpPr>
         <p:spPr>
           <a:xfrm>
-            <a:off x="276446" y="383624"/>
-            <a:ext cx="4944140" cy="646331"/>
+            <a:off x="302451" y="315453"/>
+            <a:ext cx="4944140" cy="369332"/>
           </a:xfrm>
           <a:prstGeom prst="rect">
             <a:avLst/>
@@ -3430,39 +3990,921 @@
           </a:bodyPr>
           <a:lstStyle/>
           <a:p>
+            <a:r>
+              <a:rPr lang="ko-KR" altLang="en-US" dirty="0"/>
+              <a:t>이번 주 작업 내역</a:t>
+            </a:r>
+            <a:endParaRPr lang="en-US" altLang="ko-KR" dirty="0"/>
+          </a:p>
+        </p:txBody>
+      </p:sp>
+      <p:sp>
+        <p:nvSpPr>
+          <p:cNvPr id="6" name="TextBox 5">
+            <a:extLst>
+              <a:ext uri="{FF2B5EF4-FFF2-40B4-BE49-F238E27FC236}">
+                <a16:creationId xmlns:a16="http://schemas.microsoft.com/office/drawing/2014/main" xmlns="" id="{6DE5C835-CE30-2461-B5B2-C304088E694A}"/>
+              </a:ext>
+            </a:extLst>
+          </p:cNvPr>
+          <p:cNvSpPr txBox="1"/>
+          <p:nvPr/>
+        </p:nvSpPr>
+        <p:spPr>
+          <a:xfrm>
+            <a:off x="302451" y="758852"/>
+            <a:ext cx="8118068" cy="584775"/>
+          </a:xfrm>
+          <a:prstGeom prst="rect">
+            <a:avLst/>
+          </a:prstGeom>
+          <a:noFill/>
+        </p:spPr>
+        <p:txBody>
+          <a:bodyPr wrap="square" rtlCol="0">
+            <a:spAutoFit/>
+          </a:bodyPr>
+          <a:lstStyle/>
+          <a:p>
             <a:pPr marL="285750" indent="-285750">
               <a:buFont typeface="Arial" panose="020B0604020202020204" pitchFamily="34" charset="0"/>
               <a:buChar char="•"/>
             </a:pPr>
             <a:r>
-              <a:rPr lang="ko-KR" altLang="en-US" dirty="0"/>
-              <a:t>목표 </a:t>
-            </a:r>
-            <a:r>
-              <a:rPr lang="en-US" altLang="ko-KR" dirty="0"/>
-              <a:t>: </a:t>
-            </a:r>
-          </a:p>
-          <a:p>
-            <a:pPr marL="285750" indent="-285750">
+              <a:rPr lang="ko-KR" altLang="en-US" sz="1600" dirty="0" smtClean="0"/>
+              <a:t>미니엔진 구성 파악</a:t>
+            </a:r>
+            <a:endParaRPr lang="en-US" altLang="ko-KR" sz="1600" dirty="0" smtClean="0"/>
+          </a:p>
+          <a:p>
+            <a:pPr marL="742950" lvl="1" indent="-285750">
               <a:buFont typeface="Arial" panose="020B0604020202020204" pitchFamily="34" charset="0"/>
               <a:buChar char="•"/>
             </a:pPr>
             <a:r>
-              <a:rPr lang="ko-KR" altLang="en-US" dirty="0"/>
-              <a:t>진행 방식 </a:t>
-            </a:r>
-            <a:r>
-              <a:rPr lang="en-US" altLang="ko-KR" dirty="0"/>
-              <a:t>:</a:t>
-            </a:r>
+              <a:rPr lang="en-US" altLang="ko-KR" sz="1600" dirty="0"/>
+              <a:t>https://</a:t>
+            </a:r>
+            <a:r>
+              <a:rPr lang="en-US" altLang="ko-KR" sz="1600" dirty="0" smtClean="0"/>
+              <a:t>github.com/microsoft/DirectX-Graphics-Samples</a:t>
+            </a:r>
+            <a:endParaRPr lang="en-US" altLang="ko-KR" sz="1600" dirty="0" smtClean="0"/>
+          </a:p>
+        </p:txBody>
+      </p:sp>
+      <p:sp>
+        <p:nvSpPr>
+          <p:cNvPr id="7" name="직사각형 6"/>
+          <p:cNvSpPr/>
+          <p:nvPr/>
+        </p:nvSpPr>
+        <p:spPr>
+          <a:xfrm>
+            <a:off x="1905176" y="1664107"/>
+            <a:ext cx="1858944" cy="552661"/>
+          </a:xfrm>
+          <a:prstGeom prst="rect">
+            <a:avLst/>
+          </a:prstGeom>
+          <a:solidFill>
+            <a:schemeClr val="accent5">
+              <a:lumMod val="50000"/>
+            </a:schemeClr>
+          </a:solidFill>
+        </p:spPr>
+        <p:style>
+          <a:lnRef idx="2">
+            <a:schemeClr val="accent1">
+              <a:shade val="50000"/>
+            </a:schemeClr>
+          </a:lnRef>
+          <a:fillRef idx="1">
+            <a:schemeClr val="accent1"/>
+          </a:fillRef>
+          <a:effectRef idx="0">
+            <a:schemeClr val="accent1"/>
+          </a:effectRef>
+          <a:fontRef idx="minor">
+            <a:schemeClr val="lt1"/>
+          </a:fontRef>
+        </p:style>
+        <p:txBody>
+          <a:bodyPr rtlCol="0" anchor="ctr"/>
+          <a:lstStyle/>
+          <a:p>
+            <a:pPr algn="ctr"/>
+            <a:r>
+              <a:rPr lang="en-US" altLang="ko-KR" sz="1400" dirty="0" smtClean="0">
+                <a:solidFill>
+                  <a:schemeClr val="bg1"/>
+                </a:solidFill>
+              </a:rPr>
+              <a:t>Core</a:t>
+            </a:r>
+            <a:endParaRPr lang="ko-KR" altLang="en-US" sz="1400" dirty="0">
+              <a:solidFill>
+                <a:schemeClr val="bg1"/>
+              </a:solidFill>
+            </a:endParaRPr>
+          </a:p>
+        </p:txBody>
+      </p:sp>
+      <p:sp>
+        <p:nvSpPr>
+          <p:cNvPr id="9" name="직사각형 8"/>
+          <p:cNvSpPr/>
+          <p:nvPr/>
+        </p:nvSpPr>
+        <p:spPr>
+          <a:xfrm>
+            <a:off x="5900891" y="1666095"/>
+            <a:ext cx="1858944" cy="552661"/>
+          </a:xfrm>
+          <a:prstGeom prst="rect">
+            <a:avLst/>
+          </a:prstGeom>
+          <a:solidFill>
+            <a:schemeClr val="bg2"/>
+          </a:solidFill>
+        </p:spPr>
+        <p:style>
+          <a:lnRef idx="2">
+            <a:schemeClr val="accent1">
+              <a:shade val="50000"/>
+            </a:schemeClr>
+          </a:lnRef>
+          <a:fillRef idx="1">
+            <a:schemeClr val="accent1"/>
+          </a:fillRef>
+          <a:effectRef idx="0">
+            <a:schemeClr val="accent1"/>
+          </a:effectRef>
+          <a:fontRef idx="minor">
+            <a:schemeClr val="lt1"/>
+          </a:fontRef>
+        </p:style>
+        <p:txBody>
+          <a:bodyPr rtlCol="0" anchor="ctr"/>
+          <a:lstStyle/>
+          <a:p>
+            <a:pPr algn="ctr"/>
+            <a:r>
+              <a:rPr lang="en-US" altLang="ko-KR" sz="1400" dirty="0" err="1" smtClean="0">
+                <a:solidFill>
+                  <a:schemeClr val="tx1"/>
+                </a:solidFill>
+              </a:rPr>
+              <a:t>IGameApp</a:t>
+            </a:r>
+            <a:endParaRPr lang="ko-KR" altLang="en-US" sz="1400" dirty="0">
+              <a:solidFill>
+                <a:schemeClr val="tx1"/>
+              </a:solidFill>
+            </a:endParaRPr>
+          </a:p>
+        </p:txBody>
+      </p:sp>
+      <p:sp>
+        <p:nvSpPr>
+          <p:cNvPr id="13" name="직사각형 12"/>
+          <p:cNvSpPr/>
+          <p:nvPr/>
+        </p:nvSpPr>
+        <p:spPr>
+          <a:xfrm>
+            <a:off x="5900892" y="3219467"/>
+            <a:ext cx="1858944" cy="552661"/>
+          </a:xfrm>
+          <a:prstGeom prst="rect">
+            <a:avLst/>
+          </a:prstGeom>
+          <a:solidFill>
+            <a:schemeClr val="accent5">
+              <a:lumMod val="50000"/>
+            </a:schemeClr>
+          </a:solidFill>
+        </p:spPr>
+        <p:style>
+          <a:lnRef idx="2">
+            <a:schemeClr val="accent1">
+              <a:shade val="50000"/>
+            </a:schemeClr>
+          </a:lnRef>
+          <a:fillRef idx="1">
+            <a:schemeClr val="accent1"/>
+          </a:fillRef>
+          <a:effectRef idx="0">
+            <a:schemeClr val="accent1"/>
+          </a:effectRef>
+          <a:fontRef idx="minor">
+            <a:schemeClr val="lt1"/>
+          </a:fontRef>
+        </p:style>
+        <p:txBody>
+          <a:bodyPr rtlCol="0" anchor="ctr"/>
+          <a:lstStyle/>
+          <a:p>
+            <a:pPr algn="ctr"/>
+            <a:r>
+              <a:rPr lang="en-US" altLang="ko-KR" sz="1400" dirty="0" err="1" smtClean="0">
+                <a:solidFill>
+                  <a:schemeClr val="bg1"/>
+                </a:solidFill>
+              </a:rPr>
+              <a:t>ModelViewer</a:t>
+            </a:r>
+            <a:endParaRPr lang="ko-KR" altLang="en-US" sz="1400" dirty="0">
+              <a:solidFill>
+                <a:schemeClr val="bg1"/>
+              </a:solidFill>
+            </a:endParaRPr>
+          </a:p>
+        </p:txBody>
+      </p:sp>
+      <p:cxnSp>
+        <p:nvCxnSpPr>
+          <p:cNvPr id="15" name="꺾인 연결선 14"/>
+          <p:cNvCxnSpPr>
+            <a:stCxn id="13" idx="0"/>
+            <a:endCxn id="9" idx="2"/>
+          </p:cNvCxnSpPr>
+          <p:nvPr/>
+        </p:nvCxnSpPr>
+        <p:spPr>
+          <a:xfrm rot="16200000" flipV="1">
+            <a:off x="6330009" y="2719111"/>
+            <a:ext cx="1000711" cy="1"/>
+          </a:xfrm>
+          <a:prstGeom prst="bentConnector3">
+            <a:avLst>
+              <a:gd name="adj1" fmla="val 50000"/>
+            </a:avLst>
+          </a:prstGeom>
+          <a:ln>
+            <a:tailEnd type="triangle"/>
+          </a:ln>
+        </p:spPr>
+        <p:style>
+          <a:lnRef idx="2">
+            <a:schemeClr val="accent1"/>
+          </a:lnRef>
+          <a:fillRef idx="0">
+            <a:schemeClr val="accent1"/>
+          </a:fillRef>
+          <a:effectRef idx="1">
+            <a:schemeClr val="accent1"/>
+          </a:effectRef>
+          <a:fontRef idx="minor">
+            <a:schemeClr val="tx1"/>
+          </a:fontRef>
+        </p:style>
+      </p:cxnSp>
+      <p:sp>
+        <p:nvSpPr>
+          <p:cNvPr id="17" name="TextBox 16"/>
+          <p:cNvSpPr txBox="1"/>
+          <p:nvPr/>
+        </p:nvSpPr>
+        <p:spPr>
+          <a:xfrm>
+            <a:off x="6836857" y="2540974"/>
+            <a:ext cx="569387" cy="323165"/>
+          </a:xfrm>
+          <a:prstGeom prst="rect">
+            <a:avLst/>
+          </a:prstGeom>
+          <a:noFill/>
+        </p:spPr>
+        <p:txBody>
+          <a:bodyPr wrap="none" rtlCol="0">
+            <a:spAutoFit/>
+          </a:bodyPr>
+          <a:lstStyle/>
+          <a:p>
+            <a:r>
+              <a:rPr lang="ko-KR" altLang="en-US" sz="1500" dirty="0" smtClean="0"/>
+              <a:t>구현</a:t>
+            </a:r>
+            <a:endParaRPr lang="ko-KR" altLang="en-US" sz="1500" dirty="0"/>
+          </a:p>
+        </p:txBody>
+      </p:sp>
+      <p:sp>
+        <p:nvSpPr>
+          <p:cNvPr id="18" name="TextBox 17"/>
+          <p:cNvSpPr txBox="1"/>
+          <p:nvPr/>
+        </p:nvSpPr>
+        <p:spPr>
+          <a:xfrm>
+            <a:off x="7759835" y="3219467"/>
+            <a:ext cx="1568058" cy="553998"/>
+          </a:xfrm>
+          <a:prstGeom prst="rect">
+            <a:avLst/>
+          </a:prstGeom>
+          <a:noFill/>
+        </p:spPr>
+        <p:txBody>
+          <a:bodyPr wrap="none" rtlCol="0">
+            <a:spAutoFit/>
+          </a:bodyPr>
+          <a:lstStyle/>
+          <a:p>
+            <a:r>
+              <a:rPr lang="en-US" altLang="ko-KR" sz="1500" dirty="0" err="1" smtClean="0"/>
+              <a:t>GameApp</a:t>
+            </a:r>
+            <a:r>
+              <a:rPr lang="en-US" altLang="ko-KR" sz="1500" dirty="0" smtClean="0"/>
+              <a:t> </a:t>
+            </a:r>
+            <a:r>
+              <a:rPr lang="ko-KR" altLang="en-US" sz="1500" dirty="0" smtClean="0"/>
+              <a:t>구현 </a:t>
+            </a:r>
+            <a:r>
+              <a:rPr lang="en-US" altLang="ko-KR" sz="1500" dirty="0" smtClean="0"/>
+              <a:t/>
+            </a:r>
+            <a:br>
+              <a:rPr lang="en-US" altLang="ko-KR" sz="1500" dirty="0" smtClean="0"/>
+            </a:br>
+            <a:r>
+              <a:rPr lang="ko-KR" altLang="en-US" sz="1500" dirty="0" smtClean="0"/>
+              <a:t>예시 프로젝트</a:t>
+            </a:r>
+            <a:endParaRPr lang="ko-KR" altLang="en-US" sz="1500" dirty="0"/>
+          </a:p>
+        </p:txBody>
+      </p:sp>
+      <p:sp>
+        <p:nvSpPr>
+          <p:cNvPr id="20" name="TextBox 19"/>
+          <p:cNvSpPr txBox="1"/>
+          <p:nvPr/>
+        </p:nvSpPr>
+        <p:spPr>
+          <a:xfrm>
+            <a:off x="2930198" y="2339988"/>
+            <a:ext cx="2185727" cy="553998"/>
+          </a:xfrm>
+          <a:prstGeom prst="rect">
+            <a:avLst/>
+          </a:prstGeom>
+          <a:noFill/>
+        </p:spPr>
+        <p:txBody>
+          <a:bodyPr wrap="none" rtlCol="0">
+            <a:spAutoFit/>
+          </a:bodyPr>
+          <a:lstStyle/>
+          <a:p>
+            <a:r>
+              <a:rPr lang="en-US" altLang="ko-KR" sz="1500" dirty="0" smtClean="0"/>
+              <a:t>DirectX12 </a:t>
+            </a:r>
+            <a:r>
+              <a:rPr lang="ko-KR" altLang="en-US" sz="1500" dirty="0" smtClean="0"/>
+              <a:t>및 엔진 구현</a:t>
+            </a:r>
+            <a:r>
+              <a:rPr lang="en-US" altLang="ko-KR" sz="1500" dirty="0" smtClean="0"/>
+              <a:t/>
+            </a:r>
+            <a:br>
+              <a:rPr lang="en-US" altLang="ko-KR" sz="1500" dirty="0" smtClean="0"/>
+            </a:br>
+            <a:r>
+              <a:rPr lang="ko-KR" altLang="en-US" sz="1500" dirty="0" smtClean="0"/>
+              <a:t>정적 라이브러리</a:t>
+            </a:r>
+            <a:endParaRPr lang="ko-KR" altLang="en-US" sz="1500" dirty="0"/>
+          </a:p>
+        </p:txBody>
+      </p:sp>
+      <p:sp>
+        <p:nvSpPr>
+          <p:cNvPr id="21" name="직사각형 20"/>
+          <p:cNvSpPr/>
+          <p:nvPr/>
+        </p:nvSpPr>
+        <p:spPr>
+          <a:xfrm>
+            <a:off x="1905175" y="4519215"/>
+            <a:ext cx="1858944" cy="552661"/>
+          </a:xfrm>
+          <a:prstGeom prst="rect">
+            <a:avLst/>
+          </a:prstGeom>
+          <a:solidFill>
+            <a:schemeClr val="accent5">
+              <a:lumMod val="50000"/>
+            </a:schemeClr>
+          </a:solidFill>
+        </p:spPr>
+        <p:style>
+          <a:lnRef idx="2">
+            <a:schemeClr val="accent1">
+              <a:shade val="50000"/>
+            </a:schemeClr>
+          </a:lnRef>
+          <a:fillRef idx="1">
+            <a:schemeClr val="accent1"/>
+          </a:fillRef>
+          <a:effectRef idx="0">
+            <a:schemeClr val="accent1"/>
+          </a:effectRef>
+          <a:fontRef idx="minor">
+            <a:schemeClr val="lt1"/>
+          </a:fontRef>
+        </p:style>
+        <p:txBody>
+          <a:bodyPr rtlCol="0" anchor="ctr"/>
+          <a:lstStyle/>
+          <a:p>
+            <a:pPr algn="ctr"/>
+            <a:r>
+              <a:rPr lang="en-US" altLang="ko-KR" sz="1400" dirty="0" smtClean="0">
+                <a:solidFill>
+                  <a:schemeClr val="bg1"/>
+                </a:solidFill>
+              </a:rPr>
+              <a:t>Model</a:t>
+            </a:r>
+            <a:endParaRPr lang="ko-KR" altLang="en-US" sz="1400" dirty="0">
+              <a:solidFill>
+                <a:schemeClr val="bg1"/>
+              </a:solidFill>
+            </a:endParaRPr>
+          </a:p>
+        </p:txBody>
+      </p:sp>
+      <p:sp>
+        <p:nvSpPr>
+          <p:cNvPr id="22" name="TextBox 21"/>
+          <p:cNvSpPr txBox="1"/>
+          <p:nvPr/>
+        </p:nvSpPr>
+        <p:spPr>
+          <a:xfrm>
+            <a:off x="1905175" y="5137972"/>
+            <a:ext cx="2117887" cy="553998"/>
+          </a:xfrm>
+          <a:prstGeom prst="rect">
+            <a:avLst/>
+          </a:prstGeom>
+          <a:noFill/>
+        </p:spPr>
+        <p:txBody>
+          <a:bodyPr wrap="none" rtlCol="0">
+            <a:spAutoFit/>
+          </a:bodyPr>
+          <a:lstStyle/>
+          <a:p>
+            <a:r>
+              <a:rPr lang="ko-KR" altLang="en-US" sz="1500" dirty="0" smtClean="0"/>
+              <a:t>모델 </a:t>
+            </a:r>
+            <a:r>
+              <a:rPr lang="ko-KR" altLang="en-US" sz="1500" dirty="0" err="1" smtClean="0"/>
+              <a:t>렌더링</a:t>
+            </a:r>
+            <a:r>
+              <a:rPr lang="ko-KR" altLang="en-US" sz="1500" dirty="0" smtClean="0"/>
+              <a:t> 구현 예시</a:t>
+            </a:r>
+            <a:endParaRPr lang="en-US" altLang="ko-KR" sz="1500" dirty="0" smtClean="0"/>
+          </a:p>
+          <a:p>
+            <a:r>
+              <a:rPr lang="ko-KR" altLang="en-US" sz="1500" dirty="0" smtClean="0"/>
+              <a:t>정적 라이브러리</a:t>
+            </a:r>
+            <a:endParaRPr lang="ko-KR" altLang="en-US" sz="1500" dirty="0"/>
+          </a:p>
+        </p:txBody>
+      </p:sp>
+      <p:cxnSp>
+        <p:nvCxnSpPr>
+          <p:cNvPr id="25" name="꺾인 연결선 24"/>
+          <p:cNvCxnSpPr>
+            <a:stCxn id="13" idx="2"/>
+            <a:endCxn id="21" idx="3"/>
+          </p:cNvCxnSpPr>
+          <p:nvPr/>
+        </p:nvCxnSpPr>
+        <p:spPr>
+          <a:xfrm rot="5400000">
+            <a:off x="4785533" y="2750715"/>
+            <a:ext cx="1023418" cy="3066245"/>
+          </a:xfrm>
+          <a:prstGeom prst="bentConnector2">
+            <a:avLst/>
+          </a:prstGeom>
+          <a:ln>
+            <a:tailEnd type="triangle"/>
+          </a:ln>
+        </p:spPr>
+        <p:style>
+          <a:lnRef idx="2">
+            <a:schemeClr val="accent1"/>
+          </a:lnRef>
+          <a:fillRef idx="0">
+            <a:schemeClr val="accent1"/>
+          </a:fillRef>
+          <a:effectRef idx="1">
+            <a:schemeClr val="accent1"/>
+          </a:effectRef>
+          <a:fontRef idx="minor">
+            <a:schemeClr val="tx1"/>
+          </a:fontRef>
+        </p:style>
+      </p:cxnSp>
+      <p:sp>
+        <p:nvSpPr>
+          <p:cNvPr id="27" name="TextBox 26"/>
+          <p:cNvSpPr txBox="1"/>
+          <p:nvPr/>
+        </p:nvSpPr>
+        <p:spPr>
+          <a:xfrm>
+            <a:off x="7783738" y="1662069"/>
+            <a:ext cx="1925527" cy="553998"/>
+          </a:xfrm>
+          <a:prstGeom prst="rect">
+            <a:avLst/>
+          </a:prstGeom>
+          <a:noFill/>
+        </p:spPr>
+        <p:txBody>
+          <a:bodyPr wrap="none" rtlCol="0">
+            <a:spAutoFit/>
+          </a:bodyPr>
+          <a:lstStyle/>
+          <a:p>
+            <a:r>
+              <a:rPr lang="ko-KR" altLang="en-US" sz="1500" dirty="0" smtClean="0"/>
+              <a:t>엔진 게임루프 구현 </a:t>
+            </a:r>
+            <a:r>
+              <a:rPr lang="en-US" altLang="ko-KR" sz="1500" dirty="0" smtClean="0"/>
+              <a:t/>
+            </a:r>
+            <a:br>
+              <a:rPr lang="en-US" altLang="ko-KR" sz="1500" dirty="0" smtClean="0"/>
+            </a:br>
+            <a:r>
+              <a:rPr lang="ko-KR" altLang="en-US" sz="1500" dirty="0" smtClean="0"/>
+              <a:t>인터페이스</a:t>
+            </a:r>
+            <a:endParaRPr lang="ko-KR" altLang="en-US" sz="1500" dirty="0"/>
+          </a:p>
+        </p:txBody>
+      </p:sp>
+      <p:cxnSp>
+        <p:nvCxnSpPr>
+          <p:cNvPr id="30" name="꺾인 연결선 29"/>
+          <p:cNvCxnSpPr>
+            <a:stCxn id="21" idx="0"/>
+            <a:endCxn id="7" idx="2"/>
+          </p:cNvCxnSpPr>
+          <p:nvPr/>
+        </p:nvCxnSpPr>
+        <p:spPr>
+          <a:xfrm rot="5400000" flipH="1" flipV="1">
+            <a:off x="1683424" y="3367992"/>
+            <a:ext cx="2302447" cy="1"/>
+          </a:xfrm>
+          <a:prstGeom prst="bentConnector3">
+            <a:avLst/>
+          </a:prstGeom>
+          <a:ln>
+            <a:tailEnd type="triangle"/>
+          </a:ln>
+        </p:spPr>
+        <p:style>
+          <a:lnRef idx="2">
+            <a:schemeClr val="accent1"/>
+          </a:lnRef>
+          <a:fillRef idx="0">
+            <a:schemeClr val="accent1"/>
+          </a:fillRef>
+          <a:effectRef idx="1">
+            <a:schemeClr val="accent1"/>
+          </a:effectRef>
+          <a:fontRef idx="minor">
+            <a:schemeClr val="tx1"/>
+          </a:fontRef>
+        </p:style>
+      </p:cxnSp>
+      <p:sp>
+        <p:nvSpPr>
+          <p:cNvPr id="57" name="TextBox 56"/>
+          <p:cNvSpPr txBox="1"/>
+          <p:nvPr/>
+        </p:nvSpPr>
+        <p:spPr>
+          <a:xfrm>
+            <a:off x="2081474" y="3346461"/>
+            <a:ext cx="1473993" cy="553998"/>
+          </a:xfrm>
+          <a:prstGeom prst="rect">
+            <a:avLst/>
+          </a:prstGeom>
+          <a:noFill/>
+        </p:spPr>
+        <p:txBody>
+          <a:bodyPr wrap="none" rtlCol="0">
+            <a:spAutoFit/>
+          </a:bodyPr>
+          <a:lstStyle/>
+          <a:p>
+            <a:pPr algn="ctr"/>
+            <a:r>
+              <a:rPr lang="en-US" altLang="ko-KR" sz="1500" dirty="0" smtClean="0"/>
+              <a:t>DirectX12 </a:t>
+            </a:r>
+            <a:r>
+              <a:rPr lang="ko-KR" altLang="en-US" sz="1500" dirty="0" smtClean="0"/>
+              <a:t>이용</a:t>
+            </a:r>
+            <a:endParaRPr lang="en-US" altLang="ko-KR" sz="1500" dirty="0" smtClean="0"/>
+          </a:p>
+          <a:p>
+            <a:pPr algn="ctr"/>
+            <a:r>
+              <a:rPr lang="ko-KR" altLang="en-US" sz="1500" dirty="0" smtClean="0"/>
+              <a:t>모델 </a:t>
+            </a:r>
+            <a:r>
+              <a:rPr lang="ko-KR" altLang="en-US" sz="1500" dirty="0" err="1" smtClean="0"/>
+              <a:t>렌더링</a:t>
+            </a:r>
+            <a:endParaRPr lang="ko-KR" altLang="en-US" sz="1500" dirty="0"/>
+          </a:p>
+        </p:txBody>
+      </p:sp>
+      <p:sp>
+        <p:nvSpPr>
+          <p:cNvPr id="58" name="TextBox 57"/>
+          <p:cNvSpPr txBox="1"/>
+          <p:nvPr/>
+        </p:nvSpPr>
+        <p:spPr>
+          <a:xfrm>
+            <a:off x="5623063" y="4339574"/>
+            <a:ext cx="1213794" cy="323165"/>
+          </a:xfrm>
+          <a:prstGeom prst="rect">
+            <a:avLst/>
+          </a:prstGeom>
+          <a:noFill/>
+        </p:spPr>
+        <p:txBody>
+          <a:bodyPr wrap="none" rtlCol="0">
+            <a:spAutoFit/>
+          </a:bodyPr>
+          <a:lstStyle/>
+          <a:p>
+            <a:pPr algn="ctr"/>
+            <a:r>
+              <a:rPr lang="ko-KR" altLang="en-US" sz="1500" dirty="0" smtClean="0"/>
+              <a:t>모델 </a:t>
+            </a:r>
+            <a:r>
+              <a:rPr lang="ko-KR" altLang="en-US" sz="1500" dirty="0" err="1" smtClean="0"/>
+              <a:t>렌더링</a:t>
+            </a:r>
+            <a:endParaRPr lang="ko-KR" altLang="en-US" sz="1500" dirty="0"/>
+          </a:p>
+        </p:txBody>
+      </p:sp>
+      <p:sp>
+        <p:nvSpPr>
+          <p:cNvPr id="120" name="직사각형 119"/>
+          <p:cNvSpPr/>
+          <p:nvPr/>
+        </p:nvSpPr>
+        <p:spPr>
+          <a:xfrm>
+            <a:off x="5900892" y="5463929"/>
+            <a:ext cx="1858944" cy="552661"/>
+          </a:xfrm>
+          <a:prstGeom prst="rect">
+            <a:avLst/>
+          </a:prstGeom>
+          <a:solidFill>
+            <a:schemeClr val="accent5">
+              <a:lumMod val="50000"/>
+            </a:schemeClr>
+          </a:solidFill>
+        </p:spPr>
+        <p:style>
+          <a:lnRef idx="2">
+            <a:schemeClr val="accent1">
+              <a:shade val="50000"/>
+            </a:schemeClr>
+          </a:lnRef>
+          <a:fillRef idx="1">
+            <a:schemeClr val="accent1"/>
+          </a:fillRef>
+          <a:effectRef idx="0">
+            <a:schemeClr val="accent1"/>
+          </a:effectRef>
+          <a:fontRef idx="minor">
+            <a:schemeClr val="lt1"/>
+          </a:fontRef>
+        </p:style>
+        <p:txBody>
+          <a:bodyPr rtlCol="0" anchor="ctr"/>
+          <a:lstStyle/>
+          <a:p>
+            <a:pPr algn="ctr"/>
+            <a:r>
+              <a:rPr lang="en-US" altLang="ko-KR" sz="1400" dirty="0" err="1" smtClean="0">
+                <a:solidFill>
+                  <a:schemeClr val="bg1"/>
+                </a:solidFill>
+              </a:rPr>
+              <a:t>ModelConverter</a:t>
+            </a:r>
+            <a:endParaRPr lang="ko-KR" altLang="en-US" sz="1400" dirty="0">
+              <a:solidFill>
+                <a:schemeClr val="bg1"/>
+              </a:solidFill>
+            </a:endParaRPr>
+          </a:p>
+        </p:txBody>
+      </p:sp>
+      <p:cxnSp>
+        <p:nvCxnSpPr>
+          <p:cNvPr id="122" name="꺾인 연결선 121"/>
+          <p:cNvCxnSpPr>
+            <a:stCxn id="120" idx="0"/>
+          </p:cNvCxnSpPr>
+          <p:nvPr/>
+        </p:nvCxnSpPr>
+        <p:spPr>
+          <a:xfrm rot="16200000" flipV="1">
+            <a:off x="5044766" y="3678330"/>
+            <a:ext cx="504952" cy="3066245"/>
+          </a:xfrm>
+          <a:prstGeom prst="bentConnector2">
+            <a:avLst/>
+          </a:prstGeom>
+          <a:ln>
+            <a:tailEnd type="triangle"/>
+          </a:ln>
+        </p:spPr>
+        <p:style>
+          <a:lnRef idx="2">
+            <a:schemeClr val="accent1"/>
+          </a:lnRef>
+          <a:fillRef idx="0">
+            <a:schemeClr val="accent1"/>
+          </a:fillRef>
+          <a:effectRef idx="1">
+            <a:schemeClr val="accent1"/>
+          </a:effectRef>
+          <a:fontRef idx="minor">
+            <a:schemeClr val="tx1"/>
+          </a:fontRef>
+        </p:style>
+      </p:cxnSp>
+      <p:sp>
+        <p:nvSpPr>
+          <p:cNvPr id="130" name="TextBox 129"/>
+          <p:cNvSpPr txBox="1"/>
+          <p:nvPr/>
+        </p:nvSpPr>
+        <p:spPr>
+          <a:xfrm>
+            <a:off x="5782641" y="6101321"/>
+            <a:ext cx="3544560" cy="553998"/>
+          </a:xfrm>
+          <a:prstGeom prst="rect">
+            <a:avLst/>
+          </a:prstGeom>
+          <a:noFill/>
+        </p:spPr>
+        <p:txBody>
+          <a:bodyPr wrap="none" rtlCol="0">
+            <a:spAutoFit/>
+          </a:bodyPr>
+          <a:lstStyle/>
+          <a:p>
+            <a:r>
+              <a:rPr lang="ko-KR" altLang="en-US" sz="1500" dirty="0" smtClean="0"/>
+              <a:t>사전</a:t>
+            </a:r>
+            <a:r>
+              <a:rPr lang="en-US" altLang="ko-KR" sz="1500" dirty="0" smtClean="0"/>
+              <a:t>, 3d </a:t>
+            </a:r>
+            <a:r>
+              <a:rPr lang="ko-KR" altLang="en-US" sz="1500" dirty="0" smtClean="0"/>
+              <a:t>파일 </a:t>
+            </a:r>
+            <a:r>
+              <a:rPr lang="ko-KR" altLang="en-US" sz="1500" dirty="0" err="1" smtClean="0"/>
+              <a:t>파싱</a:t>
+            </a:r>
+            <a:r>
+              <a:rPr lang="ko-KR" altLang="en-US" sz="1500" dirty="0" smtClean="0"/>
+              <a:t> 및 최적화 프로젝트</a:t>
+            </a:r>
+            <a:endParaRPr lang="en-US" altLang="ko-KR" sz="1500" dirty="0" smtClean="0"/>
+          </a:p>
+          <a:p>
+            <a:r>
+              <a:rPr lang="en-US" altLang="ko-KR" sz="1500" dirty="0" smtClean="0"/>
+              <a:t>.</a:t>
+            </a:r>
+            <a:r>
+              <a:rPr lang="en-US" altLang="ko-KR" sz="1500" dirty="0" err="1" smtClean="0"/>
+              <a:t>obj</a:t>
+            </a:r>
+            <a:r>
+              <a:rPr lang="en-US" altLang="ko-KR" sz="1500" dirty="0" smtClean="0"/>
+              <a:t>, .</a:t>
+            </a:r>
+            <a:r>
+              <a:rPr lang="en-US" altLang="ko-KR" sz="1500" dirty="0" err="1" smtClean="0"/>
+              <a:t>gltf</a:t>
+            </a:r>
+            <a:r>
+              <a:rPr lang="en-US" altLang="ko-KR" sz="1500" dirty="0" smtClean="0"/>
+              <a:t> </a:t>
+            </a:r>
+            <a:r>
+              <a:rPr lang="ko-KR" altLang="en-US" sz="1500" dirty="0" err="1" smtClean="0"/>
+              <a:t>확장자</a:t>
+            </a:r>
+            <a:r>
+              <a:rPr lang="ko-KR" altLang="en-US" sz="1500" dirty="0" smtClean="0"/>
+              <a:t> 변환 예시</a:t>
+            </a:r>
+            <a:endParaRPr lang="en-US" altLang="ko-KR" sz="1500" dirty="0" smtClean="0"/>
+          </a:p>
+        </p:txBody>
+      </p:sp>
+      <p:sp>
+        <p:nvSpPr>
+          <p:cNvPr id="133" name="TextBox 132"/>
+          <p:cNvSpPr txBox="1"/>
+          <p:nvPr/>
+        </p:nvSpPr>
+        <p:spPr>
+          <a:xfrm>
+            <a:off x="6816510" y="5025541"/>
+            <a:ext cx="1850186" cy="323165"/>
+          </a:xfrm>
+          <a:prstGeom prst="rect">
+            <a:avLst/>
+          </a:prstGeom>
+          <a:noFill/>
+        </p:spPr>
+        <p:txBody>
+          <a:bodyPr wrap="none" rtlCol="0">
+            <a:spAutoFit/>
+          </a:bodyPr>
+          <a:lstStyle/>
+          <a:p>
+            <a:pPr algn="ctr"/>
+            <a:r>
+              <a:rPr lang="en-US" altLang="ko-KR" sz="1500" dirty="0"/>
+              <a:t>.</a:t>
+            </a:r>
+            <a:r>
+              <a:rPr lang="en-US" altLang="ko-KR" sz="1500" dirty="0" err="1"/>
+              <a:t>obj</a:t>
+            </a:r>
+            <a:r>
+              <a:rPr lang="en-US" altLang="ko-KR" sz="1500" dirty="0"/>
+              <a:t>, .</a:t>
+            </a:r>
+            <a:r>
+              <a:rPr lang="en-US" altLang="ko-KR" sz="1500" dirty="0" err="1"/>
+              <a:t>gltf</a:t>
+            </a:r>
+            <a:r>
+              <a:rPr lang="en-US" altLang="ko-KR" sz="1500" dirty="0"/>
+              <a:t> </a:t>
+            </a:r>
+            <a:r>
+              <a:rPr lang="ko-KR" altLang="en-US" sz="1500" dirty="0" smtClean="0"/>
+              <a:t>파일 변환</a:t>
+            </a:r>
+            <a:endParaRPr lang="ko-KR" altLang="en-US" sz="1500" dirty="0"/>
           </a:p>
         </p:txBody>
       </p:sp>
     </p:spTree>
     <p:extLst>
       <p:ext uri="{BB962C8B-B14F-4D97-AF65-F5344CB8AC3E}">
-        <p14:creationId xmlns:p14="http://schemas.microsoft.com/office/powerpoint/2010/main" val="43933111"/>
+        <p14:creationId xmlns:p14="http://schemas.microsoft.com/office/powerpoint/2010/main" val="2118968564"/>
       </p:ext>
     </p:extLst>
   </p:cSld>
@@ -3480,7 +4922,7 @@
         <p:cNvPr id="1" name="">
           <a:extLst>
             <a:ext uri="{FF2B5EF4-FFF2-40B4-BE49-F238E27FC236}">
-              <a16:creationId xmlns:a16="http://schemas.microsoft.com/office/drawing/2014/main" id="{068E24C7-A429-CDA0-4EB6-16142BB05552}"/>
+              <a16:creationId xmlns:a16="http://schemas.microsoft.com/office/drawing/2014/main" xmlns="" id="{068E24C7-A429-CDA0-4EB6-16142BB05552}"/>
             </a:ext>
           </a:extLst>
         </p:cNvPr>
@@ -3497,10 +4939,10 @@
       </p:grpSpPr>
       <p:sp>
         <p:nvSpPr>
-          <p:cNvPr id="4" name="TextBox 3">
+          <p:cNvPr id="5" name="TextBox 4">
             <a:extLst>
               <a:ext uri="{FF2B5EF4-FFF2-40B4-BE49-F238E27FC236}">
-                <a16:creationId xmlns:a16="http://schemas.microsoft.com/office/drawing/2014/main" id="{4715F932-2F2C-4A3F-7F16-1B13D352985A}"/>
+                <a16:creationId xmlns:a16="http://schemas.microsoft.com/office/drawing/2014/main" xmlns="" id="{4715F932-2F2C-4A3F-7F16-1B13D352985A}"/>
               </a:ext>
             </a:extLst>
           </p:cNvPr>
@@ -3509,7 +4951,7 @@
         </p:nvSpPr>
         <p:spPr>
           <a:xfrm>
-            <a:off x="329610" y="362359"/>
+            <a:off x="302451" y="315453"/>
             <a:ext cx="4944140" cy="369332"/>
           </a:xfrm>
           <a:prstGeom prst="rect">
@@ -3523,28 +4965,3036 @@
           </a:bodyPr>
           <a:lstStyle/>
           <a:p>
+            <a:r>
+              <a:rPr lang="ko-KR" altLang="en-US" dirty="0"/>
+              <a:t>이번 주 작업 내역</a:t>
+            </a:r>
+            <a:endParaRPr lang="en-US" altLang="ko-KR" dirty="0"/>
+          </a:p>
+        </p:txBody>
+      </p:sp>
+      <p:sp>
+        <p:nvSpPr>
+          <p:cNvPr id="6" name="TextBox 5">
+            <a:extLst>
+              <a:ext uri="{FF2B5EF4-FFF2-40B4-BE49-F238E27FC236}">
+                <a16:creationId xmlns:a16="http://schemas.microsoft.com/office/drawing/2014/main" xmlns="" id="{6DE5C835-CE30-2461-B5B2-C304088E694A}"/>
+              </a:ext>
+            </a:extLst>
+          </p:cNvPr>
+          <p:cNvSpPr txBox="1"/>
+          <p:nvPr/>
+        </p:nvSpPr>
+        <p:spPr>
+          <a:xfrm>
+            <a:off x="302451" y="758852"/>
+            <a:ext cx="8118068" cy="338554"/>
+          </a:xfrm>
+          <a:prstGeom prst="rect">
+            <a:avLst/>
+          </a:prstGeom>
+          <a:noFill/>
+        </p:spPr>
+        <p:txBody>
+          <a:bodyPr wrap="square" rtlCol="0">
+            <a:spAutoFit/>
+          </a:bodyPr>
+          <a:lstStyle/>
+          <a:p>
             <a:pPr marL="285750" indent="-285750">
               <a:buFont typeface="Arial" panose="020B0604020202020204" pitchFamily="34" charset="0"/>
               <a:buChar char="•"/>
             </a:pPr>
             <a:r>
-              <a:rPr lang="ko-KR" altLang="en-US" dirty="0"/>
-              <a:t>이번 주 작업 내역</a:t>
-            </a:r>
-            <a:endParaRPr lang="en-US" altLang="ko-KR" dirty="0"/>
+              <a:rPr lang="ko-KR" altLang="en-US" sz="1600" dirty="0"/>
+              <a:t>엔진 </a:t>
+            </a:r>
+            <a:r>
+              <a:rPr lang="ko-KR" altLang="en-US" sz="1600" dirty="0" smtClean="0"/>
+              <a:t>기반 </a:t>
+            </a:r>
+            <a:r>
+              <a:rPr lang="ko-KR" altLang="en-US" sz="1600" dirty="0"/>
+              <a:t>클래스 </a:t>
+            </a:r>
+            <a:r>
+              <a:rPr lang="ko-KR" altLang="en-US" sz="1600" dirty="0" smtClean="0"/>
+              <a:t>작성</a:t>
+            </a:r>
+            <a:endParaRPr lang="en-US" altLang="ko-KR" sz="1600" dirty="0"/>
+          </a:p>
+        </p:txBody>
+      </p:sp>
+      <p:sp>
+        <p:nvSpPr>
+          <p:cNvPr id="38" name="직사각형 37"/>
+          <p:cNvSpPr/>
+          <p:nvPr/>
+        </p:nvSpPr>
+        <p:spPr>
+          <a:xfrm>
+            <a:off x="1093431" y="1295965"/>
+            <a:ext cx="1858944" cy="552661"/>
+          </a:xfrm>
+          <a:prstGeom prst="rect">
+            <a:avLst/>
+          </a:prstGeom>
+          <a:solidFill>
+            <a:schemeClr val="bg2"/>
+          </a:solidFill>
+        </p:spPr>
+        <p:style>
+          <a:lnRef idx="2">
+            <a:schemeClr val="accent1">
+              <a:shade val="50000"/>
+            </a:schemeClr>
+          </a:lnRef>
+          <a:fillRef idx="1">
+            <a:schemeClr val="accent1"/>
+          </a:fillRef>
+          <a:effectRef idx="0">
+            <a:schemeClr val="accent1"/>
+          </a:effectRef>
+          <a:fontRef idx="minor">
+            <a:schemeClr val="lt1"/>
+          </a:fontRef>
+        </p:style>
+        <p:txBody>
+          <a:bodyPr rtlCol="0" anchor="ctr"/>
+          <a:lstStyle/>
+          <a:p>
+            <a:pPr algn="ctr"/>
+            <a:r>
+              <a:rPr lang="en-US" altLang="ko-KR" sz="1400" dirty="0" err="1" smtClean="0">
+                <a:solidFill>
+                  <a:schemeClr val="tx1"/>
+                </a:solidFill>
+              </a:rPr>
+              <a:t>IGameApp</a:t>
+            </a:r>
+            <a:endParaRPr lang="ko-KR" altLang="en-US" sz="1400" dirty="0">
+              <a:solidFill>
+                <a:schemeClr val="tx1"/>
+              </a:solidFill>
+            </a:endParaRPr>
+          </a:p>
+        </p:txBody>
+      </p:sp>
+      <p:sp>
+        <p:nvSpPr>
+          <p:cNvPr id="39" name="직사각형 38"/>
+          <p:cNvSpPr/>
+          <p:nvPr/>
+        </p:nvSpPr>
+        <p:spPr>
+          <a:xfrm>
+            <a:off x="4502606" y="1291809"/>
+            <a:ext cx="1858944" cy="552661"/>
+          </a:xfrm>
+          <a:prstGeom prst="rect">
+            <a:avLst/>
+          </a:prstGeom>
+          <a:solidFill>
+            <a:schemeClr val="accent5">
+              <a:lumMod val="50000"/>
+            </a:schemeClr>
+          </a:solidFill>
+        </p:spPr>
+        <p:style>
+          <a:lnRef idx="2">
+            <a:schemeClr val="accent1">
+              <a:shade val="50000"/>
+            </a:schemeClr>
+          </a:lnRef>
+          <a:fillRef idx="1">
+            <a:schemeClr val="accent1"/>
+          </a:fillRef>
+          <a:effectRef idx="0">
+            <a:schemeClr val="accent1"/>
+          </a:effectRef>
+          <a:fontRef idx="minor">
+            <a:schemeClr val="lt1"/>
+          </a:fontRef>
+        </p:style>
+        <p:txBody>
+          <a:bodyPr rtlCol="0" anchor="ctr"/>
+          <a:lstStyle/>
+          <a:p>
+            <a:pPr algn="ctr"/>
+            <a:r>
+              <a:rPr lang="en-US" altLang="ko-KR" sz="1400" dirty="0" smtClean="0">
+                <a:solidFill>
+                  <a:schemeClr val="bg1"/>
+                </a:solidFill>
+              </a:rPr>
+              <a:t>Character Animation</a:t>
+            </a:r>
+            <a:endParaRPr lang="ko-KR" altLang="en-US" sz="1400" dirty="0">
+              <a:solidFill>
+                <a:schemeClr val="bg1"/>
+              </a:solidFill>
+            </a:endParaRPr>
+          </a:p>
+        </p:txBody>
+      </p:sp>
+      <p:cxnSp>
+        <p:nvCxnSpPr>
+          <p:cNvPr id="41" name="꺾인 연결선 40"/>
+          <p:cNvCxnSpPr>
+            <a:stCxn id="39" idx="1"/>
+            <a:endCxn id="38" idx="3"/>
+          </p:cNvCxnSpPr>
+          <p:nvPr/>
+        </p:nvCxnSpPr>
+        <p:spPr>
+          <a:xfrm rot="10800000" flipV="1">
+            <a:off x="2952376" y="1568140"/>
+            <a:ext cx="1550231" cy="4156"/>
+          </a:xfrm>
+          <a:prstGeom prst="bentConnector3">
+            <a:avLst>
+              <a:gd name="adj1" fmla="val 50000"/>
+            </a:avLst>
+          </a:prstGeom>
+          <a:ln>
+            <a:tailEnd type="triangle"/>
+          </a:ln>
+        </p:spPr>
+        <p:style>
+          <a:lnRef idx="2">
+            <a:schemeClr val="accent1"/>
+          </a:lnRef>
+          <a:fillRef idx="0">
+            <a:schemeClr val="accent1"/>
+          </a:fillRef>
+          <a:effectRef idx="1">
+            <a:schemeClr val="accent1"/>
+          </a:effectRef>
+          <a:fontRef idx="minor">
+            <a:schemeClr val="tx1"/>
+          </a:fontRef>
+        </p:style>
+      </p:cxnSp>
+      <p:sp>
+        <p:nvSpPr>
+          <p:cNvPr id="43" name="TextBox 42"/>
+          <p:cNvSpPr txBox="1"/>
+          <p:nvPr/>
+        </p:nvSpPr>
+        <p:spPr>
+          <a:xfrm>
+            <a:off x="3442797" y="1228330"/>
+            <a:ext cx="569387" cy="323165"/>
+          </a:xfrm>
+          <a:prstGeom prst="rect">
+            <a:avLst/>
+          </a:prstGeom>
+          <a:noFill/>
+        </p:spPr>
+        <p:txBody>
+          <a:bodyPr wrap="none" rtlCol="0">
+            <a:spAutoFit/>
+          </a:bodyPr>
+          <a:lstStyle/>
+          <a:p>
+            <a:r>
+              <a:rPr lang="ko-KR" altLang="en-US" sz="1500" dirty="0" smtClean="0"/>
+              <a:t>구현</a:t>
+            </a:r>
+            <a:endParaRPr lang="ko-KR" altLang="en-US" sz="1500" dirty="0"/>
+          </a:p>
+        </p:txBody>
+      </p:sp>
+      <p:sp>
+        <p:nvSpPr>
+          <p:cNvPr id="44" name="TextBox 43"/>
+          <p:cNvSpPr txBox="1"/>
+          <p:nvPr/>
+        </p:nvSpPr>
+        <p:spPr>
+          <a:xfrm>
+            <a:off x="6400886" y="1406556"/>
+            <a:ext cx="1790875" cy="323165"/>
+          </a:xfrm>
+          <a:prstGeom prst="rect">
+            <a:avLst/>
+          </a:prstGeom>
+          <a:noFill/>
+        </p:spPr>
+        <p:txBody>
+          <a:bodyPr wrap="none" rtlCol="0">
+            <a:spAutoFit/>
+          </a:bodyPr>
+          <a:lstStyle/>
+          <a:p>
+            <a:r>
+              <a:rPr lang="ko-KR" altLang="en-US" sz="1500" dirty="0" smtClean="0"/>
+              <a:t>연구과제 프로젝트</a:t>
+            </a:r>
+            <a:endParaRPr lang="ko-KR" altLang="en-US" sz="1500" dirty="0"/>
+          </a:p>
+        </p:txBody>
+      </p:sp>
+      <p:sp>
+        <p:nvSpPr>
+          <p:cNvPr id="47" name="직사각형 46"/>
+          <p:cNvSpPr/>
+          <p:nvPr/>
+        </p:nvSpPr>
+        <p:spPr>
+          <a:xfrm>
+            <a:off x="4502606" y="3194064"/>
+            <a:ext cx="1858944" cy="552661"/>
+          </a:xfrm>
+          <a:prstGeom prst="rect">
+            <a:avLst/>
+          </a:prstGeom>
+          <a:solidFill>
+            <a:schemeClr val="bg2"/>
+          </a:solidFill>
+        </p:spPr>
+        <p:style>
+          <a:lnRef idx="2">
+            <a:schemeClr val="accent1">
+              <a:shade val="50000"/>
+            </a:schemeClr>
+          </a:lnRef>
+          <a:fillRef idx="1">
+            <a:schemeClr val="accent1"/>
+          </a:fillRef>
+          <a:effectRef idx="0">
+            <a:schemeClr val="accent1"/>
+          </a:effectRef>
+          <a:fontRef idx="minor">
+            <a:schemeClr val="lt1"/>
+          </a:fontRef>
+        </p:style>
+        <p:txBody>
+          <a:bodyPr rtlCol="0" anchor="ctr"/>
+          <a:lstStyle/>
+          <a:p>
+            <a:pPr algn="ctr"/>
+            <a:r>
+              <a:rPr lang="en-US" altLang="ko-KR" sz="1400" dirty="0" err="1" smtClean="0">
+                <a:solidFill>
+                  <a:schemeClr val="tx1"/>
+                </a:solidFill>
+              </a:rPr>
+              <a:t>SceneManager</a:t>
+            </a:r>
+            <a:endParaRPr lang="ko-KR" altLang="en-US" sz="1400" dirty="0">
+              <a:solidFill>
+                <a:schemeClr val="tx1"/>
+              </a:solidFill>
+            </a:endParaRPr>
+          </a:p>
+        </p:txBody>
+      </p:sp>
+      <p:sp>
+        <p:nvSpPr>
+          <p:cNvPr id="48" name="직사각형 47"/>
+          <p:cNvSpPr/>
+          <p:nvPr/>
+        </p:nvSpPr>
+        <p:spPr>
+          <a:xfrm>
+            <a:off x="7061109" y="3188863"/>
+            <a:ext cx="1316417" cy="552661"/>
+          </a:xfrm>
+          <a:prstGeom prst="rect">
+            <a:avLst/>
+          </a:prstGeom>
+          <a:solidFill>
+            <a:schemeClr val="bg2"/>
+          </a:solidFill>
+        </p:spPr>
+        <p:style>
+          <a:lnRef idx="2">
+            <a:schemeClr val="accent1">
+              <a:shade val="50000"/>
+            </a:schemeClr>
+          </a:lnRef>
+          <a:fillRef idx="1">
+            <a:schemeClr val="accent1"/>
+          </a:fillRef>
+          <a:effectRef idx="0">
+            <a:schemeClr val="accent1"/>
+          </a:effectRef>
+          <a:fontRef idx="minor">
+            <a:schemeClr val="lt1"/>
+          </a:fontRef>
+        </p:style>
+        <p:txBody>
+          <a:bodyPr rtlCol="0" anchor="ctr"/>
+          <a:lstStyle/>
+          <a:p>
+            <a:pPr algn="ctr"/>
+            <a:r>
+              <a:rPr lang="en-US" altLang="ko-KR" sz="1400" dirty="0" smtClean="0">
+                <a:solidFill>
+                  <a:schemeClr val="tx1"/>
+                </a:solidFill>
+              </a:rPr>
+              <a:t>Scene</a:t>
+            </a:r>
+            <a:endParaRPr lang="ko-KR" altLang="en-US" sz="1400" dirty="0">
+              <a:solidFill>
+                <a:schemeClr val="tx1"/>
+              </a:solidFill>
+            </a:endParaRPr>
+          </a:p>
+        </p:txBody>
+      </p:sp>
+      <p:sp>
+        <p:nvSpPr>
+          <p:cNvPr id="49" name="직사각형 48"/>
+          <p:cNvSpPr/>
+          <p:nvPr/>
+        </p:nvSpPr>
+        <p:spPr>
+          <a:xfrm>
+            <a:off x="5979906" y="4389434"/>
+            <a:ext cx="1316418" cy="552661"/>
+          </a:xfrm>
+          <a:prstGeom prst="rect">
+            <a:avLst/>
+          </a:prstGeom>
+          <a:solidFill>
+            <a:schemeClr val="bg2"/>
+          </a:solidFill>
+        </p:spPr>
+        <p:style>
+          <a:lnRef idx="2">
+            <a:schemeClr val="accent1">
+              <a:shade val="50000"/>
+            </a:schemeClr>
+          </a:lnRef>
+          <a:fillRef idx="1">
+            <a:schemeClr val="accent1"/>
+          </a:fillRef>
+          <a:effectRef idx="0">
+            <a:schemeClr val="accent1"/>
+          </a:effectRef>
+          <a:fontRef idx="minor">
+            <a:schemeClr val="lt1"/>
+          </a:fontRef>
+        </p:style>
+        <p:txBody>
+          <a:bodyPr rtlCol="0" anchor="ctr"/>
+          <a:lstStyle/>
+          <a:p>
+            <a:pPr algn="ctr"/>
+            <a:r>
+              <a:rPr lang="en-US" altLang="ko-KR" sz="1400" dirty="0" smtClean="0">
+                <a:solidFill>
+                  <a:schemeClr val="tx1"/>
+                </a:solidFill>
+              </a:rPr>
+              <a:t>Object</a:t>
+            </a:r>
+            <a:endParaRPr lang="ko-KR" altLang="en-US" sz="1400" dirty="0">
+              <a:solidFill>
+                <a:schemeClr val="tx1"/>
+              </a:solidFill>
+            </a:endParaRPr>
+          </a:p>
+        </p:txBody>
+      </p:sp>
+      <p:sp>
+        <p:nvSpPr>
+          <p:cNvPr id="50" name="직사각형 49"/>
+          <p:cNvSpPr/>
+          <p:nvPr/>
+        </p:nvSpPr>
+        <p:spPr>
+          <a:xfrm>
+            <a:off x="4501600" y="5871353"/>
+            <a:ext cx="1316418" cy="552661"/>
+          </a:xfrm>
+          <a:prstGeom prst="rect">
+            <a:avLst/>
+          </a:prstGeom>
+          <a:solidFill>
+            <a:schemeClr val="bg2"/>
+          </a:solidFill>
+        </p:spPr>
+        <p:style>
+          <a:lnRef idx="2">
+            <a:schemeClr val="accent1">
+              <a:shade val="50000"/>
+            </a:schemeClr>
+          </a:lnRef>
+          <a:fillRef idx="1">
+            <a:schemeClr val="accent1"/>
+          </a:fillRef>
+          <a:effectRef idx="0">
+            <a:schemeClr val="accent1"/>
+          </a:effectRef>
+          <a:fontRef idx="minor">
+            <a:schemeClr val="lt1"/>
+          </a:fontRef>
+        </p:style>
+        <p:txBody>
+          <a:bodyPr rtlCol="0" anchor="ctr"/>
+          <a:lstStyle/>
+          <a:p>
+            <a:pPr algn="ctr"/>
+            <a:r>
+              <a:rPr lang="en-US" altLang="ko-KR" sz="1400" dirty="0" smtClean="0">
+                <a:solidFill>
+                  <a:schemeClr val="tx1"/>
+                </a:solidFill>
+              </a:rPr>
+              <a:t>Actor</a:t>
+            </a:r>
+            <a:endParaRPr lang="ko-KR" altLang="en-US" sz="1400" dirty="0">
+              <a:solidFill>
+                <a:schemeClr val="tx1"/>
+              </a:solidFill>
+            </a:endParaRPr>
+          </a:p>
+        </p:txBody>
+      </p:sp>
+      <p:sp>
+        <p:nvSpPr>
+          <p:cNvPr id="51" name="직사각형 50"/>
+          <p:cNvSpPr/>
+          <p:nvPr/>
+        </p:nvSpPr>
+        <p:spPr>
+          <a:xfrm>
+            <a:off x="7533552" y="5871352"/>
+            <a:ext cx="1316418" cy="552661"/>
+          </a:xfrm>
+          <a:prstGeom prst="rect">
+            <a:avLst/>
+          </a:prstGeom>
+          <a:solidFill>
+            <a:schemeClr val="bg2"/>
+          </a:solidFill>
+        </p:spPr>
+        <p:style>
+          <a:lnRef idx="2">
+            <a:schemeClr val="accent1">
+              <a:shade val="50000"/>
+            </a:schemeClr>
+          </a:lnRef>
+          <a:fillRef idx="1">
+            <a:schemeClr val="accent1"/>
+          </a:fillRef>
+          <a:effectRef idx="0">
+            <a:schemeClr val="accent1"/>
+          </a:effectRef>
+          <a:fontRef idx="minor">
+            <a:schemeClr val="lt1"/>
+          </a:fontRef>
+        </p:style>
+        <p:txBody>
+          <a:bodyPr rtlCol="0" anchor="ctr"/>
+          <a:lstStyle/>
+          <a:p>
+            <a:pPr algn="ctr"/>
+            <a:r>
+              <a:rPr lang="en-US" altLang="ko-KR" sz="1400" dirty="0" smtClean="0">
+                <a:solidFill>
+                  <a:schemeClr val="tx1"/>
+                </a:solidFill>
+              </a:rPr>
+              <a:t>Component</a:t>
+            </a:r>
+            <a:endParaRPr lang="ko-KR" altLang="en-US" sz="1400" dirty="0">
+              <a:solidFill>
+                <a:schemeClr val="tx1"/>
+              </a:solidFill>
+            </a:endParaRPr>
+          </a:p>
+        </p:txBody>
+      </p:sp>
+      <p:sp>
+        <p:nvSpPr>
+          <p:cNvPr id="52" name="직사각형 51"/>
+          <p:cNvSpPr/>
+          <p:nvPr/>
+        </p:nvSpPr>
+        <p:spPr>
+          <a:xfrm>
+            <a:off x="1824233" y="3194064"/>
+            <a:ext cx="1858944" cy="552661"/>
+          </a:xfrm>
+          <a:prstGeom prst="rect">
+            <a:avLst/>
+          </a:prstGeom>
+          <a:solidFill>
+            <a:schemeClr val="bg2"/>
+          </a:solidFill>
+        </p:spPr>
+        <p:style>
+          <a:lnRef idx="2">
+            <a:schemeClr val="accent1">
+              <a:shade val="50000"/>
+            </a:schemeClr>
+          </a:lnRef>
+          <a:fillRef idx="1">
+            <a:schemeClr val="accent1"/>
+          </a:fillRef>
+          <a:effectRef idx="0">
+            <a:schemeClr val="accent1"/>
+          </a:effectRef>
+          <a:fontRef idx="minor">
+            <a:schemeClr val="lt1"/>
+          </a:fontRef>
+        </p:style>
+        <p:txBody>
+          <a:bodyPr rtlCol="0" anchor="ctr"/>
+          <a:lstStyle/>
+          <a:p>
+            <a:pPr algn="ctr"/>
+            <a:r>
+              <a:rPr lang="en-US" altLang="ko-KR" sz="1400" dirty="0" err="1" smtClean="0">
+                <a:solidFill>
+                  <a:schemeClr val="tx1"/>
+                </a:solidFill>
+              </a:rPr>
+              <a:t>GUIManager</a:t>
+            </a:r>
+            <a:endParaRPr lang="ko-KR" altLang="en-US" sz="1400" dirty="0">
+              <a:solidFill>
+                <a:schemeClr val="tx1"/>
+              </a:solidFill>
+            </a:endParaRPr>
+          </a:p>
+        </p:txBody>
+      </p:sp>
+      <p:cxnSp>
+        <p:nvCxnSpPr>
+          <p:cNvPr id="62" name="꺾인 연결선 61"/>
+          <p:cNvCxnSpPr>
+            <a:stCxn id="39" idx="2"/>
+            <a:endCxn id="47" idx="0"/>
+          </p:cNvCxnSpPr>
+          <p:nvPr/>
+        </p:nvCxnSpPr>
+        <p:spPr>
+          <a:xfrm rot="5400000">
+            <a:off x="4757281" y="2519267"/>
+            <a:ext cx="1349594" cy="12700"/>
+          </a:xfrm>
+          <a:prstGeom prst="bentConnector3">
+            <a:avLst/>
+          </a:prstGeom>
+          <a:ln>
+            <a:tailEnd type="triangle"/>
+          </a:ln>
+        </p:spPr>
+        <p:style>
+          <a:lnRef idx="2">
+            <a:schemeClr val="accent1"/>
+          </a:lnRef>
+          <a:fillRef idx="0">
+            <a:schemeClr val="accent1"/>
+          </a:fillRef>
+          <a:effectRef idx="1">
+            <a:schemeClr val="accent1"/>
+          </a:effectRef>
+          <a:fontRef idx="minor">
+            <a:schemeClr val="tx1"/>
+          </a:fontRef>
+        </p:style>
+      </p:cxnSp>
+      <p:cxnSp>
+        <p:nvCxnSpPr>
+          <p:cNvPr id="64" name="꺾인 연결선 63"/>
+          <p:cNvCxnSpPr>
+            <a:stCxn id="39" idx="2"/>
+            <a:endCxn id="52" idx="0"/>
+          </p:cNvCxnSpPr>
+          <p:nvPr/>
+        </p:nvCxnSpPr>
+        <p:spPr>
+          <a:xfrm rot="5400000">
+            <a:off x="3418095" y="1180081"/>
+            <a:ext cx="1349594" cy="2678373"/>
+          </a:xfrm>
+          <a:prstGeom prst="bentConnector3">
+            <a:avLst/>
+          </a:prstGeom>
+          <a:ln>
+            <a:tailEnd type="triangle"/>
+          </a:ln>
+        </p:spPr>
+        <p:style>
+          <a:lnRef idx="2">
+            <a:schemeClr val="accent1"/>
+          </a:lnRef>
+          <a:fillRef idx="0">
+            <a:schemeClr val="accent1"/>
+          </a:fillRef>
+          <a:effectRef idx="1">
+            <a:schemeClr val="accent1"/>
+          </a:effectRef>
+          <a:fontRef idx="minor">
+            <a:schemeClr val="tx1"/>
+          </a:fontRef>
+        </p:style>
+      </p:cxnSp>
+      <p:sp>
+        <p:nvSpPr>
+          <p:cNvPr id="68" name="TextBox 67"/>
+          <p:cNvSpPr txBox="1"/>
+          <p:nvPr/>
+        </p:nvSpPr>
+        <p:spPr>
+          <a:xfrm>
+            <a:off x="1702932" y="3835922"/>
+            <a:ext cx="2180405" cy="553998"/>
+          </a:xfrm>
+          <a:prstGeom prst="rect">
+            <a:avLst/>
+          </a:prstGeom>
+          <a:noFill/>
+        </p:spPr>
+        <p:txBody>
+          <a:bodyPr wrap="none" rtlCol="0">
+            <a:spAutoFit/>
+          </a:bodyPr>
+          <a:lstStyle/>
+          <a:p>
+            <a:pPr algn="ctr"/>
+            <a:r>
+              <a:rPr lang="en-US" altLang="ko-KR" sz="1500" dirty="0" err="1" smtClean="0"/>
+              <a:t>ImGui</a:t>
+            </a:r>
+            <a:r>
+              <a:rPr lang="ko-KR" altLang="en-US" sz="1500" dirty="0"/>
+              <a:t> </a:t>
+            </a:r>
+            <a:r>
+              <a:rPr lang="ko-KR" altLang="en-US" sz="1500" dirty="0" smtClean="0"/>
+              <a:t>라이브러리 활용</a:t>
+            </a:r>
+            <a:r>
+              <a:rPr lang="en-US" altLang="ko-KR" sz="1500" dirty="0" smtClean="0"/>
+              <a:t/>
+            </a:r>
+            <a:br>
+              <a:rPr lang="en-US" altLang="ko-KR" sz="1500" dirty="0" smtClean="0"/>
+            </a:br>
+            <a:r>
+              <a:rPr lang="en-US" altLang="ko-KR" sz="1500" dirty="0" smtClean="0"/>
+              <a:t>UI </a:t>
+            </a:r>
+            <a:r>
+              <a:rPr lang="ko-KR" altLang="en-US" sz="1500" dirty="0" smtClean="0"/>
+              <a:t>업데이트</a:t>
+            </a:r>
+            <a:r>
+              <a:rPr lang="en-US" altLang="ko-KR" sz="1500" dirty="0" smtClean="0"/>
+              <a:t>,</a:t>
+            </a:r>
+            <a:r>
+              <a:rPr lang="ko-KR" altLang="en-US" sz="1500" dirty="0" smtClean="0"/>
+              <a:t> </a:t>
+            </a:r>
+            <a:r>
+              <a:rPr lang="ko-KR" altLang="en-US" sz="1500" dirty="0" err="1" smtClean="0"/>
+              <a:t>렌더링</a:t>
+            </a:r>
+            <a:r>
+              <a:rPr lang="en-US" altLang="ko-KR" sz="1500" dirty="0" smtClean="0"/>
+              <a:t> </a:t>
+            </a:r>
+            <a:endParaRPr lang="ko-KR" altLang="en-US" sz="1500" dirty="0"/>
+          </a:p>
+        </p:txBody>
+      </p:sp>
+      <p:cxnSp>
+        <p:nvCxnSpPr>
+          <p:cNvPr id="70" name="꺾인 연결선 69"/>
+          <p:cNvCxnSpPr>
+            <a:stCxn id="47" idx="3"/>
+            <a:endCxn id="48" idx="1"/>
+          </p:cNvCxnSpPr>
+          <p:nvPr/>
+        </p:nvCxnSpPr>
+        <p:spPr>
+          <a:xfrm flipV="1">
+            <a:off x="6361550" y="3465194"/>
+            <a:ext cx="699559" cy="5201"/>
+          </a:xfrm>
+          <a:prstGeom prst="bentConnector3">
+            <a:avLst>
+              <a:gd name="adj1" fmla="val 50000"/>
+            </a:avLst>
+          </a:prstGeom>
+          <a:ln>
+            <a:tailEnd type="triangle"/>
+          </a:ln>
+        </p:spPr>
+        <p:style>
+          <a:lnRef idx="2">
+            <a:schemeClr val="accent1"/>
+          </a:lnRef>
+          <a:fillRef idx="0">
+            <a:schemeClr val="accent1"/>
+          </a:fillRef>
+          <a:effectRef idx="1">
+            <a:schemeClr val="accent1"/>
+          </a:effectRef>
+          <a:fontRef idx="minor">
+            <a:schemeClr val="tx1"/>
+          </a:fontRef>
+        </p:style>
+      </p:cxnSp>
+      <p:sp>
+        <p:nvSpPr>
+          <p:cNvPr id="74" name="TextBox 73"/>
+          <p:cNvSpPr txBox="1"/>
+          <p:nvPr/>
+        </p:nvSpPr>
+        <p:spPr>
+          <a:xfrm>
+            <a:off x="5818018" y="3779240"/>
+            <a:ext cx="1640193" cy="323165"/>
+          </a:xfrm>
+          <a:prstGeom prst="rect">
+            <a:avLst/>
+          </a:prstGeom>
+          <a:noFill/>
+        </p:spPr>
+        <p:txBody>
+          <a:bodyPr wrap="none" rtlCol="0">
+            <a:spAutoFit/>
+          </a:bodyPr>
+          <a:lstStyle/>
+          <a:p>
+            <a:r>
+              <a:rPr lang="ko-KR" altLang="en-US" sz="1500" dirty="0" smtClean="0"/>
+              <a:t>업데이트</a:t>
+            </a:r>
+            <a:r>
+              <a:rPr lang="en-US" altLang="ko-KR" sz="1500" dirty="0" smtClean="0"/>
+              <a:t>, </a:t>
+            </a:r>
+            <a:r>
+              <a:rPr lang="ko-KR" altLang="en-US" sz="1500" dirty="0" err="1" smtClean="0"/>
+              <a:t>렌더링</a:t>
+            </a:r>
+            <a:endParaRPr lang="ko-KR" altLang="en-US" sz="1500" dirty="0"/>
+          </a:p>
+        </p:txBody>
+      </p:sp>
+      <p:cxnSp>
+        <p:nvCxnSpPr>
+          <p:cNvPr id="91" name="꺾인 연결선 90"/>
+          <p:cNvCxnSpPr>
+            <a:stCxn id="48" idx="2"/>
+            <a:endCxn id="49" idx="3"/>
+          </p:cNvCxnSpPr>
+          <p:nvPr/>
+        </p:nvCxnSpPr>
+        <p:spPr>
+          <a:xfrm rot="5400000">
+            <a:off x="7045701" y="3992147"/>
+            <a:ext cx="924241" cy="422994"/>
+          </a:xfrm>
+          <a:prstGeom prst="bentConnector2">
+            <a:avLst/>
+          </a:prstGeom>
+          <a:ln>
+            <a:tailEnd type="triangle"/>
+          </a:ln>
+        </p:spPr>
+        <p:style>
+          <a:lnRef idx="2">
+            <a:schemeClr val="accent1"/>
+          </a:lnRef>
+          <a:fillRef idx="0">
+            <a:schemeClr val="accent1"/>
+          </a:fillRef>
+          <a:effectRef idx="1">
+            <a:schemeClr val="accent1"/>
+          </a:effectRef>
+          <a:fontRef idx="minor">
+            <a:schemeClr val="tx1"/>
+          </a:fontRef>
+        </p:style>
+      </p:cxnSp>
+      <p:cxnSp>
+        <p:nvCxnSpPr>
+          <p:cNvPr id="100" name="꺾인 연결선 99"/>
+          <p:cNvCxnSpPr>
+            <a:stCxn id="50" idx="0"/>
+            <a:endCxn id="49" idx="2"/>
+          </p:cNvCxnSpPr>
+          <p:nvPr/>
+        </p:nvCxnSpPr>
+        <p:spPr>
+          <a:xfrm rot="5400000" flipH="1" flipV="1">
+            <a:off x="5434333" y="4667571"/>
+            <a:ext cx="929258" cy="1478306"/>
+          </a:xfrm>
+          <a:prstGeom prst="bentConnector3">
+            <a:avLst/>
+          </a:prstGeom>
+          <a:ln>
+            <a:tailEnd type="triangle"/>
+          </a:ln>
+        </p:spPr>
+        <p:style>
+          <a:lnRef idx="2">
+            <a:schemeClr val="accent1"/>
+          </a:lnRef>
+          <a:fillRef idx="0">
+            <a:schemeClr val="accent1"/>
+          </a:fillRef>
+          <a:effectRef idx="1">
+            <a:schemeClr val="accent1"/>
+          </a:effectRef>
+          <a:fontRef idx="minor">
+            <a:schemeClr val="tx1"/>
+          </a:fontRef>
+        </p:style>
+      </p:cxnSp>
+      <p:cxnSp>
+        <p:nvCxnSpPr>
+          <p:cNvPr id="102" name="꺾인 연결선 101"/>
+          <p:cNvCxnSpPr>
+            <a:stCxn id="51" idx="0"/>
+            <a:endCxn id="49" idx="2"/>
+          </p:cNvCxnSpPr>
+          <p:nvPr/>
+        </p:nvCxnSpPr>
+        <p:spPr>
+          <a:xfrm rot="16200000" flipV="1">
+            <a:off x="6950310" y="4629901"/>
+            <a:ext cx="929257" cy="1553646"/>
+          </a:xfrm>
+          <a:prstGeom prst="bentConnector3">
+            <a:avLst/>
+          </a:prstGeom>
+          <a:ln>
+            <a:tailEnd type="triangle"/>
+          </a:ln>
+        </p:spPr>
+        <p:style>
+          <a:lnRef idx="2">
+            <a:schemeClr val="accent1"/>
+          </a:lnRef>
+          <a:fillRef idx="0">
+            <a:schemeClr val="accent1"/>
+          </a:fillRef>
+          <a:effectRef idx="1">
+            <a:schemeClr val="accent1"/>
+          </a:effectRef>
+          <a:fontRef idx="minor">
+            <a:schemeClr val="tx1"/>
+          </a:fontRef>
+        </p:style>
+      </p:cxnSp>
+      <p:sp>
+        <p:nvSpPr>
+          <p:cNvPr id="103" name="TextBox 102"/>
+          <p:cNvSpPr txBox="1"/>
+          <p:nvPr/>
+        </p:nvSpPr>
+        <p:spPr>
+          <a:xfrm>
+            <a:off x="4314065" y="4357594"/>
+            <a:ext cx="1665841" cy="323165"/>
+          </a:xfrm>
+          <a:prstGeom prst="rect">
+            <a:avLst/>
+          </a:prstGeom>
+          <a:noFill/>
+        </p:spPr>
+        <p:txBody>
+          <a:bodyPr wrap="none" rtlCol="0">
+            <a:spAutoFit/>
+          </a:bodyPr>
+          <a:lstStyle/>
+          <a:p>
+            <a:r>
+              <a:rPr lang="ko-KR" altLang="en-US" sz="1500" dirty="0" smtClean="0"/>
+              <a:t>객체 기반 클래스</a:t>
+            </a:r>
+            <a:endParaRPr lang="ko-KR" altLang="en-US" sz="1500" dirty="0"/>
+          </a:p>
+        </p:txBody>
+      </p:sp>
+      <p:sp>
+        <p:nvSpPr>
+          <p:cNvPr id="104" name="TextBox 103"/>
+          <p:cNvSpPr txBox="1"/>
+          <p:nvPr/>
+        </p:nvSpPr>
+        <p:spPr>
+          <a:xfrm>
+            <a:off x="7719317" y="3922498"/>
+            <a:ext cx="1640193" cy="553998"/>
+          </a:xfrm>
+          <a:prstGeom prst="rect">
+            <a:avLst/>
+          </a:prstGeom>
+          <a:noFill/>
+        </p:spPr>
+        <p:txBody>
+          <a:bodyPr wrap="none" rtlCol="0">
+            <a:spAutoFit/>
+          </a:bodyPr>
+          <a:lstStyle/>
+          <a:p>
+            <a:r>
+              <a:rPr lang="ko-KR" altLang="en-US" sz="1500" dirty="0" err="1" smtClean="0"/>
+              <a:t>인스턴스</a:t>
+            </a:r>
+            <a:r>
+              <a:rPr lang="ko-KR" altLang="en-US" sz="1500" dirty="0" smtClean="0"/>
+              <a:t> 관리</a:t>
+            </a:r>
+            <a:r>
+              <a:rPr lang="en-US" altLang="ko-KR" sz="1500" dirty="0" smtClean="0"/>
+              <a:t/>
+            </a:r>
+            <a:br>
+              <a:rPr lang="en-US" altLang="ko-KR" sz="1500" dirty="0" smtClean="0"/>
+            </a:br>
+            <a:r>
+              <a:rPr lang="ko-KR" altLang="en-US" sz="1500" dirty="0" smtClean="0"/>
+              <a:t>업데이트</a:t>
+            </a:r>
+            <a:r>
+              <a:rPr lang="en-US" altLang="ko-KR" sz="1500" dirty="0" smtClean="0"/>
+              <a:t>, </a:t>
+            </a:r>
+            <a:r>
+              <a:rPr lang="ko-KR" altLang="en-US" sz="1500" dirty="0" err="1" smtClean="0"/>
+              <a:t>렌더링</a:t>
+            </a:r>
+            <a:endParaRPr lang="ko-KR" altLang="en-US" sz="1500" dirty="0"/>
+          </a:p>
+        </p:txBody>
+      </p:sp>
+      <p:sp>
+        <p:nvSpPr>
+          <p:cNvPr id="106" name="TextBox 105"/>
+          <p:cNvSpPr txBox="1"/>
+          <p:nvPr/>
+        </p:nvSpPr>
+        <p:spPr>
+          <a:xfrm>
+            <a:off x="5438428" y="2236829"/>
+            <a:ext cx="1858201" cy="553998"/>
+          </a:xfrm>
+          <a:prstGeom prst="rect">
+            <a:avLst/>
+          </a:prstGeom>
+          <a:noFill/>
+        </p:spPr>
+        <p:txBody>
+          <a:bodyPr wrap="none" rtlCol="0">
+            <a:spAutoFit/>
+          </a:bodyPr>
+          <a:lstStyle/>
+          <a:p>
+            <a:r>
+              <a:rPr lang="ko-KR" altLang="en-US" sz="1500" dirty="0" smtClean="0"/>
+              <a:t>게임 루프에서 </a:t>
+            </a:r>
+            <a:r>
+              <a:rPr lang="en-US" altLang="ko-KR" sz="1500" dirty="0" smtClean="0"/>
+              <a:t/>
+            </a:r>
+            <a:br>
+              <a:rPr lang="en-US" altLang="ko-KR" sz="1500" dirty="0" smtClean="0"/>
+            </a:br>
+            <a:r>
+              <a:rPr lang="ko-KR" altLang="en-US" sz="1500" dirty="0" smtClean="0"/>
+              <a:t>업데이트 및 </a:t>
+            </a:r>
+            <a:r>
+              <a:rPr lang="ko-KR" altLang="en-US" sz="1500" dirty="0" err="1" smtClean="0"/>
+              <a:t>렌더링</a:t>
+            </a:r>
+            <a:endParaRPr lang="ko-KR" altLang="en-US" sz="1500" dirty="0"/>
+          </a:p>
+        </p:txBody>
+      </p:sp>
+      <p:cxnSp>
+        <p:nvCxnSpPr>
+          <p:cNvPr id="110" name="꺾인 연결선 109"/>
+          <p:cNvCxnSpPr>
+            <a:stCxn id="50" idx="3"/>
+            <a:endCxn id="51" idx="1"/>
+          </p:cNvCxnSpPr>
+          <p:nvPr/>
+        </p:nvCxnSpPr>
+        <p:spPr>
+          <a:xfrm flipV="1">
+            <a:off x="5818018" y="6147683"/>
+            <a:ext cx="1715534" cy="1"/>
+          </a:xfrm>
+          <a:prstGeom prst="bentConnector3">
+            <a:avLst/>
+          </a:prstGeom>
+          <a:ln>
+            <a:tailEnd type="triangle"/>
+          </a:ln>
+        </p:spPr>
+        <p:style>
+          <a:lnRef idx="2">
+            <a:schemeClr val="accent1"/>
+          </a:lnRef>
+          <a:fillRef idx="0">
+            <a:schemeClr val="accent1"/>
+          </a:fillRef>
+          <a:effectRef idx="1">
+            <a:schemeClr val="accent1"/>
+          </a:effectRef>
+          <a:fontRef idx="minor">
+            <a:schemeClr val="tx1"/>
+          </a:fontRef>
+        </p:style>
+      </p:cxnSp>
+      <p:sp>
+        <p:nvSpPr>
+          <p:cNvPr id="111" name="TextBox 110"/>
+          <p:cNvSpPr txBox="1"/>
+          <p:nvPr/>
+        </p:nvSpPr>
+        <p:spPr>
+          <a:xfrm>
+            <a:off x="6658697" y="4999644"/>
+            <a:ext cx="569387" cy="323165"/>
+          </a:xfrm>
+          <a:prstGeom prst="rect">
+            <a:avLst/>
+          </a:prstGeom>
+          <a:noFill/>
+        </p:spPr>
+        <p:txBody>
+          <a:bodyPr wrap="none" rtlCol="0">
+            <a:spAutoFit/>
+          </a:bodyPr>
+          <a:lstStyle/>
+          <a:p>
+            <a:pPr algn="ctr"/>
+            <a:r>
+              <a:rPr lang="ko-KR" altLang="en-US" sz="1500" dirty="0" smtClean="0"/>
+              <a:t>상속</a:t>
+            </a:r>
+            <a:endParaRPr lang="ko-KR" altLang="en-US" sz="1500" dirty="0"/>
+          </a:p>
+        </p:txBody>
+      </p:sp>
+      <p:sp>
+        <p:nvSpPr>
+          <p:cNvPr id="112" name="TextBox 111"/>
+          <p:cNvSpPr txBox="1"/>
+          <p:nvPr/>
+        </p:nvSpPr>
+        <p:spPr>
+          <a:xfrm>
+            <a:off x="2063511" y="5871352"/>
+            <a:ext cx="2377639" cy="553998"/>
+          </a:xfrm>
+          <a:prstGeom prst="rect">
+            <a:avLst/>
+          </a:prstGeom>
+          <a:noFill/>
+        </p:spPr>
+        <p:txBody>
+          <a:bodyPr wrap="none" rtlCol="0">
+            <a:spAutoFit/>
+          </a:bodyPr>
+          <a:lstStyle/>
+          <a:p>
+            <a:pPr algn="r"/>
+            <a:r>
+              <a:rPr lang="ko-KR" altLang="en-US" sz="1500" dirty="0" err="1" smtClean="0"/>
+              <a:t>씬에</a:t>
+            </a:r>
+            <a:r>
+              <a:rPr lang="ko-KR" altLang="en-US" sz="1500" dirty="0" smtClean="0"/>
+              <a:t> 배치될 수 있는 객체</a:t>
+            </a:r>
+            <a:endParaRPr lang="en-US" altLang="ko-KR" sz="1500" dirty="0" smtClean="0"/>
+          </a:p>
+          <a:p>
+            <a:pPr algn="r"/>
+            <a:r>
+              <a:rPr lang="ko-KR" altLang="en-US" sz="1500" dirty="0" smtClean="0"/>
+              <a:t>컴포넌트로 기능 확장</a:t>
+            </a:r>
+            <a:endParaRPr lang="ko-KR" altLang="en-US" sz="1500" dirty="0"/>
+          </a:p>
+        </p:txBody>
+      </p:sp>
+      <p:sp>
+        <p:nvSpPr>
+          <p:cNvPr id="117" name="TextBox 116"/>
+          <p:cNvSpPr txBox="1"/>
+          <p:nvPr/>
+        </p:nvSpPr>
+        <p:spPr>
+          <a:xfrm>
+            <a:off x="8929645" y="5870015"/>
+            <a:ext cx="1665841" cy="553998"/>
+          </a:xfrm>
+          <a:prstGeom prst="rect">
+            <a:avLst/>
+          </a:prstGeom>
+          <a:noFill/>
+        </p:spPr>
+        <p:txBody>
+          <a:bodyPr wrap="none" rtlCol="0">
+            <a:spAutoFit/>
+          </a:bodyPr>
+          <a:lstStyle/>
+          <a:p>
+            <a:r>
+              <a:rPr lang="ko-KR" altLang="en-US" sz="1500" dirty="0" err="1" smtClean="0"/>
+              <a:t>액터의</a:t>
+            </a:r>
+            <a:r>
+              <a:rPr lang="ko-KR" altLang="en-US" sz="1500" dirty="0" smtClean="0"/>
+              <a:t> </a:t>
+            </a:r>
+            <a:r>
+              <a:rPr lang="en-US" altLang="ko-KR" sz="1500" dirty="0" smtClean="0"/>
+              <a:t/>
+            </a:r>
+            <a:br>
+              <a:rPr lang="en-US" altLang="ko-KR" sz="1500" dirty="0" smtClean="0"/>
+            </a:br>
+            <a:r>
+              <a:rPr lang="ko-KR" altLang="en-US" sz="1500" dirty="0" smtClean="0"/>
+              <a:t>기능 확장 클래스</a:t>
+            </a:r>
+            <a:endParaRPr lang="ko-KR" altLang="en-US" sz="1500" dirty="0"/>
+          </a:p>
+        </p:txBody>
+      </p:sp>
+      <p:sp>
+        <p:nvSpPr>
+          <p:cNvPr id="85" name="TextBox 84"/>
+          <p:cNvSpPr txBox="1"/>
+          <p:nvPr/>
+        </p:nvSpPr>
+        <p:spPr>
+          <a:xfrm>
+            <a:off x="6392990" y="6100848"/>
+            <a:ext cx="569388" cy="323165"/>
+          </a:xfrm>
+          <a:prstGeom prst="rect">
+            <a:avLst/>
+          </a:prstGeom>
+          <a:noFill/>
+        </p:spPr>
+        <p:txBody>
+          <a:bodyPr wrap="none" rtlCol="0">
+            <a:spAutoFit/>
+          </a:bodyPr>
+          <a:lstStyle/>
+          <a:p>
+            <a:pPr algn="ctr"/>
+            <a:r>
+              <a:rPr lang="ko-KR" altLang="en-US" sz="1500" dirty="0" smtClean="0"/>
+              <a:t>의존</a:t>
+            </a:r>
+            <a:endParaRPr lang="ko-KR" altLang="en-US" sz="1500" dirty="0"/>
           </a:p>
         </p:txBody>
       </p:sp>
     </p:spTree>
     <p:extLst>
       <p:ext uri="{BB962C8B-B14F-4D97-AF65-F5344CB8AC3E}">
-        <p14:creationId xmlns:p14="http://schemas.microsoft.com/office/powerpoint/2010/main" val="2118968564"/>
+        <p14:creationId xmlns:p14="http://schemas.microsoft.com/office/powerpoint/2010/main" val="3165393763"/>
       </p:ext>
     </p:extLst>
   </p:cSld>
   <p:clrMapOvr>
     <a:masterClrMapping/>
   </p:clrMapOvr>
+</p:sld>
+</file>
+
+<file path=ppt/slides/slide4.xml><?xml version="1.0" encoding="utf-8"?>
+<p:sld xmlns:a="http://schemas.openxmlformats.org/drawingml/2006/main" xmlns:r="http://schemas.openxmlformats.org/officeDocument/2006/relationships" xmlns:p="http://schemas.openxmlformats.org/presentationml/2006/main">
+  <p:cSld>
+    <p:spTree>
+      <p:nvGrpSpPr>
+        <p:cNvPr id="1" name="">
+          <a:extLst>
+            <a:ext uri="{FF2B5EF4-FFF2-40B4-BE49-F238E27FC236}">
+              <a16:creationId xmlns:a16="http://schemas.microsoft.com/office/drawing/2014/main" xmlns="" id="{068E24C7-A429-CDA0-4EB6-16142BB05552}"/>
+            </a:ext>
+          </a:extLst>
+        </p:cNvPr>
+        <p:cNvGrpSpPr/>
+        <p:nvPr/>
+      </p:nvGrpSpPr>
+      <p:grpSpPr>
+        <a:xfrm>
+          <a:off x="0" y="0"/>
+          <a:ext cx="0" cy="0"/>
+          <a:chOff x="0" y="0"/>
+          <a:chExt cx="0" cy="0"/>
+        </a:xfrm>
+      </p:grpSpPr>
+      <p:sp>
+        <p:nvSpPr>
+          <p:cNvPr id="5" name="TextBox 4">
+            <a:extLst>
+              <a:ext uri="{FF2B5EF4-FFF2-40B4-BE49-F238E27FC236}">
+                <a16:creationId xmlns:a16="http://schemas.microsoft.com/office/drawing/2014/main" xmlns="" id="{4715F932-2F2C-4A3F-7F16-1B13D352985A}"/>
+              </a:ext>
+            </a:extLst>
+          </p:cNvPr>
+          <p:cNvSpPr txBox="1"/>
+          <p:nvPr/>
+        </p:nvSpPr>
+        <p:spPr>
+          <a:xfrm>
+            <a:off x="302451" y="315453"/>
+            <a:ext cx="4944140" cy="369332"/>
+          </a:xfrm>
+          <a:prstGeom prst="rect">
+            <a:avLst/>
+          </a:prstGeom>
+          <a:noFill/>
+        </p:spPr>
+        <p:txBody>
+          <a:bodyPr wrap="square" rtlCol="0">
+            <a:spAutoFit/>
+          </a:bodyPr>
+          <a:lstStyle/>
+          <a:p>
+            <a:r>
+              <a:rPr lang="ko-KR" altLang="en-US" dirty="0"/>
+              <a:t>이번 주 작업 내역</a:t>
+            </a:r>
+            <a:endParaRPr lang="en-US" altLang="ko-KR" dirty="0"/>
+          </a:p>
+        </p:txBody>
+      </p:sp>
+      <p:sp>
+        <p:nvSpPr>
+          <p:cNvPr id="7" name="직사각형 6"/>
+          <p:cNvSpPr/>
+          <p:nvPr/>
+        </p:nvSpPr>
+        <p:spPr>
+          <a:xfrm>
+            <a:off x="302451" y="758852"/>
+            <a:ext cx="6096000" cy="1569660"/>
+          </a:xfrm>
+          <a:prstGeom prst="rect">
+            <a:avLst/>
+          </a:prstGeom>
+        </p:spPr>
+        <p:txBody>
+          <a:bodyPr>
+            <a:spAutoFit/>
+          </a:bodyPr>
+          <a:lstStyle/>
+          <a:p>
+            <a:pPr marL="285750" indent="-285750">
+              <a:buFont typeface="Arial" panose="020B0604020202020204" pitchFamily="34" charset="0"/>
+              <a:buChar char="•"/>
+            </a:pPr>
+            <a:r>
+              <a:rPr lang="en-US" altLang="ko-KR" sz="1600" dirty="0" err="1" smtClean="0"/>
+              <a:t>fbx</a:t>
+            </a:r>
+            <a:r>
+              <a:rPr lang="ko-KR" altLang="en-US" sz="1600" dirty="0" smtClean="0"/>
+              <a:t> </a:t>
+            </a:r>
+            <a:r>
+              <a:rPr lang="ko-KR" altLang="en-US" sz="1600" dirty="0"/>
+              <a:t>파일 </a:t>
+            </a:r>
+            <a:r>
+              <a:rPr lang="ko-KR" altLang="en-US" sz="1600" dirty="0" err="1" smtClean="0"/>
+              <a:t>파싱</a:t>
+            </a:r>
+            <a:r>
+              <a:rPr lang="ko-KR" altLang="en-US" sz="1600" dirty="0" smtClean="0"/>
+              <a:t> </a:t>
+            </a:r>
+            <a:endParaRPr lang="en-US" altLang="ko-KR" sz="1600" dirty="0" smtClean="0"/>
+          </a:p>
+          <a:p>
+            <a:pPr marL="742950" lvl="1" indent="-285750">
+              <a:buFont typeface="Arial" panose="020B0604020202020204" pitchFamily="34" charset="0"/>
+              <a:buChar char="•"/>
+            </a:pPr>
+            <a:r>
+              <a:rPr lang="en-US" altLang="ko-KR" sz="1600" dirty="0" err="1" smtClean="0"/>
+              <a:t>Assimp</a:t>
+            </a:r>
+            <a:r>
+              <a:rPr lang="en-US" altLang="ko-KR" sz="1600" dirty="0" smtClean="0"/>
+              <a:t> </a:t>
+            </a:r>
+            <a:r>
+              <a:rPr lang="ko-KR" altLang="en-US" sz="1600" dirty="0"/>
+              <a:t>활용하여 </a:t>
+            </a:r>
+            <a:r>
+              <a:rPr lang="en-US" altLang="ko-KR" sz="1600" dirty="0"/>
+              <a:t>FBX</a:t>
+            </a:r>
+            <a:r>
+              <a:rPr lang="ko-KR" altLang="en-US" sz="1600" dirty="0"/>
+              <a:t>에 한정되지 않도록 </a:t>
+            </a:r>
+            <a:r>
+              <a:rPr lang="ko-KR" altLang="en-US" sz="1600" dirty="0" smtClean="0"/>
+              <a:t>수정 </a:t>
+            </a:r>
+            <a:r>
+              <a:rPr lang="ko-KR" altLang="en-US" sz="1600" dirty="0"/>
+              <a:t>진행 중</a:t>
+            </a:r>
+            <a:endParaRPr lang="en-US" altLang="ko-KR" sz="1600" dirty="0"/>
+          </a:p>
+          <a:p>
+            <a:pPr marL="285750" indent="-285750">
+              <a:buFont typeface="Arial" panose="020B0604020202020204" pitchFamily="34" charset="0"/>
+              <a:buChar char="•"/>
+            </a:pPr>
+            <a:r>
+              <a:rPr lang="en-US" altLang="ko-KR" sz="1600" dirty="0" err="1" smtClean="0"/>
+              <a:t>fbx</a:t>
+            </a:r>
+            <a:r>
+              <a:rPr lang="en-US" altLang="ko-KR" sz="1600" dirty="0" smtClean="0"/>
+              <a:t> </a:t>
+            </a:r>
+            <a:r>
+              <a:rPr lang="ko-KR" altLang="en-US" sz="1600" dirty="0" smtClean="0"/>
+              <a:t>객체 </a:t>
+            </a:r>
+            <a:r>
+              <a:rPr lang="ko-KR" altLang="en-US" sz="1600" dirty="0" err="1"/>
+              <a:t>렌더링</a:t>
+            </a:r>
+            <a:endParaRPr lang="en-US" altLang="ko-KR" sz="1600" dirty="0"/>
+          </a:p>
+          <a:p>
+            <a:pPr marL="285750" indent="-285750">
+              <a:buFont typeface="Arial" panose="020B0604020202020204" pitchFamily="34" charset="0"/>
+              <a:buChar char="•"/>
+            </a:pPr>
+            <a:r>
+              <a:rPr lang="ko-KR" altLang="en-US" sz="1600" dirty="0"/>
+              <a:t>애니메이션 로드 및 </a:t>
+            </a:r>
+            <a:r>
+              <a:rPr lang="ko-KR" altLang="en-US" sz="1600" dirty="0" smtClean="0"/>
+              <a:t>재생</a:t>
+            </a:r>
+            <a:endParaRPr lang="en-US" altLang="ko-KR" sz="1600" dirty="0"/>
+          </a:p>
+          <a:p>
+            <a:pPr marL="285750" indent="-285750">
+              <a:buFont typeface="Arial" panose="020B0604020202020204" pitchFamily="34" charset="0"/>
+              <a:buChar char="•"/>
+            </a:pPr>
+            <a:r>
+              <a:rPr lang="ko-KR" altLang="en-US" sz="1600" dirty="0"/>
+              <a:t>애니메이션 </a:t>
+            </a:r>
+            <a:r>
+              <a:rPr lang="ko-KR" altLang="en-US" sz="1600" dirty="0" err="1"/>
+              <a:t>블렌드</a:t>
+            </a:r>
+            <a:r>
+              <a:rPr lang="ko-KR" altLang="en-US" sz="1600" dirty="0"/>
+              <a:t> </a:t>
+            </a:r>
+            <a:r>
+              <a:rPr lang="en-US" altLang="ko-KR" sz="1600" dirty="0"/>
+              <a:t>(</a:t>
+            </a:r>
+            <a:r>
+              <a:rPr lang="ko-KR" altLang="en-US" sz="1600" dirty="0"/>
+              <a:t>진행 중</a:t>
+            </a:r>
+            <a:r>
+              <a:rPr lang="en-US" altLang="ko-KR" sz="1600" dirty="0" smtClean="0"/>
+              <a:t>)</a:t>
+            </a:r>
+          </a:p>
+          <a:p>
+            <a:pPr marL="742950" lvl="1" indent="-285750">
+              <a:buFont typeface="Arial" panose="020B0604020202020204" pitchFamily="34" charset="0"/>
+              <a:buChar char="•"/>
+            </a:pPr>
+            <a:r>
+              <a:rPr lang="ko-KR" altLang="en-US" sz="1600" dirty="0" smtClean="0"/>
+              <a:t>자체 </a:t>
+            </a:r>
+            <a:r>
+              <a:rPr lang="ko-KR" altLang="en-US" sz="1600" dirty="0" err="1" smtClean="0"/>
+              <a:t>메쉬</a:t>
+            </a:r>
+            <a:r>
+              <a:rPr lang="en-US" altLang="ko-KR" sz="1600" dirty="0" smtClean="0"/>
+              <a:t>, </a:t>
+            </a:r>
+            <a:r>
+              <a:rPr lang="ko-KR" altLang="en-US" sz="1600" dirty="0" err="1" smtClean="0"/>
+              <a:t>스켈레톤</a:t>
+            </a:r>
+            <a:r>
+              <a:rPr lang="ko-KR" altLang="en-US" sz="1600" dirty="0" smtClean="0"/>
+              <a:t> 데이터 기반 작업</a:t>
+            </a:r>
+            <a:endParaRPr lang="en-US" altLang="ko-KR" sz="1600" dirty="0"/>
+          </a:p>
+        </p:txBody>
+      </p:sp>
+      <p:sp>
+        <p:nvSpPr>
+          <p:cNvPr id="2" name="직사각형 1"/>
+          <p:cNvSpPr/>
+          <p:nvPr/>
+        </p:nvSpPr>
+        <p:spPr>
+          <a:xfrm>
+            <a:off x="422032" y="3818373"/>
+            <a:ext cx="3537019" cy="2301073"/>
+          </a:xfrm>
+          <a:prstGeom prst="rect">
+            <a:avLst/>
+          </a:prstGeom>
+          <a:solidFill>
+            <a:schemeClr val="tx2"/>
+          </a:solidFill>
+        </p:spPr>
+        <p:style>
+          <a:lnRef idx="2">
+            <a:schemeClr val="accent1">
+              <a:shade val="50000"/>
+            </a:schemeClr>
+          </a:lnRef>
+          <a:fillRef idx="1">
+            <a:schemeClr val="accent1"/>
+          </a:fillRef>
+          <a:effectRef idx="0">
+            <a:schemeClr val="accent1"/>
+          </a:effectRef>
+          <a:fontRef idx="minor">
+            <a:schemeClr val="lt1"/>
+          </a:fontRef>
+        </p:style>
+        <p:txBody>
+          <a:bodyPr rtlCol="0" anchor="ctr"/>
+          <a:lstStyle/>
+          <a:p>
+            <a:pPr algn="ctr"/>
+            <a:r>
+              <a:rPr lang="ko-KR" altLang="en-US" dirty="0" err="1" smtClean="0"/>
+              <a:t>큐브</a:t>
+            </a:r>
+            <a:r>
+              <a:rPr lang="ko-KR" altLang="en-US" dirty="0" smtClean="0"/>
+              <a:t> 이미지 추가</a:t>
+            </a:r>
+            <a:endParaRPr lang="ko-KR" altLang="en-US" dirty="0"/>
+          </a:p>
+        </p:txBody>
+      </p:sp>
+      <p:sp>
+        <p:nvSpPr>
+          <p:cNvPr id="8" name="직사각형 7"/>
+          <p:cNvSpPr/>
+          <p:nvPr/>
+        </p:nvSpPr>
+        <p:spPr>
+          <a:xfrm>
+            <a:off x="4267201" y="3818373"/>
+            <a:ext cx="3537019" cy="2301073"/>
+          </a:xfrm>
+          <a:prstGeom prst="rect">
+            <a:avLst/>
+          </a:prstGeom>
+          <a:solidFill>
+            <a:schemeClr val="tx2"/>
+          </a:solidFill>
+        </p:spPr>
+        <p:style>
+          <a:lnRef idx="2">
+            <a:schemeClr val="accent1">
+              <a:shade val="50000"/>
+            </a:schemeClr>
+          </a:lnRef>
+          <a:fillRef idx="1">
+            <a:schemeClr val="accent1"/>
+          </a:fillRef>
+          <a:effectRef idx="0">
+            <a:schemeClr val="accent1"/>
+          </a:effectRef>
+          <a:fontRef idx="minor">
+            <a:schemeClr val="lt1"/>
+          </a:fontRef>
+        </p:style>
+        <p:txBody>
+          <a:bodyPr rtlCol="0" anchor="ctr"/>
+          <a:lstStyle/>
+          <a:p>
+            <a:pPr algn="ctr"/>
+            <a:r>
+              <a:rPr lang="en-US" altLang="ko-KR" dirty="0" smtClean="0"/>
+              <a:t>X bot </a:t>
+            </a:r>
+            <a:r>
+              <a:rPr lang="ko-KR" altLang="en-US" dirty="0" smtClean="0"/>
+              <a:t>이미지 추가</a:t>
+            </a:r>
+            <a:endParaRPr lang="ko-KR" altLang="en-US" dirty="0"/>
+          </a:p>
+        </p:txBody>
+      </p:sp>
+      <p:sp>
+        <p:nvSpPr>
+          <p:cNvPr id="9" name="직사각형 8"/>
+          <p:cNvSpPr/>
+          <p:nvPr/>
+        </p:nvSpPr>
+        <p:spPr>
+          <a:xfrm>
+            <a:off x="8112371" y="3818373"/>
+            <a:ext cx="3537019" cy="2301073"/>
+          </a:xfrm>
+          <a:prstGeom prst="rect">
+            <a:avLst/>
+          </a:prstGeom>
+          <a:solidFill>
+            <a:schemeClr val="tx2"/>
+          </a:solidFill>
+        </p:spPr>
+        <p:style>
+          <a:lnRef idx="2">
+            <a:schemeClr val="accent1">
+              <a:shade val="50000"/>
+            </a:schemeClr>
+          </a:lnRef>
+          <a:fillRef idx="1">
+            <a:schemeClr val="accent1"/>
+          </a:fillRef>
+          <a:effectRef idx="0">
+            <a:schemeClr val="accent1"/>
+          </a:effectRef>
+          <a:fontRef idx="minor">
+            <a:schemeClr val="lt1"/>
+          </a:fontRef>
+        </p:style>
+        <p:txBody>
+          <a:bodyPr rtlCol="0" anchor="ctr"/>
+          <a:lstStyle/>
+          <a:p>
+            <a:pPr algn="ctr"/>
+            <a:r>
+              <a:rPr lang="ko-KR" altLang="en-US" dirty="0" smtClean="0"/>
+              <a:t>애니메이션 이미지 추가</a:t>
+            </a:r>
+            <a:endParaRPr lang="ko-KR" altLang="en-US" dirty="0"/>
+          </a:p>
+        </p:txBody>
+      </p:sp>
+      <p:sp>
+        <p:nvSpPr>
+          <p:cNvPr id="11" name="직사각형 10"/>
+          <p:cNvSpPr/>
+          <p:nvPr/>
+        </p:nvSpPr>
+        <p:spPr>
+          <a:xfrm>
+            <a:off x="5737263" y="1473536"/>
+            <a:ext cx="1858944" cy="552661"/>
+          </a:xfrm>
+          <a:prstGeom prst="rect">
+            <a:avLst/>
+          </a:prstGeom>
+          <a:solidFill>
+            <a:schemeClr val="bg2"/>
+          </a:solidFill>
+        </p:spPr>
+        <p:style>
+          <a:lnRef idx="2">
+            <a:schemeClr val="accent1">
+              <a:shade val="50000"/>
+            </a:schemeClr>
+          </a:lnRef>
+          <a:fillRef idx="1">
+            <a:schemeClr val="accent1"/>
+          </a:fillRef>
+          <a:effectRef idx="0">
+            <a:schemeClr val="accent1"/>
+          </a:effectRef>
+          <a:fontRef idx="minor">
+            <a:schemeClr val="lt1"/>
+          </a:fontRef>
+        </p:style>
+        <p:txBody>
+          <a:bodyPr rtlCol="0" anchor="ctr"/>
+          <a:lstStyle/>
+          <a:p>
+            <a:pPr algn="ctr"/>
+            <a:r>
+              <a:rPr lang="en-US" altLang="ko-KR" sz="1400" dirty="0" err="1" smtClean="0">
+                <a:solidFill>
+                  <a:schemeClr val="tx1"/>
+                </a:solidFill>
+              </a:rPr>
+              <a:t>ModelData</a:t>
+            </a:r>
+            <a:endParaRPr lang="ko-KR" altLang="en-US" sz="1400" dirty="0">
+              <a:solidFill>
+                <a:schemeClr val="tx1"/>
+              </a:solidFill>
+            </a:endParaRPr>
+          </a:p>
+        </p:txBody>
+      </p:sp>
+      <p:sp>
+        <p:nvSpPr>
+          <p:cNvPr id="12" name="직사각형 11"/>
+          <p:cNvSpPr/>
+          <p:nvPr/>
+        </p:nvSpPr>
+        <p:spPr>
+          <a:xfrm>
+            <a:off x="5737263" y="2144399"/>
+            <a:ext cx="1858944" cy="552661"/>
+          </a:xfrm>
+          <a:prstGeom prst="rect">
+            <a:avLst/>
+          </a:prstGeom>
+          <a:solidFill>
+            <a:schemeClr val="bg2"/>
+          </a:solidFill>
+        </p:spPr>
+        <p:style>
+          <a:lnRef idx="2">
+            <a:schemeClr val="accent1">
+              <a:shade val="50000"/>
+            </a:schemeClr>
+          </a:lnRef>
+          <a:fillRef idx="1">
+            <a:schemeClr val="accent1"/>
+          </a:fillRef>
+          <a:effectRef idx="0">
+            <a:schemeClr val="accent1"/>
+          </a:effectRef>
+          <a:fontRef idx="minor">
+            <a:schemeClr val="lt1"/>
+          </a:fontRef>
+        </p:style>
+        <p:txBody>
+          <a:bodyPr rtlCol="0" anchor="ctr"/>
+          <a:lstStyle/>
+          <a:p>
+            <a:pPr algn="ctr"/>
+            <a:r>
+              <a:rPr lang="en-US" altLang="ko-KR" sz="1400" dirty="0" smtClean="0">
+                <a:solidFill>
+                  <a:schemeClr val="tx1"/>
+                </a:solidFill>
+              </a:rPr>
+              <a:t>Renderer</a:t>
+            </a:r>
+            <a:endParaRPr lang="ko-KR" altLang="en-US" sz="1400" dirty="0">
+              <a:solidFill>
+                <a:schemeClr val="tx1"/>
+              </a:solidFill>
+            </a:endParaRPr>
+          </a:p>
+        </p:txBody>
+      </p:sp>
+      <p:sp>
+        <p:nvSpPr>
+          <p:cNvPr id="13" name="직사각형 12"/>
+          <p:cNvSpPr/>
+          <p:nvPr/>
+        </p:nvSpPr>
+        <p:spPr>
+          <a:xfrm>
+            <a:off x="8519329" y="1749866"/>
+            <a:ext cx="1858944" cy="552661"/>
+          </a:xfrm>
+          <a:prstGeom prst="rect">
+            <a:avLst/>
+          </a:prstGeom>
+          <a:solidFill>
+            <a:schemeClr val="bg2"/>
+          </a:solidFill>
+        </p:spPr>
+        <p:style>
+          <a:lnRef idx="2">
+            <a:schemeClr val="accent1">
+              <a:shade val="50000"/>
+            </a:schemeClr>
+          </a:lnRef>
+          <a:fillRef idx="1">
+            <a:schemeClr val="accent1"/>
+          </a:fillRef>
+          <a:effectRef idx="0">
+            <a:schemeClr val="accent1"/>
+          </a:effectRef>
+          <a:fontRef idx="minor">
+            <a:schemeClr val="lt1"/>
+          </a:fontRef>
+        </p:style>
+        <p:txBody>
+          <a:bodyPr rtlCol="0" anchor="ctr"/>
+          <a:lstStyle/>
+          <a:p>
+            <a:pPr algn="ctr"/>
+            <a:r>
+              <a:rPr lang="en-US" altLang="ko-KR" sz="1400" dirty="0" err="1" smtClean="0">
+                <a:solidFill>
+                  <a:schemeClr val="tx1"/>
+                </a:solidFill>
+              </a:rPr>
+              <a:t>MeshComponent</a:t>
+            </a:r>
+            <a:endParaRPr lang="ko-KR" altLang="en-US" sz="1400" dirty="0">
+              <a:solidFill>
+                <a:schemeClr val="tx1"/>
+              </a:solidFill>
+            </a:endParaRPr>
+          </a:p>
+        </p:txBody>
+      </p:sp>
+      <p:sp>
+        <p:nvSpPr>
+          <p:cNvPr id="14" name="직사각형 13"/>
+          <p:cNvSpPr/>
+          <p:nvPr/>
+        </p:nvSpPr>
+        <p:spPr>
+          <a:xfrm>
+            <a:off x="8519329" y="684785"/>
+            <a:ext cx="1858944" cy="552661"/>
+          </a:xfrm>
+          <a:prstGeom prst="rect">
+            <a:avLst/>
+          </a:prstGeom>
+          <a:solidFill>
+            <a:schemeClr val="bg2"/>
+          </a:solidFill>
+        </p:spPr>
+        <p:style>
+          <a:lnRef idx="2">
+            <a:schemeClr val="accent1">
+              <a:shade val="50000"/>
+            </a:schemeClr>
+          </a:lnRef>
+          <a:fillRef idx="1">
+            <a:schemeClr val="accent1"/>
+          </a:fillRef>
+          <a:effectRef idx="0">
+            <a:schemeClr val="accent1"/>
+          </a:effectRef>
+          <a:fontRef idx="minor">
+            <a:schemeClr val="lt1"/>
+          </a:fontRef>
+        </p:style>
+        <p:txBody>
+          <a:bodyPr rtlCol="0" anchor="ctr"/>
+          <a:lstStyle/>
+          <a:p>
+            <a:pPr algn="ctr"/>
+            <a:r>
+              <a:rPr lang="en-US" altLang="ko-KR" sz="1400" dirty="0" smtClean="0">
+                <a:solidFill>
+                  <a:schemeClr val="tx1"/>
+                </a:solidFill>
+              </a:rPr>
+              <a:t>Component</a:t>
+            </a:r>
+            <a:endParaRPr lang="ko-KR" altLang="en-US" sz="1400" dirty="0">
+              <a:solidFill>
+                <a:schemeClr val="tx1"/>
+              </a:solidFill>
+            </a:endParaRPr>
+          </a:p>
+        </p:txBody>
+      </p:sp>
+      <p:cxnSp>
+        <p:nvCxnSpPr>
+          <p:cNvPr id="15" name="꺾인 연결선 14"/>
+          <p:cNvCxnSpPr>
+            <a:stCxn id="13" idx="0"/>
+            <a:endCxn id="14" idx="2"/>
+          </p:cNvCxnSpPr>
+          <p:nvPr/>
+        </p:nvCxnSpPr>
+        <p:spPr>
+          <a:xfrm rot="5400000" flipH="1" flipV="1">
+            <a:off x="9192591" y="1493656"/>
+            <a:ext cx="512420" cy="12700"/>
+          </a:xfrm>
+          <a:prstGeom prst="bentConnector3">
+            <a:avLst/>
+          </a:prstGeom>
+          <a:ln>
+            <a:tailEnd type="triangle"/>
+          </a:ln>
+        </p:spPr>
+        <p:style>
+          <a:lnRef idx="2">
+            <a:schemeClr val="accent1"/>
+          </a:lnRef>
+          <a:fillRef idx="0">
+            <a:schemeClr val="accent1"/>
+          </a:fillRef>
+          <a:effectRef idx="1">
+            <a:schemeClr val="accent1"/>
+          </a:effectRef>
+          <a:fontRef idx="minor">
+            <a:schemeClr val="tx1"/>
+          </a:fontRef>
+        </p:style>
+      </p:cxnSp>
+      <p:cxnSp>
+        <p:nvCxnSpPr>
+          <p:cNvPr id="21" name="꺾인 연결선 20"/>
+          <p:cNvCxnSpPr>
+            <a:stCxn id="13" idx="1"/>
+            <a:endCxn id="11" idx="3"/>
+          </p:cNvCxnSpPr>
+          <p:nvPr/>
+        </p:nvCxnSpPr>
+        <p:spPr>
+          <a:xfrm rot="10800000">
+            <a:off x="7596207" y="1749867"/>
+            <a:ext cx="923122" cy="276330"/>
+          </a:xfrm>
+          <a:prstGeom prst="bentConnector3">
+            <a:avLst/>
+          </a:prstGeom>
+          <a:ln>
+            <a:tailEnd type="triangle"/>
+          </a:ln>
+        </p:spPr>
+        <p:style>
+          <a:lnRef idx="2">
+            <a:schemeClr val="accent1"/>
+          </a:lnRef>
+          <a:fillRef idx="0">
+            <a:schemeClr val="accent1"/>
+          </a:fillRef>
+          <a:effectRef idx="1">
+            <a:schemeClr val="accent1"/>
+          </a:effectRef>
+          <a:fontRef idx="minor">
+            <a:schemeClr val="tx1"/>
+          </a:fontRef>
+        </p:style>
+      </p:cxnSp>
+      <p:cxnSp>
+        <p:nvCxnSpPr>
+          <p:cNvPr id="23" name="꺾인 연결선 22"/>
+          <p:cNvCxnSpPr>
+            <a:stCxn id="13" idx="1"/>
+            <a:endCxn id="12" idx="3"/>
+          </p:cNvCxnSpPr>
+          <p:nvPr/>
+        </p:nvCxnSpPr>
+        <p:spPr>
+          <a:xfrm rot="10800000" flipV="1">
+            <a:off x="7596207" y="2026196"/>
+            <a:ext cx="923122" cy="394533"/>
+          </a:xfrm>
+          <a:prstGeom prst="bentConnector3">
+            <a:avLst/>
+          </a:prstGeom>
+          <a:ln>
+            <a:tailEnd type="triangle"/>
+          </a:ln>
+        </p:spPr>
+        <p:style>
+          <a:lnRef idx="2">
+            <a:schemeClr val="accent1"/>
+          </a:lnRef>
+          <a:fillRef idx="0">
+            <a:schemeClr val="accent1"/>
+          </a:fillRef>
+          <a:effectRef idx="1">
+            <a:schemeClr val="accent1"/>
+          </a:effectRef>
+          <a:fontRef idx="minor">
+            <a:schemeClr val="tx1"/>
+          </a:fontRef>
+        </p:style>
+      </p:cxnSp>
+      <p:sp>
+        <p:nvSpPr>
+          <p:cNvPr id="39" name="직사각형 38"/>
+          <p:cNvSpPr/>
+          <p:nvPr/>
+        </p:nvSpPr>
+        <p:spPr>
+          <a:xfrm>
+            <a:off x="8525679" y="2897163"/>
+            <a:ext cx="1858944" cy="552661"/>
+          </a:xfrm>
+          <a:prstGeom prst="rect">
+            <a:avLst/>
+          </a:prstGeom>
+          <a:solidFill>
+            <a:schemeClr val="bg2"/>
+          </a:solidFill>
+        </p:spPr>
+        <p:style>
+          <a:lnRef idx="2">
+            <a:schemeClr val="accent1">
+              <a:shade val="50000"/>
+            </a:schemeClr>
+          </a:lnRef>
+          <a:fillRef idx="1">
+            <a:schemeClr val="accent1"/>
+          </a:fillRef>
+          <a:effectRef idx="0">
+            <a:schemeClr val="accent1"/>
+          </a:effectRef>
+          <a:fontRef idx="minor">
+            <a:schemeClr val="lt1"/>
+          </a:fontRef>
+        </p:style>
+        <p:txBody>
+          <a:bodyPr rtlCol="0" anchor="ctr"/>
+          <a:lstStyle/>
+          <a:p>
+            <a:pPr algn="ctr"/>
+            <a:r>
+              <a:rPr lang="en-US" altLang="ko-KR" sz="1400" dirty="0" err="1" smtClean="0">
+                <a:solidFill>
+                  <a:schemeClr val="tx1"/>
+                </a:solidFill>
+              </a:rPr>
+              <a:t>SkinnedMesh</a:t>
+            </a:r>
+            <a:r>
+              <a:rPr lang="en-US" altLang="ko-KR" sz="1400" dirty="0" smtClean="0">
+                <a:solidFill>
+                  <a:schemeClr val="tx1"/>
+                </a:solidFill>
+              </a:rPr>
+              <a:t/>
+            </a:r>
+            <a:br>
+              <a:rPr lang="en-US" altLang="ko-KR" sz="1400" dirty="0" smtClean="0">
+                <a:solidFill>
+                  <a:schemeClr val="tx1"/>
+                </a:solidFill>
+              </a:rPr>
+            </a:br>
+            <a:r>
+              <a:rPr lang="en-US" altLang="ko-KR" sz="1400" dirty="0" smtClean="0">
+                <a:solidFill>
+                  <a:schemeClr val="tx1"/>
+                </a:solidFill>
+              </a:rPr>
+              <a:t>Component</a:t>
+            </a:r>
+            <a:endParaRPr lang="ko-KR" altLang="en-US" sz="1400" dirty="0">
+              <a:solidFill>
+                <a:schemeClr val="tx1"/>
+              </a:solidFill>
+            </a:endParaRPr>
+          </a:p>
+        </p:txBody>
+      </p:sp>
+      <p:sp>
+        <p:nvSpPr>
+          <p:cNvPr id="41" name="직사각형 40"/>
+          <p:cNvSpPr/>
+          <p:nvPr/>
+        </p:nvSpPr>
+        <p:spPr>
+          <a:xfrm>
+            <a:off x="5737263" y="2897164"/>
+            <a:ext cx="1858944" cy="552661"/>
+          </a:xfrm>
+          <a:prstGeom prst="rect">
+            <a:avLst/>
+          </a:prstGeom>
+          <a:solidFill>
+            <a:schemeClr val="bg2"/>
+          </a:solidFill>
+        </p:spPr>
+        <p:style>
+          <a:lnRef idx="2">
+            <a:schemeClr val="accent1">
+              <a:shade val="50000"/>
+            </a:schemeClr>
+          </a:lnRef>
+          <a:fillRef idx="1">
+            <a:schemeClr val="accent1"/>
+          </a:fillRef>
+          <a:effectRef idx="0">
+            <a:schemeClr val="accent1"/>
+          </a:effectRef>
+          <a:fontRef idx="minor">
+            <a:schemeClr val="lt1"/>
+          </a:fontRef>
+        </p:style>
+        <p:txBody>
+          <a:bodyPr rtlCol="0" anchor="ctr"/>
+          <a:lstStyle/>
+          <a:p>
+            <a:pPr algn="ctr"/>
+            <a:r>
+              <a:rPr lang="en-US" altLang="ko-KR" sz="1400" dirty="0" smtClean="0">
+                <a:solidFill>
+                  <a:schemeClr val="tx1"/>
+                </a:solidFill>
+              </a:rPr>
+              <a:t>Animation</a:t>
+            </a:r>
+            <a:endParaRPr lang="ko-KR" altLang="en-US" sz="1400" dirty="0">
+              <a:solidFill>
+                <a:schemeClr val="tx1"/>
+              </a:solidFill>
+            </a:endParaRPr>
+          </a:p>
+        </p:txBody>
+      </p:sp>
+      <p:cxnSp>
+        <p:nvCxnSpPr>
+          <p:cNvPr id="43" name="꺾인 연결선 42"/>
+          <p:cNvCxnSpPr>
+            <a:stCxn id="39" idx="0"/>
+            <a:endCxn id="13" idx="2"/>
+          </p:cNvCxnSpPr>
+          <p:nvPr/>
+        </p:nvCxnSpPr>
+        <p:spPr>
+          <a:xfrm rot="16200000" flipV="1">
+            <a:off x="9154658" y="2596670"/>
+            <a:ext cx="594636" cy="6350"/>
+          </a:xfrm>
+          <a:prstGeom prst="bentConnector3">
+            <a:avLst/>
+          </a:prstGeom>
+          <a:ln>
+            <a:tailEnd type="triangle"/>
+          </a:ln>
+        </p:spPr>
+        <p:style>
+          <a:lnRef idx="2">
+            <a:schemeClr val="accent1"/>
+          </a:lnRef>
+          <a:fillRef idx="0">
+            <a:schemeClr val="accent1"/>
+          </a:fillRef>
+          <a:effectRef idx="1">
+            <a:schemeClr val="accent1"/>
+          </a:effectRef>
+          <a:fontRef idx="minor">
+            <a:schemeClr val="tx1"/>
+          </a:fontRef>
+        </p:style>
+      </p:cxnSp>
+      <p:cxnSp>
+        <p:nvCxnSpPr>
+          <p:cNvPr id="45" name="꺾인 연결선 44"/>
+          <p:cNvCxnSpPr>
+            <a:stCxn id="39" idx="1"/>
+            <a:endCxn id="41" idx="3"/>
+          </p:cNvCxnSpPr>
+          <p:nvPr/>
+        </p:nvCxnSpPr>
+        <p:spPr>
+          <a:xfrm rot="10800000" flipV="1">
+            <a:off x="7596207" y="3173493"/>
+            <a:ext cx="929472" cy="1"/>
+          </a:xfrm>
+          <a:prstGeom prst="bentConnector3">
+            <a:avLst/>
+          </a:prstGeom>
+          <a:ln>
+            <a:tailEnd type="triangle"/>
+          </a:ln>
+        </p:spPr>
+        <p:style>
+          <a:lnRef idx="2">
+            <a:schemeClr val="accent1"/>
+          </a:lnRef>
+          <a:fillRef idx="0">
+            <a:schemeClr val="accent1"/>
+          </a:fillRef>
+          <a:effectRef idx="1">
+            <a:schemeClr val="accent1"/>
+          </a:effectRef>
+          <a:fontRef idx="minor">
+            <a:schemeClr val="tx1"/>
+          </a:fontRef>
+        </p:style>
+      </p:cxnSp>
+      <p:sp>
+        <p:nvSpPr>
+          <p:cNvPr id="52" name="TextBox 51"/>
+          <p:cNvSpPr txBox="1"/>
+          <p:nvPr/>
+        </p:nvSpPr>
+        <p:spPr>
+          <a:xfrm>
+            <a:off x="9442451" y="1349763"/>
+            <a:ext cx="569388" cy="323165"/>
+          </a:xfrm>
+          <a:prstGeom prst="rect">
+            <a:avLst/>
+          </a:prstGeom>
+          <a:noFill/>
+        </p:spPr>
+        <p:txBody>
+          <a:bodyPr wrap="none" rtlCol="0">
+            <a:spAutoFit/>
+          </a:bodyPr>
+          <a:lstStyle/>
+          <a:p>
+            <a:pPr algn="ctr"/>
+            <a:r>
+              <a:rPr lang="ko-KR" altLang="en-US" sz="1500" dirty="0" smtClean="0"/>
+              <a:t>상속</a:t>
+            </a:r>
+            <a:endParaRPr lang="ko-KR" altLang="en-US" sz="1500" dirty="0"/>
+          </a:p>
+        </p:txBody>
+      </p:sp>
+      <p:sp>
+        <p:nvSpPr>
+          <p:cNvPr id="53" name="TextBox 52"/>
+          <p:cNvSpPr txBox="1"/>
+          <p:nvPr/>
+        </p:nvSpPr>
+        <p:spPr>
+          <a:xfrm>
+            <a:off x="9442451" y="2438262"/>
+            <a:ext cx="569388" cy="323165"/>
+          </a:xfrm>
+          <a:prstGeom prst="rect">
+            <a:avLst/>
+          </a:prstGeom>
+          <a:noFill/>
+        </p:spPr>
+        <p:txBody>
+          <a:bodyPr wrap="none" rtlCol="0">
+            <a:spAutoFit/>
+          </a:bodyPr>
+          <a:lstStyle/>
+          <a:p>
+            <a:pPr algn="ctr"/>
+            <a:r>
+              <a:rPr lang="ko-KR" altLang="en-US" sz="1500" dirty="0" smtClean="0"/>
+              <a:t>상속</a:t>
+            </a:r>
+            <a:endParaRPr lang="ko-KR" altLang="en-US" sz="1500" dirty="0"/>
+          </a:p>
+        </p:txBody>
+      </p:sp>
+      <p:sp>
+        <p:nvSpPr>
+          <p:cNvPr id="54" name="TextBox 53"/>
+          <p:cNvSpPr txBox="1"/>
+          <p:nvPr/>
+        </p:nvSpPr>
+        <p:spPr>
+          <a:xfrm>
+            <a:off x="8112371" y="223454"/>
+            <a:ext cx="2589171" cy="323165"/>
+          </a:xfrm>
+          <a:prstGeom prst="rect">
+            <a:avLst/>
+          </a:prstGeom>
+          <a:noFill/>
+        </p:spPr>
+        <p:txBody>
+          <a:bodyPr wrap="none" rtlCol="0">
+            <a:spAutoFit/>
+          </a:bodyPr>
+          <a:lstStyle/>
+          <a:p>
+            <a:pPr algn="ctr"/>
+            <a:r>
+              <a:rPr lang="en-US" altLang="ko-KR" sz="1500" dirty="0" err="1" smtClean="0"/>
+              <a:t>MeshComponent</a:t>
+            </a:r>
+            <a:r>
+              <a:rPr lang="en-US" altLang="ko-KR" sz="1500" dirty="0" smtClean="0"/>
+              <a:t> </a:t>
+            </a:r>
+            <a:r>
+              <a:rPr lang="ko-KR" altLang="en-US" sz="1500" dirty="0" smtClean="0"/>
+              <a:t>구현 예정</a:t>
+            </a:r>
+            <a:endParaRPr lang="ko-KR" altLang="en-US" sz="1500" dirty="0"/>
+          </a:p>
+        </p:txBody>
+      </p:sp>
+    </p:spTree>
+    <p:extLst>
+      <p:ext uri="{BB962C8B-B14F-4D97-AF65-F5344CB8AC3E}">
+        <p14:creationId xmlns:p14="http://schemas.microsoft.com/office/powerpoint/2010/main" val="1847778270"/>
+      </p:ext>
+    </p:extLst>
+  </p:cSld>
+  <p:clrMapOvr>
+    <a:masterClrMapping/>
+  </p:clrMapOvr>
+</p:sld>
+</file>
+
+<file path=ppt/slides/slide5.xml><?xml version="1.0" encoding="utf-8"?>
+<p:sld xmlns:a="http://schemas.openxmlformats.org/drawingml/2006/main" xmlns:r="http://schemas.openxmlformats.org/officeDocument/2006/relationships" xmlns:p="http://schemas.openxmlformats.org/presentationml/2006/main">
+  <p:cSld>
+    <p:spTree>
+      <p:nvGrpSpPr>
+        <p:cNvPr id="1" name="">
+          <a:extLst>
+            <a:ext uri="{FF2B5EF4-FFF2-40B4-BE49-F238E27FC236}">
+              <a16:creationId xmlns:a16="http://schemas.microsoft.com/office/drawing/2014/main" xmlns="" id="{49DA7EAA-204E-2F90-E52A-6C83B9013025}"/>
+            </a:ext>
+          </a:extLst>
+        </p:cNvPr>
+        <p:cNvGrpSpPr/>
+        <p:nvPr/>
+      </p:nvGrpSpPr>
+      <p:grpSpPr>
+        <a:xfrm>
+          <a:off x="0" y="0"/>
+          <a:ext cx="0" cy="0"/>
+          <a:chOff x="0" y="0"/>
+          <a:chExt cx="0" cy="0"/>
+        </a:xfrm>
+      </p:grpSpPr>
+      <p:sp>
+        <p:nvSpPr>
+          <p:cNvPr id="5" name="TextBox 4">
+            <a:extLst>
+              <a:ext uri="{FF2B5EF4-FFF2-40B4-BE49-F238E27FC236}">
+                <a16:creationId xmlns:a16="http://schemas.microsoft.com/office/drawing/2014/main" xmlns="" id="{4715F932-2F2C-4A3F-7F16-1B13D352985A}"/>
+              </a:ext>
+            </a:extLst>
+          </p:cNvPr>
+          <p:cNvSpPr txBox="1"/>
+          <p:nvPr/>
+        </p:nvSpPr>
+        <p:spPr>
+          <a:xfrm>
+            <a:off x="302451" y="315453"/>
+            <a:ext cx="4944140" cy="369332"/>
+          </a:xfrm>
+          <a:prstGeom prst="rect">
+            <a:avLst/>
+          </a:prstGeom>
+          <a:noFill/>
+        </p:spPr>
+        <p:txBody>
+          <a:bodyPr wrap="square" rtlCol="0">
+            <a:spAutoFit/>
+          </a:bodyPr>
+          <a:lstStyle/>
+          <a:p>
+            <a:r>
+              <a:rPr lang="ko-KR" altLang="en-US" dirty="0"/>
+              <a:t>진행 계획</a:t>
+            </a:r>
+            <a:r>
+              <a:rPr lang="en-US" altLang="ko-KR" dirty="0"/>
+              <a:t> (</a:t>
+            </a:r>
+            <a:r>
+              <a:rPr lang="ko-KR" altLang="en-US" dirty="0" err="1"/>
+              <a:t>주차별</a:t>
+            </a:r>
+            <a:r>
+              <a:rPr lang="ko-KR" altLang="en-US" dirty="0"/>
+              <a:t> 목표</a:t>
+            </a:r>
+            <a:r>
+              <a:rPr lang="en-US" altLang="ko-KR" dirty="0"/>
+              <a:t>)</a:t>
+            </a:r>
+            <a:endParaRPr lang="en-US" altLang="ko-KR" dirty="0"/>
+          </a:p>
+        </p:txBody>
+      </p:sp>
+      <p:graphicFrame>
+        <p:nvGraphicFramePr>
+          <p:cNvPr id="2" name="표 1"/>
+          <p:cNvGraphicFramePr>
+            <a:graphicFrameLocks noGrp="1"/>
+          </p:cNvGraphicFramePr>
+          <p:nvPr>
+            <p:extLst>
+              <p:ext uri="{D42A27DB-BD31-4B8C-83A1-F6EECF244321}">
+                <p14:modId xmlns:p14="http://schemas.microsoft.com/office/powerpoint/2010/main" val="1121908827"/>
+              </p:ext>
+            </p:extLst>
+          </p:nvPr>
+        </p:nvGraphicFramePr>
+        <p:xfrm>
+          <a:off x="420856" y="870858"/>
+          <a:ext cx="11437314" cy="5538105"/>
+        </p:xfrm>
+        <a:graphic>
+          <a:graphicData uri="http://schemas.openxmlformats.org/drawingml/2006/table">
+            <a:tbl>
+              <a:tblPr firstRow="1" bandRow="1">
+                <a:tableStyleId>{5C22544A-7EE6-4342-B048-85BDC9FD1C3A}</a:tableStyleId>
+              </a:tblPr>
+              <a:tblGrid>
+                <a:gridCol w="799719"/>
+                <a:gridCol w="4251311"/>
+                <a:gridCol w="6386284"/>
+              </a:tblGrid>
+              <a:tr h="547281">
+                <a:tc>
+                  <a:txBody>
+                    <a:bodyPr/>
+                    <a:lstStyle/>
+                    <a:p>
+                      <a:pPr algn="ctr" latinLnBrk="1"/>
+                      <a:endParaRPr lang="ko-KR" altLang="en-US" sz="1400" b="0" dirty="0"/>
+                    </a:p>
+                  </a:txBody>
+                  <a:tcPr/>
+                </a:tc>
+                <a:tc>
+                  <a:txBody>
+                    <a:bodyPr/>
+                    <a:lstStyle/>
+                    <a:p>
+                      <a:pPr algn="ctr" latinLnBrk="1"/>
+                      <a:r>
+                        <a:rPr lang="ko-KR" altLang="en-US" sz="2000" b="0" dirty="0" smtClean="0"/>
+                        <a:t>작업 목표</a:t>
+                      </a:r>
+                      <a:endParaRPr lang="ko-KR" altLang="en-US" sz="2000" b="0" dirty="0"/>
+                    </a:p>
+                  </a:txBody>
+                  <a:tcPr/>
+                </a:tc>
+                <a:tc>
+                  <a:txBody>
+                    <a:bodyPr/>
+                    <a:lstStyle/>
+                    <a:p>
+                      <a:pPr algn="ctr" latinLnBrk="1"/>
+                      <a:r>
+                        <a:rPr lang="ko-KR" altLang="en-US" sz="2000" b="0" dirty="0" smtClean="0"/>
+                        <a:t>작업 세부 내용</a:t>
+                      </a:r>
+                      <a:endParaRPr lang="ko-KR" altLang="en-US" sz="2000" b="0" dirty="0"/>
+                    </a:p>
+                  </a:txBody>
+                  <a:tcPr/>
+                </a:tc>
+              </a:tr>
+              <a:tr h="627956">
+                <a:tc>
+                  <a:txBody>
+                    <a:bodyPr/>
+                    <a:lstStyle/>
+                    <a:p>
+                      <a:pPr algn="ctr" latinLnBrk="1"/>
+                      <a:r>
+                        <a:rPr lang="en-US" altLang="ko-KR" dirty="0" smtClean="0"/>
+                        <a:t>1</a:t>
+                      </a:r>
+                      <a:endParaRPr lang="ko-KR" altLang="en-US" dirty="0"/>
+                    </a:p>
+                  </a:txBody>
+                  <a:tcPr/>
+                </a:tc>
+                <a:tc>
+                  <a:txBody>
+                    <a:bodyPr/>
+                    <a:lstStyle/>
+                    <a:p>
+                      <a:pPr marL="0" marR="0" lvl="1" indent="0" algn="l" defTabSz="914400" rtl="0" eaLnBrk="1" fontAlgn="auto" latinLnBrk="1" hangingPunct="1">
+                        <a:lnSpc>
+                          <a:spcPct val="100000"/>
+                        </a:lnSpc>
+                        <a:spcBef>
+                          <a:spcPts val="0"/>
+                        </a:spcBef>
+                        <a:spcAft>
+                          <a:spcPts val="0"/>
+                        </a:spcAft>
+                        <a:buClrTx/>
+                        <a:buSzTx/>
+                        <a:buFontTx/>
+                        <a:buNone/>
+                        <a:tabLst/>
+                        <a:defRPr/>
+                      </a:pPr>
+                      <a:r>
+                        <a:rPr lang="ko-KR" altLang="en-US" sz="1600" dirty="0" smtClean="0"/>
+                        <a:t>미니엔진 기반 구성</a:t>
+                      </a:r>
+                      <a:endParaRPr lang="en-US" altLang="ko-KR" sz="1600" dirty="0" smtClean="0"/>
+                    </a:p>
+                  </a:txBody>
+                  <a:tcPr/>
+                </a:tc>
+                <a:tc>
+                  <a:txBody>
+                    <a:bodyPr/>
+                    <a:lstStyle/>
+                    <a:p>
+                      <a:pPr marL="0" indent="0" latinLnBrk="1">
+                        <a:buFontTx/>
+                        <a:buNone/>
+                      </a:pPr>
+                      <a:r>
+                        <a:rPr lang="ko-KR" altLang="en-US" sz="1600" dirty="0" smtClean="0"/>
+                        <a:t>미니엔진 파악</a:t>
+                      </a:r>
+                      <a:r>
+                        <a:rPr lang="en-US" altLang="ko-KR" sz="1600" dirty="0" smtClean="0"/>
+                        <a:t>, </a:t>
+                      </a:r>
+                      <a:r>
+                        <a:rPr lang="ko-KR" altLang="en-US" sz="1600" dirty="0" smtClean="0"/>
+                        <a:t>게임 기반 클래스 작성</a:t>
+                      </a:r>
+                      <a:r>
+                        <a:rPr lang="en-US" altLang="ko-KR" sz="1600" dirty="0" smtClean="0"/>
+                        <a:t>, </a:t>
+                      </a:r>
+                      <a:br>
+                        <a:rPr lang="en-US" altLang="ko-KR" sz="1600" dirty="0" smtClean="0"/>
+                      </a:br>
+                      <a:r>
+                        <a:rPr lang="en-US" altLang="ko-KR" sz="1600" dirty="0" err="1" smtClean="0"/>
+                        <a:t>fbx</a:t>
+                      </a:r>
+                      <a:r>
+                        <a:rPr lang="en-US" altLang="ko-KR" sz="1600" dirty="0" smtClean="0"/>
+                        <a:t> </a:t>
+                      </a:r>
+                      <a:r>
+                        <a:rPr lang="ko-KR" altLang="en-US" sz="1600" dirty="0" smtClean="0"/>
+                        <a:t>파일 </a:t>
+                      </a:r>
+                      <a:r>
+                        <a:rPr lang="ko-KR" altLang="en-US" sz="1600" dirty="0" err="1" smtClean="0"/>
+                        <a:t>파싱</a:t>
+                      </a:r>
+                      <a:r>
+                        <a:rPr lang="en-US" altLang="ko-KR" sz="1600" baseline="0" dirty="0" smtClean="0"/>
+                        <a:t>, </a:t>
+                      </a:r>
+                      <a:r>
+                        <a:rPr lang="ko-KR" altLang="en-US" sz="1600" baseline="0" dirty="0" smtClean="0"/>
+                        <a:t>씬 </a:t>
+                      </a:r>
+                      <a:r>
+                        <a:rPr lang="ko-KR" altLang="en-US" sz="1600" baseline="0" dirty="0" err="1" smtClean="0"/>
+                        <a:t>렌더링</a:t>
+                      </a:r>
+                      <a:r>
+                        <a:rPr lang="en-US" altLang="ko-KR" sz="1600" baseline="0" dirty="0" smtClean="0"/>
+                        <a:t>, </a:t>
+                      </a:r>
+                      <a:r>
+                        <a:rPr lang="ko-KR" altLang="en-US" sz="1600" baseline="0" dirty="0" smtClean="0"/>
+                        <a:t>애니메이션 재생</a:t>
+                      </a:r>
+                      <a:endParaRPr lang="ko-KR" altLang="en-US" sz="1600" dirty="0"/>
+                    </a:p>
+                  </a:txBody>
+                  <a:tcPr/>
+                </a:tc>
+              </a:tr>
+              <a:tr h="627956">
+                <a:tc>
+                  <a:txBody>
+                    <a:bodyPr/>
+                    <a:lstStyle/>
+                    <a:p>
+                      <a:pPr algn="ctr" latinLnBrk="1"/>
+                      <a:r>
+                        <a:rPr lang="en-US" altLang="ko-KR" dirty="0" smtClean="0"/>
+                        <a:t>2</a:t>
+                      </a:r>
+                      <a:endParaRPr lang="ko-KR" altLang="en-US" dirty="0"/>
+                    </a:p>
+                  </a:txBody>
+                  <a:tcPr/>
+                </a:tc>
+                <a:tc>
+                  <a:txBody>
+                    <a:bodyPr/>
+                    <a:lstStyle/>
+                    <a:p>
+                      <a:pPr latinLnBrk="1"/>
+                      <a:r>
+                        <a:rPr lang="ko-KR" altLang="en-US" sz="1600" dirty="0" smtClean="0"/>
+                        <a:t>애니메이션 시스템</a:t>
+                      </a:r>
+                      <a:r>
+                        <a:rPr lang="en-US" altLang="ko-KR" sz="1600" dirty="0" smtClean="0"/>
+                        <a:t>, </a:t>
+                      </a:r>
+                      <a:r>
+                        <a:rPr lang="ko-KR" altLang="en-US" sz="1600" dirty="0" smtClean="0"/>
+                        <a:t>물리엔진 적용</a:t>
+                      </a:r>
+                      <a:r>
+                        <a:rPr lang="en-US" altLang="ko-KR" sz="1600" dirty="0" smtClean="0"/>
+                        <a:t>,</a:t>
+                      </a:r>
+                    </a:p>
+                    <a:p>
+                      <a:pPr latinLnBrk="1"/>
+                      <a:r>
+                        <a:rPr lang="ko-KR" altLang="en-US" sz="1600" dirty="0" smtClean="0"/>
+                        <a:t>입력 바인딩</a:t>
+                      </a:r>
+                      <a:endParaRPr lang="ko-KR" altLang="en-US" sz="1600" dirty="0"/>
+                    </a:p>
+                  </a:txBody>
+                  <a:tcPr/>
+                </a:tc>
+                <a:tc>
+                  <a:txBody>
+                    <a:bodyPr/>
+                    <a:lstStyle/>
+                    <a:p>
+                      <a:pPr latinLnBrk="1"/>
+                      <a:r>
+                        <a:rPr lang="ko-KR" altLang="en-US" sz="1600" dirty="0" smtClean="0"/>
+                        <a:t>캐릭터 애니메이션 </a:t>
+                      </a:r>
+                      <a:r>
+                        <a:rPr lang="ko-KR" altLang="en-US" sz="1600" dirty="0" err="1" smtClean="0"/>
+                        <a:t>블렌드</a:t>
+                      </a:r>
+                      <a:r>
+                        <a:rPr lang="en-US" altLang="ko-KR" sz="1600" dirty="0" smtClean="0"/>
+                        <a:t>, </a:t>
+                      </a:r>
+                      <a:r>
+                        <a:rPr lang="ko-KR" altLang="en-US" sz="1600" dirty="0" smtClean="0"/>
+                        <a:t>애니메이션 </a:t>
+                      </a:r>
+                      <a:r>
+                        <a:rPr lang="ko-KR" altLang="en-US" sz="1600" dirty="0" err="1" smtClean="0"/>
+                        <a:t>상태머신</a:t>
+                      </a:r>
+                      <a:r>
+                        <a:rPr lang="en-US" altLang="ko-KR" sz="1600" dirty="0" smtClean="0"/>
+                        <a:t>,</a:t>
+                      </a:r>
+                    </a:p>
+                    <a:p>
+                      <a:pPr latinLnBrk="1"/>
+                      <a:r>
+                        <a:rPr lang="ko-KR" altLang="en-US" sz="1600" dirty="0" smtClean="0"/>
+                        <a:t>물리엔진</a:t>
+                      </a:r>
+                      <a:r>
+                        <a:rPr lang="en-US" altLang="ko-KR" sz="1600" dirty="0" smtClean="0"/>
+                        <a:t>(PhysX) </a:t>
+                      </a:r>
+                      <a:r>
+                        <a:rPr lang="ko-KR" altLang="en-US" sz="1600" dirty="0" smtClean="0"/>
+                        <a:t>적용</a:t>
+                      </a:r>
+                      <a:r>
+                        <a:rPr lang="en-US" altLang="ko-KR" sz="1600" dirty="0" smtClean="0"/>
+                        <a:t>, </a:t>
+                      </a:r>
+                      <a:r>
+                        <a:rPr lang="ko-KR" altLang="en-US" sz="1600" dirty="0" smtClean="0"/>
+                        <a:t>캐릭터 입력 바인딩</a:t>
+                      </a:r>
+                      <a:endParaRPr lang="ko-KR" altLang="en-US" sz="1600" dirty="0"/>
+                    </a:p>
+                  </a:txBody>
+                  <a:tcPr/>
+                </a:tc>
+              </a:tr>
+              <a:tr h="627956">
+                <a:tc>
+                  <a:txBody>
+                    <a:bodyPr/>
+                    <a:lstStyle/>
+                    <a:p>
+                      <a:pPr algn="ctr" latinLnBrk="1"/>
+                      <a:r>
+                        <a:rPr lang="en-US" altLang="ko-KR" dirty="0" smtClean="0"/>
+                        <a:t>3</a:t>
+                      </a:r>
+                      <a:endParaRPr lang="ko-KR" altLang="en-US" dirty="0"/>
+                    </a:p>
+                  </a:txBody>
+                  <a:tcPr/>
+                </a:tc>
+                <a:tc>
+                  <a:txBody>
+                    <a:bodyPr/>
+                    <a:lstStyle/>
+                    <a:p>
+                      <a:pPr latinLnBrk="1"/>
+                      <a:r>
+                        <a:rPr lang="ko-KR" altLang="en-US" sz="1600" dirty="0" smtClean="0"/>
+                        <a:t>씬 배치</a:t>
+                      </a:r>
+                      <a:r>
+                        <a:rPr lang="en-US" altLang="ko-KR" sz="1600" dirty="0" smtClean="0"/>
+                        <a:t>, </a:t>
+                      </a:r>
+                      <a:r>
+                        <a:rPr lang="ko-KR" altLang="en-US" sz="1600" dirty="0" smtClean="0"/>
+                        <a:t>캐릭터</a:t>
+                      </a:r>
+                      <a:r>
+                        <a:rPr lang="en-US" altLang="ko-KR" sz="1600" dirty="0" smtClean="0"/>
+                        <a:t> </a:t>
+                      </a:r>
+                      <a:r>
+                        <a:rPr lang="ko-KR" altLang="en-US" sz="1600" dirty="0" err="1" smtClean="0"/>
+                        <a:t>파쿠르</a:t>
+                      </a:r>
+                      <a:r>
+                        <a:rPr lang="ko-KR" altLang="en-US" sz="1600" dirty="0" smtClean="0"/>
+                        <a:t> 애니메이션 적용</a:t>
+                      </a:r>
+                      <a:endParaRPr lang="ko-KR" altLang="en-US" sz="1600" dirty="0"/>
+                    </a:p>
+                  </a:txBody>
+                  <a:tcPr/>
+                </a:tc>
+                <a:tc>
+                  <a:txBody>
+                    <a:bodyPr/>
+                    <a:lstStyle/>
+                    <a:p>
+                      <a:pPr latinLnBrk="1"/>
+                      <a:r>
+                        <a:rPr lang="ko-KR" altLang="en-US" sz="1600" dirty="0" smtClean="0"/>
+                        <a:t>씬</a:t>
+                      </a:r>
+                      <a:r>
+                        <a:rPr lang="en-US" altLang="ko-KR" sz="1600" baseline="0" dirty="0" smtClean="0"/>
+                        <a:t> </a:t>
+                      </a:r>
+                      <a:r>
+                        <a:rPr lang="ko-KR" altLang="en-US" sz="1600" baseline="0" dirty="0" smtClean="0"/>
+                        <a:t>데이터 직렬화 </a:t>
+                      </a:r>
+                      <a:r>
+                        <a:rPr lang="en-US" altLang="ko-KR" sz="1600" baseline="0" dirty="0" smtClean="0"/>
+                        <a:t>(</a:t>
+                      </a:r>
+                      <a:r>
+                        <a:rPr lang="ko-KR" altLang="en-US" sz="1600" baseline="0" dirty="0" smtClean="0"/>
+                        <a:t>장애물 배치 정보</a:t>
+                      </a:r>
+                      <a:r>
+                        <a:rPr lang="en-US" altLang="ko-KR" sz="1600" baseline="0" dirty="0" smtClean="0"/>
+                        <a:t>),</a:t>
+                      </a:r>
+                    </a:p>
+                    <a:p>
+                      <a:pPr latinLnBrk="1"/>
+                      <a:r>
+                        <a:rPr lang="ko-KR" altLang="en-US" sz="1600" baseline="0" dirty="0" smtClean="0"/>
+                        <a:t>캐릭터 </a:t>
+                      </a:r>
+                      <a:r>
+                        <a:rPr lang="en-US" altLang="ko-KR" sz="1600" baseline="0" dirty="0" smtClean="0"/>
+                        <a:t>– </a:t>
+                      </a:r>
+                      <a:r>
+                        <a:rPr lang="ko-KR" altLang="en-US" sz="1600" baseline="0" dirty="0" smtClean="0"/>
+                        <a:t>장애물 인식 및 </a:t>
+                      </a:r>
+                      <a:r>
+                        <a:rPr lang="ko-KR" altLang="en-US" sz="1600" baseline="0" dirty="0" err="1" smtClean="0"/>
+                        <a:t>파쿠르</a:t>
+                      </a:r>
+                      <a:r>
+                        <a:rPr lang="ko-KR" altLang="en-US" sz="1600" baseline="0" dirty="0" smtClean="0"/>
+                        <a:t> 애니메이션 선택 및 출력</a:t>
+                      </a:r>
+                      <a:endParaRPr lang="ko-KR" altLang="en-US" sz="1600" dirty="0"/>
+                    </a:p>
+                  </a:txBody>
+                  <a:tcPr/>
+                </a:tc>
+              </a:tr>
+              <a:tr h="627956">
+                <a:tc>
+                  <a:txBody>
+                    <a:bodyPr/>
+                    <a:lstStyle/>
+                    <a:p>
+                      <a:pPr algn="ctr" latinLnBrk="1"/>
+                      <a:r>
+                        <a:rPr lang="en-US" altLang="ko-KR" dirty="0" smtClean="0"/>
+                        <a:t>4</a:t>
+                      </a:r>
+                      <a:endParaRPr lang="ko-KR" altLang="en-US" dirty="0"/>
+                    </a:p>
+                  </a:txBody>
+                  <a:tcPr/>
+                </a:tc>
+                <a:tc>
+                  <a:txBody>
+                    <a:bodyPr/>
+                    <a:lstStyle/>
+                    <a:p>
+                      <a:pPr latinLnBrk="1"/>
+                      <a:r>
+                        <a:rPr lang="ko-KR" altLang="en-US" sz="1600" dirty="0" err="1" smtClean="0"/>
+                        <a:t>파쿠르</a:t>
+                      </a:r>
+                      <a:r>
+                        <a:rPr lang="ko-KR" altLang="en-US" sz="1600" dirty="0" smtClean="0"/>
+                        <a:t> 시스템 </a:t>
+                      </a:r>
+                      <a:r>
+                        <a:rPr lang="ko-KR" altLang="en-US" sz="1600" dirty="0" err="1" smtClean="0"/>
+                        <a:t>프로토타입</a:t>
+                      </a:r>
+                      <a:endParaRPr lang="ko-KR" altLang="en-US" sz="1600" dirty="0"/>
+                    </a:p>
+                  </a:txBody>
+                  <a:tcPr/>
+                </a:tc>
+                <a:tc>
+                  <a:txBody>
+                    <a:bodyPr/>
+                    <a:lstStyle/>
+                    <a:p>
+                      <a:pPr latinLnBrk="1"/>
+                      <a:endParaRPr lang="ko-KR" altLang="en-US" sz="1600" dirty="0"/>
+                    </a:p>
+                  </a:txBody>
+                  <a:tcPr/>
+                </a:tc>
+              </a:tr>
+              <a:tr h="627956">
+                <a:tc>
+                  <a:txBody>
+                    <a:bodyPr/>
+                    <a:lstStyle/>
+                    <a:p>
+                      <a:pPr algn="ctr" latinLnBrk="1"/>
+                      <a:r>
+                        <a:rPr lang="en-US" altLang="ko-KR" dirty="0" smtClean="0"/>
+                        <a:t>5</a:t>
+                      </a:r>
+                      <a:endParaRPr lang="ko-KR" altLang="en-US" dirty="0"/>
+                    </a:p>
+                  </a:txBody>
+                  <a:tcPr/>
+                </a:tc>
+                <a:tc>
+                  <a:txBody>
+                    <a:bodyPr/>
+                    <a:lstStyle/>
+                    <a:p>
+                      <a:pPr latinLnBrk="1"/>
+                      <a:r>
+                        <a:rPr lang="ko-KR" altLang="en-US" sz="1600" dirty="0" smtClean="0"/>
+                        <a:t>미흡 사항 보완</a:t>
+                      </a:r>
+                      <a:r>
+                        <a:rPr lang="en-US" altLang="ko-KR" sz="1600" dirty="0" smtClean="0"/>
+                        <a:t>,</a:t>
+                      </a:r>
+                      <a:r>
+                        <a:rPr lang="ko-KR" altLang="en-US" sz="1600" dirty="0" smtClean="0"/>
+                        <a:t> 애니메이션 </a:t>
+                      </a:r>
+                      <a:r>
+                        <a:rPr lang="en-US" altLang="ko-KR" sz="1600" dirty="0" smtClean="0"/>
+                        <a:t>IK </a:t>
+                      </a:r>
+                      <a:r>
+                        <a:rPr lang="ko-KR" altLang="en-US" sz="1600" dirty="0" smtClean="0"/>
+                        <a:t>적용</a:t>
+                      </a:r>
+                      <a:endParaRPr lang="ko-KR" altLang="en-US" sz="1600" dirty="0"/>
+                    </a:p>
+                  </a:txBody>
+                  <a:tcPr/>
+                </a:tc>
+                <a:tc>
+                  <a:txBody>
+                    <a:bodyPr/>
+                    <a:lstStyle/>
+                    <a:p>
+                      <a:pPr latinLnBrk="1"/>
+                      <a:endParaRPr lang="ko-KR" altLang="en-US" sz="1600" dirty="0"/>
+                    </a:p>
+                  </a:txBody>
+                  <a:tcPr/>
+                </a:tc>
+              </a:tr>
+              <a:tr h="627956">
+                <a:tc>
+                  <a:txBody>
+                    <a:bodyPr/>
+                    <a:lstStyle/>
+                    <a:p>
+                      <a:pPr algn="ctr" latinLnBrk="1"/>
+                      <a:r>
+                        <a:rPr lang="en-US" altLang="ko-KR" dirty="0" smtClean="0"/>
+                        <a:t>6</a:t>
+                      </a:r>
+                      <a:endParaRPr lang="ko-KR" altLang="en-US" dirty="0"/>
+                    </a:p>
+                  </a:txBody>
+                  <a:tcPr/>
+                </a:tc>
+                <a:tc>
+                  <a:txBody>
+                    <a:bodyPr/>
+                    <a:lstStyle/>
+                    <a:p>
+                      <a:pPr latinLnBrk="1"/>
+                      <a:r>
+                        <a:rPr lang="ko-KR" altLang="en-US" sz="1600" dirty="0" smtClean="0"/>
+                        <a:t>복잡한 지형 내 </a:t>
+                      </a:r>
+                      <a:r>
+                        <a:rPr lang="ko-KR" altLang="en-US" sz="1600" dirty="0" err="1" smtClean="0"/>
+                        <a:t>파쿠르</a:t>
+                      </a:r>
+                      <a:r>
+                        <a:rPr lang="ko-KR" altLang="en-US" sz="1600" dirty="0" smtClean="0"/>
+                        <a:t> 시스템</a:t>
+                      </a:r>
+                      <a:endParaRPr lang="ko-KR" altLang="en-US" sz="1600" dirty="0"/>
+                    </a:p>
+                  </a:txBody>
+                  <a:tcPr/>
+                </a:tc>
+                <a:tc>
+                  <a:txBody>
+                    <a:bodyPr/>
+                    <a:lstStyle/>
+                    <a:p>
+                      <a:pPr latinLnBrk="1"/>
+                      <a:endParaRPr lang="ko-KR" altLang="en-US" sz="1600" dirty="0"/>
+                    </a:p>
+                  </a:txBody>
+                  <a:tcPr/>
+                </a:tc>
+              </a:tr>
+              <a:tr h="611544">
+                <a:tc>
+                  <a:txBody>
+                    <a:bodyPr/>
+                    <a:lstStyle/>
+                    <a:p>
+                      <a:pPr algn="ctr" latinLnBrk="1"/>
+                      <a:r>
+                        <a:rPr lang="en-US" altLang="ko-KR" dirty="0" smtClean="0"/>
+                        <a:t>7</a:t>
+                      </a:r>
+                      <a:endParaRPr lang="ko-KR" altLang="en-US" dirty="0"/>
+                    </a:p>
+                  </a:txBody>
+                  <a:tcPr/>
+                </a:tc>
+                <a:tc>
+                  <a:txBody>
+                    <a:bodyPr/>
+                    <a:lstStyle/>
+                    <a:p>
+                      <a:pPr latinLnBrk="1"/>
+                      <a:endParaRPr lang="ko-KR" altLang="en-US" sz="1600" dirty="0"/>
+                    </a:p>
+                  </a:txBody>
+                  <a:tcPr/>
+                </a:tc>
+                <a:tc>
+                  <a:txBody>
+                    <a:bodyPr/>
+                    <a:lstStyle/>
+                    <a:p>
+                      <a:pPr latinLnBrk="1"/>
+                      <a:endParaRPr lang="ko-KR" altLang="en-US" sz="1600" dirty="0"/>
+                    </a:p>
+                  </a:txBody>
+                  <a:tcPr/>
+                </a:tc>
+              </a:tr>
+              <a:tr h="611544">
+                <a:tc>
+                  <a:txBody>
+                    <a:bodyPr/>
+                    <a:lstStyle/>
+                    <a:p>
+                      <a:pPr algn="ctr" latinLnBrk="1"/>
+                      <a:r>
+                        <a:rPr lang="en-US" altLang="ko-KR" dirty="0" smtClean="0"/>
+                        <a:t>8</a:t>
+                      </a:r>
+                      <a:endParaRPr lang="ko-KR" altLang="en-US" dirty="0"/>
+                    </a:p>
+                  </a:txBody>
+                  <a:tcPr/>
+                </a:tc>
+                <a:tc>
+                  <a:txBody>
+                    <a:bodyPr/>
+                    <a:lstStyle/>
+                    <a:p>
+                      <a:pPr latinLnBrk="1"/>
+                      <a:endParaRPr lang="ko-KR" altLang="en-US" sz="1600" dirty="0"/>
+                    </a:p>
+                  </a:txBody>
+                  <a:tcPr/>
+                </a:tc>
+                <a:tc>
+                  <a:txBody>
+                    <a:bodyPr/>
+                    <a:lstStyle/>
+                    <a:p>
+                      <a:pPr latinLnBrk="1"/>
+                      <a:endParaRPr lang="ko-KR" altLang="en-US" sz="1600" dirty="0"/>
+                    </a:p>
+                  </a:txBody>
+                  <a:tcPr/>
+                </a:tc>
+              </a:tr>
+            </a:tbl>
+          </a:graphicData>
+        </a:graphic>
+      </p:graphicFrame>
+    </p:spTree>
+    <p:extLst>
+      <p:ext uri="{BB962C8B-B14F-4D97-AF65-F5344CB8AC3E}">
+        <p14:creationId xmlns:p14="http://schemas.microsoft.com/office/powerpoint/2010/main" val="43933111"/>
+      </p:ext>
+    </p:extLst>
+  </p:cSld>
+  <p:clrMapOvr>
+    <a:masterClrMapping/>
+  </p:clrMapOvr>
+  <p:timing>
+    <p:tnLst>
+      <p:par>
+        <p:cTn id="1" dur="indefinite" restart="never" nodeType="tmRoot"/>
+      </p:par>
+    </p:tnLst>
+  </p:timing>
 </p:sld>
 </file>
 
@@ -3861,4 +8311,265 @@
     </a:ext>
   </a:extLst>
 </a:theme>
+</file>
+
+<file path=ppt/theme/theme2.xml><?xml version="1.0" encoding="utf-8"?>
+<a:theme xmlns:a="http://schemas.openxmlformats.org/drawingml/2006/main" name="Office 테마">
+  <a:themeElements>
+    <a:clrScheme name="Office">
+      <a:dk1>
+        <a:sysClr val="windowText" lastClr="000000"/>
+      </a:dk1>
+      <a:lt1>
+        <a:sysClr val="window" lastClr="FFFFFF"/>
+      </a:lt1>
+      <a:dk2>
+        <a:srgbClr val="44546A"/>
+      </a:dk2>
+      <a:lt2>
+        <a:srgbClr val="E7E6E6"/>
+      </a:lt2>
+      <a:accent1>
+        <a:srgbClr val="5B9BD5"/>
+      </a:accent1>
+      <a:accent2>
+        <a:srgbClr val="ED7D31"/>
+      </a:accent2>
+      <a:accent3>
+        <a:srgbClr val="A5A5A5"/>
+      </a:accent3>
+      <a:accent4>
+        <a:srgbClr val="FFC000"/>
+      </a:accent4>
+      <a:accent5>
+        <a:srgbClr val="4472C4"/>
+      </a:accent5>
+      <a:accent6>
+        <a:srgbClr val="70AD47"/>
+      </a:accent6>
+      <a:hlink>
+        <a:srgbClr val="0563C1"/>
+      </a:hlink>
+      <a:folHlink>
+        <a:srgbClr val="954F72"/>
+      </a:folHlink>
+    </a:clrScheme>
+    <a:fontScheme name="Office">
+      <a:majorFont>
+        <a:latin typeface="맑은 고딕" panose="020F0302020204030204"/>
+        <a:ea typeface=""/>
+        <a:cs typeface=""/>
+        <a:font script="Jpan" typeface="ＭＳ Ｐゴシック"/>
+        <a:font script="Hang" typeface="맑은 고딕"/>
+        <a:font script="Hans" typeface="宋体"/>
+        <a:font script="Hant" typeface="新細明體"/>
+        <a:font script="Arab" typeface="Times New Roman"/>
+        <a:font script="Hebr" typeface="Times New Roman"/>
+        <a:font script="Thai" typeface="Angsana New"/>
+        <a:font script="Ethi" typeface="Nyala"/>
+        <a:font script="Beng" typeface="Vrinda"/>
+        <a:font script="Gujr" typeface="Shruti"/>
+        <a:font script="Khmr" typeface="MoolBoran"/>
+        <a:font script="Knda" typeface="Tunga"/>
+        <a:font script="Guru" typeface="Raavi"/>
+        <a:font script="Cans" typeface="Euphemia"/>
+        <a:font script="Cher" typeface="Plantagenet Cherokee"/>
+        <a:font script="Yiii" typeface="Microsoft Yi Baiti"/>
+        <a:font script="Tibt" typeface="Microsoft Himalaya"/>
+        <a:font script="Thaa" typeface="MV Boli"/>
+        <a:font script="Deva" typeface="Mangal"/>
+        <a:font script="Telu" typeface="Gautami"/>
+        <a:font script="Taml" typeface="Latha"/>
+        <a:font script="Syrc" typeface="Estrangelo Edessa"/>
+        <a:font script="Orya" typeface="Kalinga"/>
+        <a:font script="Mlym" typeface="Kartika"/>
+        <a:font script="Laoo" typeface="DokChampa"/>
+        <a:font script="Sinh" typeface="Iskoola Pota"/>
+        <a:font script="Mong" typeface="Mongolian Baiti"/>
+        <a:font script="Viet" typeface="Times New Roman"/>
+        <a:font script="Uigh" typeface="Microsoft Uighur"/>
+        <a:font script="Geor" typeface="Sylfaen"/>
+      </a:majorFont>
+      <a:minorFont>
+        <a:latin typeface="맑은 고딕" panose="020F0502020204030204"/>
+        <a:ea typeface=""/>
+        <a:cs typeface=""/>
+        <a:font script="Jpan" typeface="ＭＳ Ｐゴシック"/>
+        <a:font script="Hang" typeface="맑은 고딕"/>
+        <a:font script="Hans" typeface="宋体"/>
+        <a:font script="Hant" typeface="新細明體"/>
+        <a:font script="Arab" typeface="Arial"/>
+        <a:font script="Hebr" typeface="Arial"/>
+        <a:font script="Thai" typeface="Cordia New"/>
+        <a:font script="Ethi" typeface="Nyala"/>
+        <a:font script="Beng" typeface="Vrinda"/>
+        <a:font script="Gujr" typeface="Shruti"/>
+        <a:font script="Khmr" typeface="DaunPenh"/>
+        <a:font script="Knda" typeface="Tunga"/>
+        <a:font script="Guru" typeface="Raavi"/>
+        <a:font script="Cans" typeface="Euphemia"/>
+        <a:font script="Cher" typeface="Plantagenet Cherokee"/>
+        <a:font script="Yiii" typeface="Microsoft Yi Baiti"/>
+        <a:font script="Tibt" typeface="Microsoft Himalaya"/>
+        <a:font script="Thaa" typeface="MV Boli"/>
+        <a:font script="Deva" typeface="Mangal"/>
+        <a:font script="Telu" typeface="Gautami"/>
+        <a:font script="Taml" typeface="Latha"/>
+        <a:font script="Syrc" typeface="Estrangelo Edessa"/>
+        <a:font script="Orya" typeface="Kalinga"/>
+        <a:font script="Mlym" typeface="Kartika"/>
+        <a:font script="Laoo" typeface="DokChampa"/>
+        <a:font script="Sinh" typeface="Iskoola Pota"/>
+        <a:font script="Mong" typeface="Mongolian Baiti"/>
+        <a:font script="Viet" typeface="Arial"/>
+        <a:font script="Uigh" typeface="Microsoft Uighur"/>
+        <a:font script="Geor" typeface="Sylfaen"/>
+      </a:minorFont>
+    </a:fontScheme>
+    <a:fmtScheme name="Office">
+      <a:fillStyleLst>
+        <a:solidFill>
+          <a:schemeClr val="phClr"/>
+        </a:solidFill>
+        <a:gradFill rotWithShape="1">
+          <a:gsLst>
+            <a:gs pos="0">
+              <a:schemeClr val="phClr">
+                <a:lumMod val="110000"/>
+                <a:satMod val="105000"/>
+                <a:tint val="67000"/>
+              </a:schemeClr>
+            </a:gs>
+            <a:gs pos="50000">
+              <a:schemeClr val="phClr">
+                <a:lumMod val="105000"/>
+                <a:satMod val="103000"/>
+                <a:tint val="73000"/>
+              </a:schemeClr>
+            </a:gs>
+            <a:gs pos="100000">
+              <a:schemeClr val="phClr">
+                <a:lumMod val="105000"/>
+                <a:satMod val="109000"/>
+                <a:tint val="81000"/>
+              </a:schemeClr>
+            </a:gs>
+          </a:gsLst>
+          <a:lin ang="5400000" scaled="0"/>
+        </a:gradFill>
+        <a:gradFill rotWithShape="1">
+          <a:gsLst>
+            <a:gs pos="0">
+              <a:schemeClr val="phClr">
+                <a:satMod val="103000"/>
+                <a:lumMod val="102000"/>
+                <a:tint val="94000"/>
+              </a:schemeClr>
+            </a:gs>
+            <a:gs pos="50000">
+              <a:schemeClr val="phClr">
+                <a:satMod val="110000"/>
+                <a:lumMod val="100000"/>
+                <a:shade val="100000"/>
+              </a:schemeClr>
+            </a:gs>
+            <a:gs pos="100000">
+              <a:schemeClr val="phClr">
+                <a:lumMod val="99000"/>
+                <a:satMod val="120000"/>
+                <a:shade val="78000"/>
+              </a:schemeClr>
+            </a:gs>
+          </a:gsLst>
+          <a:lin ang="5400000" scaled="0"/>
+        </a:gradFill>
+      </a:fillStyleLst>
+      <a:lnStyleLst>
+        <a:ln w="6350" cap="flat" cmpd="sng" algn="ctr">
+          <a:solidFill>
+            <a:schemeClr val="phClr"/>
+          </a:solidFill>
+          <a:prstDash val="solid"/>
+          <a:miter lim="800000"/>
+        </a:ln>
+        <a:ln w="12700" cap="flat" cmpd="sng" algn="ctr">
+          <a:solidFill>
+            <a:schemeClr val="phClr"/>
+          </a:solidFill>
+          <a:prstDash val="solid"/>
+          <a:miter lim="800000"/>
+        </a:ln>
+        <a:ln w="19050" cap="flat" cmpd="sng" algn="ctr">
+          <a:solidFill>
+            <a:schemeClr val="phClr"/>
+          </a:solidFill>
+          <a:prstDash val="solid"/>
+          <a:miter lim="800000"/>
+        </a:ln>
+      </a:lnStyleLst>
+      <a:effectStyleLst>
+        <a:effectStyle>
+          <a:effectLst/>
+        </a:effectStyle>
+        <a:effectStyle>
+          <a:effectLst/>
+        </a:effectStyle>
+        <a:effectStyle>
+          <a:effectLst>
+            <a:outerShdw blurRad="57150" dist="19050" dir="5400000" algn="ctr" rotWithShape="0">
+              <a:srgbClr val="000000">
+                <a:alpha val="63000"/>
+              </a:srgbClr>
+            </a:outerShdw>
+          </a:effectLst>
+        </a:effectStyle>
+      </a:effectStyleLst>
+      <a:bgFillStyleLst>
+        <a:solidFill>
+          <a:schemeClr val="phClr"/>
+        </a:solidFill>
+        <a:solidFill>
+          <a:schemeClr val="phClr">
+            <a:tint val="95000"/>
+            <a:satMod val="170000"/>
+          </a:schemeClr>
+        </a:solidFill>
+        <a:gradFill rotWithShape="1">
+          <a:gsLst>
+            <a:gs pos="0">
+              <a:schemeClr val="phClr">
+                <a:tint val="93000"/>
+                <a:satMod val="150000"/>
+                <a:shade val="98000"/>
+                <a:lumMod val="102000"/>
+              </a:schemeClr>
+            </a:gs>
+            <a:gs pos="50000">
+              <a:schemeClr val="phClr">
+                <a:tint val="98000"/>
+                <a:satMod val="130000"/>
+                <a:shade val="90000"/>
+                <a:lumMod val="103000"/>
+              </a:schemeClr>
+            </a:gs>
+            <a:gs pos="100000">
+              <a:schemeClr val="phClr">
+                <a:shade val="63000"/>
+                <a:satMod val="120000"/>
+              </a:schemeClr>
+            </a:gs>
+          </a:gsLst>
+          <a:lin ang="5400000" scaled="0"/>
+        </a:gradFill>
+      </a:bgFillStyleLst>
+    </a:fmtScheme>
+  </a:themeElements>
+  <a:objectDefaults/>
+  <a:extraClrSchemeLst/>
+  <a:extLst>
+    <a:ext uri="{05A4C25C-085E-4340-85A3-A5531E510DB2}">
+      <thm15:themeFamily xmlns:thm15="http://schemas.microsoft.com/office/thememl/2012/main" name="Office Theme" id="{62F939B6-93AF-4DB8-9C6B-D6C7DFDC589F}" vid="{4A3C46E8-61CC-4603-A589-7422A47A8E4A}"/>
+    </a:ext>
+  </a:extLst>
+</a:theme>
 </file>